--- a/docs/reference/task8-analysis.pptx
+++ b/docs/reference/task8-analysis.pptx
@@ -5,7 +5,7 @@
     <p:sldMasterId id="2147483648" r:id="rId1"/>
   </p:sldMasterIdLst>
   <p:notesMasterIdLst>
-    <p:notesMasterId r:id="rId15"/>
+    <p:notesMasterId r:id="rId20"/>
   </p:notesMasterIdLst>
   <p:sldIdLst>
     <p:sldId id="256" r:id="rId3"/>
@@ -19,12 +19,17 @@
     <p:sldId id="2884" r:id="rId11"/>
     <p:sldId id="2879" r:id="rId12"/>
     <p:sldId id="2878" r:id="rId13"/>
-    <p:sldId id="1364" r:id="rId14"/>
+    <p:sldId id="2885" r:id="rId14"/>
+    <p:sldId id="2888" r:id="rId15"/>
+    <p:sldId id="2889" r:id="rId16"/>
+    <p:sldId id="2886" r:id="rId17"/>
+    <p:sldId id="2887" r:id="rId18"/>
+    <p:sldId id="1364" r:id="rId19"/>
   </p:sldIdLst>
   <p:sldSz cx="12192000" cy="6858000"/>
   <p:notesSz cx="6858000" cy="9144000"/>
   <p:custDataLst>
-    <p:tags r:id="rId20"/>
+    <p:tags r:id="rId25"/>
   </p:custDataLst>
   <p:defaultTextStyle>
     <a:defPPr>
@@ -127,6 +132,10 @@
         <p14:section name="默认节" id="{517D26F8-AD37-49A3-ACA4-FF28468FA954}">
           <p14:sldIdLst>
             <p14:sldId id="256"/>
+          </p14:sldIdLst>
+        </p14:section>
+        <p14:section name="Stage1" id="{50ba1f04-2b5e-4a9c-833c-f7de9b6eeca5}">
+          <p14:sldIdLst>
             <p14:sldId id="2848"/>
             <p14:sldId id="2849"/>
             <p14:sldId id="2877"/>
@@ -137,6 +146,15 @@
             <p14:sldId id="2884"/>
             <p14:sldId id="2879"/>
             <p14:sldId id="2878"/>
+          </p14:sldIdLst>
+        </p14:section>
+        <p14:section name="Stage2" id="{ce8eefd7-b967-40e1-bed1-d57889810434}">
+          <p14:sldIdLst>
+            <p14:sldId id="2885"/>
+            <p14:sldId id="2888"/>
+            <p14:sldId id="2889"/>
+            <p14:sldId id="2886"/>
+            <p14:sldId id="2887"/>
             <p14:sldId id="1364"/>
           </p14:sldIdLst>
         </p14:section>
@@ -144,7 +162,7 @@
     </p:ext>
     <p:ext uri="{EFAFB233-063F-42B5-8137-9DF3F51BA10A}">
       <p15:sldGuideLst xmlns:p15="http://schemas.microsoft.com/office/powerpoint/2012/main">
-        <p15:guide id="1" orient="horz" pos="2112" userDrawn="1">
+        <p15:guide id="1" orient="horz" pos="2092" userDrawn="1">
           <p15:clr>
             <a:srgbClr val="A4A3A4"/>
           </p15:clr>
@@ -31496,6 +31514,5341 @@
         <p:cNvGrpSpPr/>
         <p:nvPr/>
       </p:nvGrpSpPr>
+      <p:grpSpPr/>
+      <p:sp>
+        <p:nvSpPr>
+          <p:cNvPr id="2" name="Title 1"/>
+          <p:cNvSpPr>
+            <a:spLocks noGrp="1"/>
+          </p:cNvSpPr>
+          <p:nvPr>
+            <p:ph type="title"/>
+          </p:nvPr>
+        </p:nvSpPr>
+        <p:spPr/>
+        <p:txBody>
+          <a:bodyPr/>
+          <a:p>
+            <a:r>
+              <a:t>现状</a:t>
+            </a:r>
+          </a:p>
+        </p:txBody>
+      </p:sp>
+      <p:sp>
+        <p:nvSpPr>
+          <p:cNvPr id="4" name="Text Box 3"/>
+          <p:cNvSpPr txBox="1"/>
+          <p:nvPr/>
+        </p:nvSpPr>
+        <p:spPr>
+          <a:xfrm>
+            <a:off x="470535" y="968375"/>
+            <a:ext cx="10888980" cy="5146040"/>
+          </a:xfrm>
+          <a:prstGeom prst="rect">
+            <a:avLst/>
+          </a:prstGeom>
+          <a:noFill/>
+        </p:spPr>
+        <p:txBody>
+          <a:bodyPr wrap="square" rtlCol="0">
+            <a:noAutofit/>
+          </a:bodyPr>
+          <a:p>
+            <a:pPr marL="342900" indent="-342900" algn="l">
+              <a:lnSpc>
+                <a:spcPct val="125000"/>
+              </a:lnSpc>
+              <a:spcBef>
+                <a:spcPts val="0"/>
+              </a:spcBef>
+              <a:spcAft>
+                <a:spcPts val="0"/>
+              </a:spcAft>
+              <a:buClrTx/>
+              <a:buSzTx/>
+              <a:buFont typeface="Wingdings" panose="05000000000000000000" charset="0"/>
+              <a:buChar char="l"/>
+            </a:pPr>
+            <a:r>
+              <a:rPr lang="zh-CN" altLang="en-US" sz="2000" b="1" dirty="0">
+                <a:solidFill>
+                  <a:srgbClr val="103380"/>
+                </a:solidFill>
+                <a:latin typeface="微软雅黑" panose="020B0503020204020204" pitchFamily="34" charset="-122"/>
+                <a:ea typeface="微软雅黑" panose="020B0503020204020204" pitchFamily="34" charset="-122"/>
+                <a:sym typeface="+mn-ea"/>
+              </a:rPr>
+              <a:t>基础任务</a:t>
+            </a:r>
+            <a:r>
+              <a:rPr lang="zh-CN" altLang="en-US" sz="2000" b="1" dirty="0">
+                <a:solidFill>
+                  <a:srgbClr val="103380"/>
+                </a:solidFill>
+                <a:latin typeface="微软雅黑" panose="020B0503020204020204" pitchFamily="34" charset="-122"/>
+                <a:ea typeface="微软雅黑" panose="020B0503020204020204" pitchFamily="34" charset="-122"/>
+                <a:sym typeface="+mn-ea"/>
+              </a:rPr>
+              <a:t>的完整闭环已跑通。单表问答，单文档问答等</a:t>
+            </a:r>
+            <a:endParaRPr lang="zh-CN" altLang="en-US" sz="2000" b="1" dirty="0">
+              <a:solidFill>
+                <a:srgbClr val="103380"/>
+              </a:solidFill>
+              <a:latin typeface="微软雅黑" panose="020B0503020204020204" pitchFamily="34" charset="-122"/>
+              <a:ea typeface="微软雅黑" panose="020B0503020204020204" pitchFamily="34" charset="-122"/>
+              <a:sym typeface="+mn-ea"/>
+            </a:endParaRPr>
+          </a:p>
+          <a:p>
+            <a:pPr marL="342900" indent="-342900" algn="l">
+              <a:lnSpc>
+                <a:spcPct val="125000"/>
+              </a:lnSpc>
+              <a:spcBef>
+                <a:spcPts val="0"/>
+              </a:spcBef>
+              <a:spcAft>
+                <a:spcPts val="0"/>
+              </a:spcAft>
+              <a:buClrTx/>
+              <a:buSzTx/>
+              <a:buFont typeface="Wingdings" panose="05000000000000000000" charset="0"/>
+              <a:buChar char="l"/>
+            </a:pPr>
+            <a:r>
+              <a:rPr lang="en-US" altLang="zh-CN" sz="2000" b="1" dirty="0">
+                <a:solidFill>
+                  <a:srgbClr val="103380"/>
+                </a:solidFill>
+                <a:latin typeface="微软雅黑" panose="020B0503020204020204" pitchFamily="34" charset="-122"/>
+                <a:ea typeface="微软雅黑" panose="020B0503020204020204" pitchFamily="34" charset="-122"/>
+                <a:sym typeface="+mn-ea"/>
+              </a:rPr>
+              <a:t>RAG</a:t>
+            </a:r>
+            <a:r>
+              <a:rPr lang="zh-CN" altLang="en-US" sz="2000" b="1" dirty="0">
+                <a:solidFill>
+                  <a:srgbClr val="103380"/>
+                </a:solidFill>
+                <a:latin typeface="微软雅黑" panose="020B0503020204020204" pitchFamily="34" charset="-122"/>
+                <a:ea typeface="微软雅黑" panose="020B0503020204020204" pitchFamily="34" charset="-122"/>
+                <a:sym typeface="+mn-ea"/>
+              </a:rPr>
+              <a:t>、澄清部分、</a:t>
+            </a:r>
+            <a:r>
+              <a:rPr lang="zh-CN" altLang="en-US" sz="2000" b="1" dirty="0">
+                <a:solidFill>
+                  <a:srgbClr val="103380"/>
+                </a:solidFill>
+                <a:latin typeface="微软雅黑" panose="020B0503020204020204" pitchFamily="34" charset="-122"/>
+                <a:ea typeface="微软雅黑" panose="020B0503020204020204" pitchFamily="34" charset="-122"/>
+                <a:sym typeface="+mn-ea"/>
+              </a:rPr>
+              <a:t>注册表等内容均有修改，同步最新远程</a:t>
+            </a:r>
+            <a:r>
+              <a:rPr lang="zh-CN" altLang="en-US" sz="2000" b="1" dirty="0">
+                <a:solidFill>
+                  <a:srgbClr val="103380"/>
+                </a:solidFill>
+                <a:latin typeface="微软雅黑" panose="020B0503020204020204" pitchFamily="34" charset="-122"/>
+                <a:ea typeface="微软雅黑" panose="020B0503020204020204" pitchFamily="34" charset="-122"/>
+                <a:sym typeface="+mn-ea"/>
+              </a:rPr>
+              <a:t>去做。</a:t>
+            </a:r>
+            <a:endParaRPr lang="zh-CN" altLang="en-US" sz="2000" b="1" dirty="0">
+              <a:solidFill>
+                <a:srgbClr val="103380"/>
+              </a:solidFill>
+              <a:latin typeface="微软雅黑" panose="020B0503020204020204" pitchFamily="34" charset="-122"/>
+              <a:ea typeface="微软雅黑" panose="020B0503020204020204" pitchFamily="34" charset="-122"/>
+              <a:sym typeface="+mn-ea"/>
+            </a:endParaRPr>
+          </a:p>
+          <a:p>
+            <a:pPr marL="342900" indent="-342900" algn="l">
+              <a:lnSpc>
+                <a:spcPct val="125000"/>
+              </a:lnSpc>
+              <a:spcBef>
+                <a:spcPts val="0"/>
+              </a:spcBef>
+              <a:spcAft>
+                <a:spcPts val="0"/>
+              </a:spcAft>
+              <a:buClrTx/>
+              <a:buSzTx/>
+              <a:buFont typeface="Wingdings" panose="05000000000000000000" charset="0"/>
+              <a:buChar char="l"/>
+            </a:pPr>
+            <a:r>
+              <a:rPr lang="zh-CN" altLang="en-US" sz="2000" b="1" dirty="0">
+                <a:solidFill>
+                  <a:srgbClr val="103380"/>
+                </a:solidFill>
+                <a:latin typeface="微软雅黑" panose="020B0503020204020204" pitchFamily="34" charset="-122"/>
+                <a:ea typeface="微软雅黑" panose="020B0503020204020204" pitchFamily="34" charset="-122"/>
+                <a:sym typeface="+mn-ea"/>
+              </a:rPr>
+              <a:t>测试不同</a:t>
+            </a:r>
+            <a:r>
+              <a:rPr lang="en-US" altLang="zh-CN" sz="2000" b="1" dirty="0">
+                <a:solidFill>
+                  <a:srgbClr val="103380"/>
+                </a:solidFill>
+                <a:latin typeface="微软雅黑" panose="020B0503020204020204" pitchFamily="34" charset="-122"/>
+                <a:ea typeface="微软雅黑" panose="020B0503020204020204" pitchFamily="34" charset="-122"/>
+                <a:sym typeface="+mn-ea"/>
+              </a:rPr>
+              <a:t>AI LLM</a:t>
+            </a:r>
+            <a:r>
+              <a:rPr lang="zh-CN" altLang="en-US" sz="2000" b="1" dirty="0">
+                <a:solidFill>
+                  <a:srgbClr val="103380"/>
+                </a:solidFill>
+                <a:latin typeface="微软雅黑" panose="020B0503020204020204" pitchFamily="34" charset="-122"/>
+                <a:ea typeface="微软雅黑" panose="020B0503020204020204" pitchFamily="34" charset="-122"/>
+                <a:sym typeface="+mn-ea"/>
+              </a:rPr>
+              <a:t>，</a:t>
+            </a:r>
+            <a:r>
+              <a:rPr lang="zh-CN" altLang="en-US" sz="2000" b="1" dirty="0">
+                <a:solidFill>
+                  <a:srgbClr val="103380"/>
+                </a:solidFill>
+                <a:latin typeface="微软雅黑" panose="020B0503020204020204" pitchFamily="34" charset="-122"/>
+                <a:ea typeface="微软雅黑" panose="020B0503020204020204" pitchFamily="34" charset="-122"/>
+                <a:sym typeface="+mn-ea"/>
+              </a:rPr>
+              <a:t>目前选用</a:t>
+            </a:r>
+            <a:r>
+              <a:rPr lang="en-US" altLang="zh-CN" sz="2000" b="1" dirty="0">
+                <a:solidFill>
+                  <a:srgbClr val="103380"/>
+                </a:solidFill>
+                <a:latin typeface="微软雅黑" panose="020B0503020204020204" pitchFamily="34" charset="-122"/>
+                <a:ea typeface="微软雅黑" panose="020B0503020204020204" pitchFamily="34" charset="-122"/>
+                <a:sym typeface="+mn-ea"/>
+              </a:rPr>
+              <a:t>MiMo-V2.6-Flash</a:t>
+            </a:r>
+            <a:r>
+              <a:rPr lang="zh-CN" altLang="en-US" sz="2000" b="1" dirty="0">
+                <a:solidFill>
+                  <a:srgbClr val="103380"/>
+                </a:solidFill>
+                <a:latin typeface="微软雅黑" panose="020B0503020204020204" pitchFamily="34" charset="-122"/>
+                <a:ea typeface="微软雅黑" panose="020B0503020204020204" pitchFamily="34" charset="-122"/>
+                <a:sym typeface="+mn-ea"/>
+              </a:rPr>
+              <a:t>（已写入</a:t>
+            </a:r>
+            <a:r>
+              <a:rPr lang="en-US" altLang="zh-CN" sz="2000" b="1" dirty="0">
+                <a:solidFill>
+                  <a:srgbClr val="103380"/>
+                </a:solidFill>
+                <a:latin typeface="微软雅黑" panose="020B0503020204020204" pitchFamily="34" charset="-122"/>
+                <a:ea typeface="微软雅黑" panose="020B0503020204020204" pitchFamily="34" charset="-122"/>
+                <a:sym typeface="+mn-ea"/>
+              </a:rPr>
+              <a:t>env</a:t>
+            </a:r>
+            <a:r>
+              <a:rPr lang="zh-CN" altLang="en-US" sz="2000" b="1" dirty="0">
+                <a:solidFill>
+                  <a:srgbClr val="103380"/>
+                </a:solidFill>
+                <a:latin typeface="微软雅黑" panose="020B0503020204020204" pitchFamily="34" charset="-122"/>
+                <a:ea typeface="微软雅黑" panose="020B0503020204020204" pitchFamily="34" charset="-122"/>
+                <a:sym typeface="+mn-ea"/>
+              </a:rPr>
+              <a:t>）</a:t>
+            </a:r>
+            <a:endParaRPr lang="en-US" altLang="zh-CN" sz="2000" b="1" dirty="0">
+              <a:solidFill>
+                <a:srgbClr val="103380"/>
+              </a:solidFill>
+              <a:latin typeface="微软雅黑" panose="020B0503020204020204" pitchFamily="34" charset="-122"/>
+              <a:ea typeface="微软雅黑" panose="020B0503020204020204" pitchFamily="34" charset="-122"/>
+              <a:sym typeface="+mn-ea"/>
+            </a:endParaRPr>
+          </a:p>
+          <a:p>
+            <a:pPr marL="342900" indent="-342900" algn="l">
+              <a:lnSpc>
+                <a:spcPct val="125000"/>
+              </a:lnSpc>
+              <a:spcBef>
+                <a:spcPts val="0"/>
+              </a:spcBef>
+              <a:spcAft>
+                <a:spcPts val="0"/>
+              </a:spcAft>
+              <a:buClrTx/>
+              <a:buSzTx/>
+              <a:buFont typeface="Wingdings" panose="05000000000000000000" charset="0"/>
+              <a:buChar char="l"/>
+            </a:pPr>
+            <a:r>
+              <a:rPr lang="en-US" altLang="zh-CN" sz="2000" b="1" dirty="0">
+                <a:solidFill>
+                  <a:srgbClr val="103380"/>
+                </a:solidFill>
+                <a:latin typeface="微软雅黑" panose="020B0503020204020204" pitchFamily="34" charset="-122"/>
+                <a:ea typeface="微软雅黑" panose="020B0503020204020204" pitchFamily="34" charset="-122"/>
+                <a:sym typeface="+mn-ea"/>
+              </a:rPr>
+              <a:t>UI</a:t>
+            </a:r>
+            <a:r>
+              <a:rPr lang="zh-CN" altLang="en-US" sz="2000" b="1" dirty="0">
+                <a:solidFill>
+                  <a:srgbClr val="103380"/>
+                </a:solidFill>
+                <a:latin typeface="微软雅黑" panose="020B0503020204020204" pitchFamily="34" charset="-122"/>
+                <a:ea typeface="微软雅黑" panose="020B0503020204020204" pitchFamily="34" charset="-122"/>
+                <a:sym typeface="+mn-ea"/>
+              </a:rPr>
+              <a:t>的</a:t>
+            </a:r>
+            <a:r>
+              <a:rPr lang="en-US" altLang="zh-CN" sz="2000" b="1" dirty="0">
+                <a:solidFill>
+                  <a:srgbClr val="103380"/>
+                </a:solidFill>
+                <a:latin typeface="微软雅黑" panose="020B0503020204020204" pitchFamily="34" charset="-122"/>
+                <a:ea typeface="微软雅黑" panose="020B0503020204020204" pitchFamily="34" charset="-122"/>
+                <a:sym typeface="+mn-ea"/>
+              </a:rPr>
+              <a:t>展示链路</a:t>
+            </a:r>
+            <a:r>
+              <a:rPr lang="zh-CN" altLang="en-US" sz="2000" b="1" dirty="0">
+                <a:solidFill>
+                  <a:srgbClr val="103380"/>
+                </a:solidFill>
+                <a:latin typeface="微软雅黑" panose="020B0503020204020204" pitchFamily="34" charset="-122"/>
+                <a:ea typeface="微软雅黑" panose="020B0503020204020204" pitchFamily="34" charset="-122"/>
+                <a:sym typeface="+mn-ea"/>
+              </a:rPr>
+              <a:t>优化</a:t>
+            </a:r>
+            <a:endParaRPr lang="en-US" altLang="zh-CN" sz="2000" b="1" dirty="0">
+              <a:solidFill>
+                <a:srgbClr val="103380"/>
+              </a:solidFill>
+              <a:latin typeface="微软雅黑" panose="020B0503020204020204" pitchFamily="34" charset="-122"/>
+              <a:ea typeface="微软雅黑" panose="020B0503020204020204" pitchFamily="34" charset="-122"/>
+              <a:sym typeface="+mn-ea"/>
+            </a:endParaRPr>
+          </a:p>
+          <a:p>
+            <a:pPr marL="342900" indent="-342900" algn="l">
+              <a:lnSpc>
+                <a:spcPct val="125000"/>
+              </a:lnSpc>
+              <a:spcBef>
+                <a:spcPts val="0"/>
+              </a:spcBef>
+              <a:spcAft>
+                <a:spcPts val="0"/>
+              </a:spcAft>
+              <a:buClrTx/>
+              <a:buSzTx/>
+              <a:buFont typeface="Wingdings" panose="05000000000000000000" charset="0"/>
+              <a:buChar char="l"/>
+            </a:pPr>
+            <a:r>
+              <a:rPr lang="zh-CN" altLang="en-US" sz="2400" b="1" dirty="0">
+                <a:solidFill>
+                  <a:srgbClr val="103380"/>
+                </a:solidFill>
+                <a:latin typeface="微软雅黑" panose="020B0503020204020204" pitchFamily="34" charset="-122"/>
+                <a:ea typeface="微软雅黑" panose="020B0503020204020204" pitchFamily="34" charset="-122"/>
+                <a:sym typeface="+mn-ea"/>
+              </a:rPr>
+              <a:t>问题：</a:t>
+            </a:r>
+            <a:endParaRPr lang="zh-CN" altLang="en-US" sz="2400" b="1" dirty="0">
+              <a:solidFill>
+                <a:srgbClr val="103380"/>
+              </a:solidFill>
+              <a:latin typeface="微软雅黑" panose="020B0503020204020204" pitchFamily="34" charset="-122"/>
+              <a:ea typeface="微软雅黑" panose="020B0503020204020204" pitchFamily="34" charset="-122"/>
+              <a:sym typeface="+mn-ea"/>
+            </a:endParaRPr>
+          </a:p>
+          <a:p>
+            <a:pPr marL="342900" indent="-342900" algn="l">
+              <a:lnSpc>
+                <a:spcPct val="125000"/>
+              </a:lnSpc>
+              <a:spcBef>
+                <a:spcPts val="0"/>
+              </a:spcBef>
+              <a:spcAft>
+                <a:spcPts val="0"/>
+              </a:spcAft>
+              <a:buClrTx/>
+              <a:buSzTx/>
+              <a:buFont typeface="Wingdings" panose="05000000000000000000" charset="0"/>
+              <a:buChar char="l"/>
+            </a:pPr>
+            <a:r>
+              <a:rPr lang="zh-CN" altLang="en-US" sz="2000" b="1" dirty="0">
+                <a:solidFill>
+                  <a:srgbClr val="C00000"/>
+                </a:solidFill>
+                <a:latin typeface="微软雅黑" panose="020B0503020204020204" pitchFamily="34" charset="-122"/>
+                <a:ea typeface="微软雅黑" panose="020B0503020204020204" pitchFamily="34" charset="-122"/>
+                <a:sym typeface="+mn-ea"/>
+              </a:rPr>
+              <a:t>测评集能力分析，选择与认领分工</a:t>
+            </a:r>
+            <a:r>
+              <a:rPr lang="zh-CN" altLang="en-US" sz="2000" b="1" dirty="0">
+                <a:solidFill>
+                  <a:srgbClr val="103380"/>
+                </a:solidFill>
+                <a:latin typeface="微软雅黑" panose="020B0503020204020204" pitchFamily="34" charset="-122"/>
+                <a:ea typeface="微软雅黑" panose="020B0503020204020204" pitchFamily="34" charset="-122"/>
+                <a:sym typeface="+mn-ea"/>
+              </a:rPr>
+              <a:t>（跑评测与试用</a:t>
+            </a:r>
+            <a:r>
+              <a:rPr lang="zh-CN" altLang="en-US" sz="2000" b="1" dirty="0">
+                <a:solidFill>
+                  <a:srgbClr val="103380"/>
+                </a:solidFill>
+                <a:latin typeface="微软雅黑" panose="020B0503020204020204" pitchFamily="34" charset="-122"/>
+                <a:ea typeface="微软雅黑" panose="020B0503020204020204" pitchFamily="34" charset="-122"/>
+                <a:sym typeface="+mn-ea"/>
+              </a:rPr>
+              <a:t>体验）</a:t>
+            </a:r>
+            <a:endParaRPr lang="zh-CN" altLang="en-US" sz="2000" b="1" dirty="0">
+              <a:solidFill>
+                <a:srgbClr val="103380"/>
+              </a:solidFill>
+              <a:latin typeface="微软雅黑" panose="020B0503020204020204" pitchFamily="34" charset="-122"/>
+              <a:ea typeface="微软雅黑" panose="020B0503020204020204" pitchFamily="34" charset="-122"/>
+              <a:sym typeface="+mn-ea"/>
+            </a:endParaRPr>
+          </a:p>
+          <a:p>
+            <a:pPr marL="342900" indent="-342900" algn="l">
+              <a:lnSpc>
+                <a:spcPct val="125000"/>
+              </a:lnSpc>
+              <a:spcBef>
+                <a:spcPts val="0"/>
+              </a:spcBef>
+              <a:spcAft>
+                <a:spcPts val="0"/>
+              </a:spcAft>
+              <a:buClrTx/>
+              <a:buSzTx/>
+              <a:buFont typeface="Wingdings" panose="05000000000000000000" charset="0"/>
+              <a:buChar char="l"/>
+            </a:pPr>
+            <a:r>
+              <a:rPr lang="zh-CN" altLang="en-US" sz="2000" b="1" dirty="0">
+                <a:solidFill>
+                  <a:srgbClr val="103380"/>
+                </a:solidFill>
+                <a:latin typeface="微软雅黑" panose="020B0503020204020204" pitchFamily="34" charset="-122"/>
+                <a:ea typeface="微软雅黑" panose="020B0503020204020204" pitchFamily="34" charset="-122"/>
+                <a:sym typeface="+mn-ea"/>
+              </a:rPr>
+              <a:t>跨源能力怎么</a:t>
+            </a:r>
+            <a:r>
+              <a:rPr lang="zh-CN" altLang="en-US" sz="2000" b="1" dirty="0">
+                <a:solidFill>
+                  <a:srgbClr val="103380"/>
+                </a:solidFill>
+                <a:latin typeface="微软雅黑" panose="020B0503020204020204" pitchFamily="34" charset="-122"/>
+                <a:ea typeface="微软雅黑" panose="020B0503020204020204" pitchFamily="34" charset="-122"/>
+                <a:sym typeface="+mn-ea"/>
+              </a:rPr>
+              <a:t>做好？</a:t>
+            </a:r>
+            <a:endParaRPr lang="zh-CN" altLang="en-US" sz="2000" b="1" dirty="0">
+              <a:solidFill>
+                <a:srgbClr val="103380"/>
+              </a:solidFill>
+              <a:latin typeface="微软雅黑" panose="020B0503020204020204" pitchFamily="34" charset="-122"/>
+              <a:ea typeface="微软雅黑" panose="020B0503020204020204" pitchFamily="34" charset="-122"/>
+              <a:sym typeface="+mn-ea"/>
+            </a:endParaRPr>
+          </a:p>
+          <a:p>
+            <a:pPr marL="342900" indent="-342900" algn="l">
+              <a:lnSpc>
+                <a:spcPct val="125000"/>
+              </a:lnSpc>
+              <a:spcBef>
+                <a:spcPts val="0"/>
+              </a:spcBef>
+              <a:spcAft>
+                <a:spcPts val="0"/>
+              </a:spcAft>
+              <a:buClrTx/>
+              <a:buSzTx/>
+              <a:buFont typeface="Wingdings" panose="05000000000000000000" charset="0"/>
+              <a:buChar char="l"/>
+            </a:pPr>
+            <a:r>
+              <a:rPr lang="en-US" altLang="zh-CN" sz="2000" b="1" dirty="0">
+                <a:solidFill>
+                  <a:srgbClr val="103380"/>
+                </a:solidFill>
+                <a:latin typeface="微软雅黑" panose="020B0503020204020204" pitchFamily="34" charset="-122"/>
+                <a:ea typeface="微软雅黑" panose="020B0503020204020204" pitchFamily="34" charset="-122"/>
+                <a:sym typeface="+mn-ea"/>
+              </a:rPr>
+              <a:t>UI</a:t>
+            </a:r>
+            <a:r>
+              <a:rPr lang="zh-CN" altLang="en-US" sz="2000" b="1" dirty="0">
+                <a:solidFill>
+                  <a:srgbClr val="103380"/>
+                </a:solidFill>
+                <a:latin typeface="微软雅黑" panose="020B0503020204020204" pitchFamily="34" charset="-122"/>
+                <a:ea typeface="微软雅黑" panose="020B0503020204020204" pitchFamily="34" charset="-122"/>
+                <a:sym typeface="+mn-ea"/>
+              </a:rPr>
+              <a:t>太粗糙，已初步删减和</a:t>
+            </a:r>
+            <a:r>
+              <a:rPr lang="zh-CN" altLang="en-US" sz="2000" b="1" dirty="0">
+                <a:solidFill>
+                  <a:srgbClr val="103380"/>
+                </a:solidFill>
+                <a:latin typeface="微软雅黑" panose="020B0503020204020204" pitchFamily="34" charset="-122"/>
+                <a:ea typeface="微软雅黑" panose="020B0503020204020204" pitchFamily="34" charset="-122"/>
+                <a:sym typeface="+mn-ea"/>
+              </a:rPr>
+              <a:t>优化，后面考虑用ｓｋｉｌｌ重构</a:t>
+            </a:r>
+            <a:endParaRPr lang="zh-CN" altLang="en-US" sz="2000" b="1" dirty="0">
+              <a:solidFill>
+                <a:srgbClr val="103380"/>
+              </a:solidFill>
+              <a:latin typeface="微软雅黑" panose="020B0503020204020204" pitchFamily="34" charset="-122"/>
+              <a:ea typeface="微软雅黑" panose="020B0503020204020204" pitchFamily="34" charset="-122"/>
+              <a:sym typeface="+mn-ea"/>
+            </a:endParaRPr>
+          </a:p>
+          <a:p>
+            <a:pPr indent="0" algn="l">
+              <a:lnSpc>
+                <a:spcPct val="125000"/>
+              </a:lnSpc>
+              <a:spcBef>
+                <a:spcPts val="0"/>
+              </a:spcBef>
+              <a:spcAft>
+                <a:spcPts val="0"/>
+              </a:spcAft>
+              <a:buClrTx/>
+              <a:buSzTx/>
+              <a:buFont typeface="Wingdings" panose="05000000000000000000" charset="0"/>
+              <a:buNone/>
+            </a:pPr>
+            <a:endParaRPr lang="zh-CN" altLang="en-US" sz="2000" b="1" dirty="0">
+              <a:solidFill>
+                <a:srgbClr val="103380"/>
+              </a:solidFill>
+              <a:latin typeface="微软雅黑" panose="020B0503020204020204" pitchFamily="34" charset="-122"/>
+              <a:ea typeface="微软雅黑" panose="020B0503020204020204" pitchFamily="34" charset="-122"/>
+              <a:sym typeface="+mn-ea"/>
+            </a:endParaRPr>
+          </a:p>
+          <a:p>
+            <a:pPr marL="342900" indent="-342900" algn="l">
+              <a:lnSpc>
+                <a:spcPct val="125000"/>
+              </a:lnSpc>
+              <a:spcBef>
+                <a:spcPts val="0"/>
+              </a:spcBef>
+              <a:spcAft>
+                <a:spcPts val="0"/>
+              </a:spcAft>
+              <a:buClrTx/>
+              <a:buSzTx/>
+              <a:buFont typeface="Wingdings" panose="05000000000000000000" charset="0"/>
+              <a:buChar char="l"/>
+            </a:pPr>
+            <a:r>
+              <a:rPr lang="zh-CN" altLang="en-US" sz="2400" b="1" dirty="0">
+                <a:solidFill>
+                  <a:srgbClr val="103380"/>
+                </a:solidFill>
+                <a:latin typeface="微软雅黑" panose="020B0503020204020204" pitchFamily="34" charset="-122"/>
+                <a:ea typeface="微软雅黑" panose="020B0503020204020204" pitchFamily="34" charset="-122"/>
+                <a:sym typeface="+mn-ea"/>
+              </a:rPr>
+              <a:t>目标：</a:t>
+            </a:r>
+            <a:endParaRPr lang="zh-CN" altLang="en-US" sz="2400" b="1" dirty="0">
+              <a:solidFill>
+                <a:srgbClr val="103380"/>
+              </a:solidFill>
+              <a:latin typeface="微软雅黑" panose="020B0503020204020204" pitchFamily="34" charset="-122"/>
+              <a:ea typeface="微软雅黑" panose="020B0503020204020204" pitchFamily="34" charset="-122"/>
+              <a:sym typeface="+mn-ea"/>
+            </a:endParaRPr>
+          </a:p>
+          <a:p>
+            <a:pPr marL="342900" indent="-342900" algn="l">
+              <a:lnSpc>
+                <a:spcPct val="125000"/>
+              </a:lnSpc>
+              <a:spcBef>
+                <a:spcPts val="0"/>
+              </a:spcBef>
+              <a:spcAft>
+                <a:spcPts val="0"/>
+              </a:spcAft>
+              <a:buClrTx/>
+              <a:buSzTx/>
+              <a:buFont typeface="Wingdings" panose="05000000000000000000" charset="0"/>
+              <a:buChar char="l"/>
+            </a:pPr>
+            <a:r>
+              <a:rPr lang="zh-CN" altLang="en-US" sz="2000" b="1" dirty="0">
+                <a:solidFill>
+                  <a:srgbClr val="103380"/>
+                </a:solidFill>
+                <a:latin typeface="微软雅黑" panose="020B0503020204020204" pitchFamily="34" charset="-122"/>
+                <a:ea typeface="微软雅黑" panose="020B0503020204020204" pitchFamily="34" charset="-122"/>
+                <a:sym typeface="+mn-ea"/>
+              </a:rPr>
+              <a:t>对应</a:t>
+            </a:r>
+            <a:r>
+              <a:rPr lang="zh-CN" altLang="en-US" sz="2000" b="1" dirty="0">
+                <a:solidFill>
+                  <a:srgbClr val="C00000"/>
+                </a:solidFill>
+                <a:latin typeface="微软雅黑" panose="020B0503020204020204" pitchFamily="34" charset="-122"/>
+                <a:ea typeface="微软雅黑" panose="020B0503020204020204" pitchFamily="34" charset="-122"/>
+                <a:sym typeface="+mn-ea"/>
+              </a:rPr>
+              <a:t>专项准确率至少</a:t>
+            </a:r>
+            <a:r>
+              <a:rPr lang="en-US" altLang="zh-CN" sz="2000" b="1" dirty="0">
+                <a:solidFill>
+                  <a:srgbClr val="C00000"/>
+                </a:solidFill>
+                <a:latin typeface="微软雅黑" panose="020B0503020204020204" pitchFamily="34" charset="-122"/>
+                <a:ea typeface="微软雅黑" panose="020B0503020204020204" pitchFamily="34" charset="-122"/>
+                <a:sym typeface="+mn-ea"/>
+              </a:rPr>
+              <a:t>70%</a:t>
+            </a:r>
+            <a:r>
+              <a:rPr lang="zh-CN" altLang="en-US" sz="2000" b="1" dirty="0">
+                <a:solidFill>
+                  <a:srgbClr val="C00000"/>
+                </a:solidFill>
+                <a:latin typeface="微软雅黑" panose="020B0503020204020204" pitchFamily="34" charset="-122"/>
+                <a:ea typeface="微软雅黑" panose="020B0503020204020204" pitchFamily="34" charset="-122"/>
+                <a:sym typeface="+mn-ea"/>
+              </a:rPr>
+              <a:t>以上</a:t>
+            </a:r>
+            <a:r>
+              <a:rPr lang="zh-CN" altLang="en-US" sz="2000" b="1" dirty="0">
+                <a:solidFill>
+                  <a:srgbClr val="103380"/>
+                </a:solidFill>
+                <a:latin typeface="微软雅黑" panose="020B0503020204020204" pitchFamily="34" charset="-122"/>
+                <a:ea typeface="微软雅黑" panose="020B0503020204020204" pitchFamily="34" charset="-122"/>
+                <a:sym typeface="+mn-ea"/>
+              </a:rPr>
+              <a:t>，不做的专项</a:t>
+            </a:r>
+            <a:r>
+              <a:rPr lang="zh-CN" altLang="en-US" sz="2000" b="1" dirty="0">
+                <a:solidFill>
+                  <a:srgbClr val="103380"/>
+                </a:solidFill>
+                <a:latin typeface="微软雅黑" panose="020B0503020204020204" pitchFamily="34" charset="-122"/>
+                <a:ea typeface="微软雅黑" panose="020B0503020204020204" pitchFamily="34" charset="-122"/>
+                <a:sym typeface="+mn-ea"/>
+              </a:rPr>
+              <a:t>后续删除</a:t>
+            </a:r>
+            <a:r>
+              <a:rPr lang="zh-CN" altLang="en-US" sz="2000" b="1" dirty="0">
+                <a:solidFill>
+                  <a:srgbClr val="103380"/>
+                </a:solidFill>
+                <a:latin typeface="微软雅黑" panose="020B0503020204020204" pitchFamily="34" charset="-122"/>
+                <a:ea typeface="微软雅黑" panose="020B0503020204020204" pitchFamily="34" charset="-122"/>
+                <a:sym typeface="+mn-ea"/>
+              </a:rPr>
+              <a:t>对应测试</a:t>
+            </a:r>
+            <a:endParaRPr lang="zh-CN" altLang="en-US" sz="2000" b="1" dirty="0">
+              <a:solidFill>
+                <a:srgbClr val="103380"/>
+              </a:solidFill>
+              <a:latin typeface="微软雅黑" panose="020B0503020204020204" pitchFamily="34" charset="-122"/>
+              <a:ea typeface="微软雅黑" panose="020B0503020204020204" pitchFamily="34" charset="-122"/>
+              <a:sym typeface="+mn-ea"/>
+            </a:endParaRPr>
+          </a:p>
+          <a:p>
+            <a:pPr marL="342900" indent="-342900" algn="l">
+              <a:lnSpc>
+                <a:spcPct val="125000"/>
+              </a:lnSpc>
+              <a:spcBef>
+                <a:spcPts val="0"/>
+              </a:spcBef>
+              <a:spcAft>
+                <a:spcPts val="0"/>
+              </a:spcAft>
+              <a:buClrTx/>
+              <a:buSzTx/>
+              <a:buFont typeface="Wingdings" panose="05000000000000000000" charset="0"/>
+              <a:buChar char="l"/>
+            </a:pPr>
+            <a:r>
+              <a:rPr lang="zh-CN" altLang="en-US" sz="2000" b="1" dirty="0">
+                <a:solidFill>
+                  <a:srgbClr val="C00000"/>
+                </a:solidFill>
+                <a:latin typeface="微软雅黑" panose="020B0503020204020204" pitchFamily="34" charset="-122"/>
+                <a:ea typeface="微软雅黑" panose="020B0503020204020204" pitchFamily="34" charset="-122"/>
+                <a:sym typeface="+mn-ea"/>
+              </a:rPr>
+              <a:t>测试集适当扩充，要求各项至少</a:t>
+            </a:r>
+            <a:r>
+              <a:rPr lang="en-US" altLang="zh-CN" sz="2000" b="1" dirty="0">
+                <a:solidFill>
+                  <a:srgbClr val="C00000"/>
+                </a:solidFill>
+                <a:latin typeface="微软雅黑" panose="020B0503020204020204" pitchFamily="34" charset="-122"/>
+                <a:ea typeface="微软雅黑" panose="020B0503020204020204" pitchFamily="34" charset="-122"/>
+                <a:sym typeface="+mn-ea"/>
+              </a:rPr>
+              <a:t>10</a:t>
+            </a:r>
+            <a:r>
+              <a:rPr lang="zh-CN" altLang="en-US" sz="2000" b="1" dirty="0">
+                <a:solidFill>
+                  <a:srgbClr val="C00000"/>
+                </a:solidFill>
+                <a:latin typeface="微软雅黑" panose="020B0503020204020204" pitchFamily="34" charset="-122"/>
+                <a:ea typeface="微软雅黑" panose="020B0503020204020204" pitchFamily="34" charset="-122"/>
+                <a:sym typeface="+mn-ea"/>
+              </a:rPr>
+              <a:t>个，可以做</a:t>
+            </a:r>
+            <a:r>
+              <a:rPr lang="en-US" altLang="zh-CN" sz="2000" b="1" dirty="0">
+                <a:solidFill>
+                  <a:srgbClr val="C00000"/>
+                </a:solidFill>
+                <a:latin typeface="微软雅黑" panose="020B0503020204020204" pitchFamily="34" charset="-122"/>
+                <a:ea typeface="微软雅黑" panose="020B0503020204020204" pitchFamily="34" charset="-122"/>
+                <a:sym typeface="+mn-ea"/>
+              </a:rPr>
+              <a:t>15+</a:t>
+            </a:r>
+            <a:r>
+              <a:rPr lang="zh-CN" altLang="en-US" sz="2000" b="1" dirty="0">
+                <a:solidFill>
+                  <a:srgbClr val="C00000"/>
+                </a:solidFill>
+                <a:latin typeface="微软雅黑" panose="020B0503020204020204" pitchFamily="34" charset="-122"/>
+                <a:ea typeface="微软雅黑" panose="020B0503020204020204" pitchFamily="34" charset="-122"/>
+                <a:sym typeface="+mn-ea"/>
+              </a:rPr>
+              <a:t>个</a:t>
+            </a:r>
+            <a:r>
+              <a:rPr lang="zh-CN" altLang="en-US" sz="2000" b="1" dirty="0">
+                <a:solidFill>
+                  <a:srgbClr val="103380"/>
+                </a:solidFill>
+                <a:latin typeface="微软雅黑" panose="020B0503020204020204" pitchFamily="34" charset="-122"/>
+                <a:ea typeface="微软雅黑" panose="020B0503020204020204" pitchFamily="34" charset="-122"/>
+                <a:sym typeface="+mn-ea"/>
+              </a:rPr>
+              <a:t>（对应部分在原基础上自己让</a:t>
+            </a:r>
+            <a:r>
+              <a:rPr lang="en-US" altLang="zh-CN" sz="2000" b="1" dirty="0">
+                <a:solidFill>
+                  <a:srgbClr val="103380"/>
+                </a:solidFill>
+                <a:latin typeface="微软雅黑" panose="020B0503020204020204" pitchFamily="34" charset="-122"/>
+                <a:ea typeface="微软雅黑" panose="020B0503020204020204" pitchFamily="34" charset="-122"/>
+                <a:sym typeface="+mn-ea"/>
+              </a:rPr>
+              <a:t>ai</a:t>
+            </a:r>
+            <a:r>
+              <a:rPr lang="zh-CN" altLang="en-US" sz="2000" b="1" dirty="0">
+                <a:solidFill>
+                  <a:srgbClr val="103380"/>
+                </a:solidFill>
+                <a:latin typeface="微软雅黑" panose="020B0503020204020204" pitchFamily="34" charset="-122"/>
+                <a:ea typeface="微软雅黑" panose="020B0503020204020204" pitchFamily="34" charset="-122"/>
+                <a:sym typeface="+mn-ea"/>
+              </a:rPr>
+              <a:t>结合</a:t>
+            </a:r>
+            <a:r>
+              <a:rPr lang="zh-CN" altLang="en-US" sz="2000" b="1" dirty="0">
+                <a:solidFill>
+                  <a:srgbClr val="103380"/>
+                </a:solidFill>
+                <a:latin typeface="微软雅黑" panose="020B0503020204020204" pitchFamily="34" charset="-122"/>
+                <a:ea typeface="微软雅黑" panose="020B0503020204020204" pitchFamily="34" charset="-122"/>
+                <a:sym typeface="+mn-ea"/>
+              </a:rPr>
+              <a:t>数据集扩充）</a:t>
+            </a:r>
+            <a:endParaRPr lang="en-US" altLang="zh-CN" sz="2400" b="1" dirty="0">
+              <a:solidFill>
+                <a:srgbClr val="103380"/>
+              </a:solidFill>
+              <a:latin typeface="微软雅黑" panose="020B0503020204020204" pitchFamily="34" charset="-122"/>
+              <a:ea typeface="微软雅黑" panose="020B0503020204020204" pitchFamily="34" charset="-122"/>
+              <a:sym typeface="+mn-ea"/>
+            </a:endParaRPr>
+          </a:p>
+          <a:p>
+            <a:pPr indent="0" algn="l">
+              <a:lnSpc>
+                <a:spcPct val="125000"/>
+              </a:lnSpc>
+              <a:spcBef>
+                <a:spcPts val="0"/>
+              </a:spcBef>
+              <a:spcAft>
+                <a:spcPts val="0"/>
+              </a:spcAft>
+              <a:buClrTx/>
+              <a:buSzTx/>
+              <a:buFont typeface="Wingdings" panose="05000000000000000000" charset="0"/>
+              <a:buNone/>
+            </a:pPr>
+            <a:endParaRPr lang="en-US" altLang="zh-CN" sz="2000" b="1" dirty="0">
+              <a:solidFill>
+                <a:srgbClr val="103380"/>
+              </a:solidFill>
+              <a:latin typeface="微软雅黑" panose="020B0503020204020204" pitchFamily="34" charset="-122"/>
+              <a:ea typeface="微软雅黑" panose="020B0503020204020204" pitchFamily="34" charset="-122"/>
+              <a:sym typeface="+mn-ea"/>
+            </a:endParaRPr>
+          </a:p>
+          <a:p>
+            <a:pPr indent="0" algn="l">
+              <a:lnSpc>
+                <a:spcPct val="125000"/>
+              </a:lnSpc>
+              <a:spcBef>
+                <a:spcPts val="0"/>
+              </a:spcBef>
+              <a:spcAft>
+                <a:spcPts val="0"/>
+              </a:spcAft>
+              <a:buClrTx/>
+              <a:buSzTx/>
+              <a:buFont typeface="Arial" panose="020B0604020202020204" pitchFamily="34" charset="0"/>
+              <a:buNone/>
+            </a:pPr>
+            <a:endParaRPr lang="en-US" altLang="zh-CN" sz="2000" dirty="0">
+              <a:solidFill>
+                <a:srgbClr val="103380"/>
+              </a:solidFill>
+              <a:latin typeface="微软雅黑" panose="020B0503020204020204" pitchFamily="34" charset="-122"/>
+              <a:ea typeface="微软雅黑" panose="020B0503020204020204" pitchFamily="34" charset="-122"/>
+              <a:sym typeface="+mn-ea"/>
+            </a:endParaRPr>
+          </a:p>
+        </p:txBody>
+      </p:sp>
+      <p:pic>
+        <p:nvPicPr>
+          <p:cNvPr id="3" name="图片 2"/>
+          <p:cNvPicPr>
+            <a:picLocks noChangeAspect="1"/>
+          </p:cNvPicPr>
+          <p:nvPr/>
+        </p:nvPicPr>
+        <p:blipFill>
+          <a:blip r:embed="rId1"/>
+          <a:stretch>
+            <a:fillRect/>
+          </a:stretch>
+        </p:blipFill>
+        <p:spPr>
+          <a:xfrm>
+            <a:off x="7931785" y="1012825"/>
+            <a:ext cx="4071620" cy="2663190"/>
+          </a:xfrm>
+          <a:prstGeom prst="rect">
+            <a:avLst/>
+          </a:prstGeom>
+        </p:spPr>
+      </p:pic>
+      <p:pic>
+        <p:nvPicPr>
+          <p:cNvPr id="5" name="图片 4"/>
+          <p:cNvPicPr>
+            <a:picLocks noChangeAspect="1"/>
+          </p:cNvPicPr>
+          <p:nvPr/>
+        </p:nvPicPr>
+        <p:blipFill>
+          <a:blip r:embed="rId2"/>
+          <a:stretch>
+            <a:fillRect/>
+          </a:stretch>
+        </p:blipFill>
+        <p:spPr>
+          <a:xfrm>
+            <a:off x="6242685" y="4149090"/>
+            <a:ext cx="5581015" cy="903605"/>
+          </a:xfrm>
+          <a:prstGeom prst="rect">
+            <a:avLst/>
+          </a:prstGeom>
+        </p:spPr>
+      </p:pic>
+    </p:spTree>
+  </p:cSld>
+  <p:clrMapOvr>
+    <a:masterClrMapping/>
+  </p:clrMapOvr>
+</p:sld>
+</file>
+
+<file path=ppt/slides/slide13.xml><?xml version="1.0" encoding="utf-8"?>
+<p:sld xmlns:a="http://schemas.openxmlformats.org/drawingml/2006/main" xmlns:r="http://schemas.openxmlformats.org/officeDocument/2006/relationships" xmlns:p="http://schemas.openxmlformats.org/presentationml/2006/main">
+  <p:cSld>
+    <p:spTree>
+      <p:nvGrpSpPr>
+        <p:cNvPr id="1" name=""/>
+        <p:cNvGrpSpPr/>
+        <p:nvPr/>
+      </p:nvGrpSpPr>
+      <p:grpSpPr/>
+      <p:sp>
+        <p:nvSpPr>
+          <p:cNvPr id="2" name="Title 1"/>
+          <p:cNvSpPr>
+            <a:spLocks noGrp="1"/>
+          </p:cNvSpPr>
+          <p:nvPr>
+            <p:ph type="title"/>
+          </p:nvPr>
+        </p:nvSpPr>
+        <p:spPr/>
+        <p:txBody>
+          <a:bodyPr/>
+          <a:p>
+            <a:r>
+              <a:t>选择与</a:t>
+            </a:r>
+            <a:r>
+              <a:t>分工</a:t>
+            </a:r>
+          </a:p>
+        </p:txBody>
+      </p:sp>
+      <p:sp>
+        <p:nvSpPr>
+          <p:cNvPr id="4" name="Text Box 3"/>
+          <p:cNvSpPr txBox="1"/>
+          <p:nvPr/>
+        </p:nvSpPr>
+        <p:spPr>
+          <a:xfrm>
+            <a:off x="245110" y="774700"/>
+            <a:ext cx="10175875" cy="5668645"/>
+          </a:xfrm>
+          <a:prstGeom prst="rect">
+            <a:avLst/>
+          </a:prstGeom>
+          <a:noFill/>
+        </p:spPr>
+        <p:txBody>
+          <a:bodyPr wrap="square" rtlCol="0">
+            <a:noAutofit/>
+          </a:bodyPr>
+          <a:p>
+            <a:pPr indent="0" algn="l">
+              <a:lnSpc>
+                <a:spcPct val="125000"/>
+              </a:lnSpc>
+              <a:spcBef>
+                <a:spcPts val="0"/>
+              </a:spcBef>
+              <a:spcAft>
+                <a:spcPts val="0"/>
+              </a:spcAft>
+              <a:buClrTx/>
+              <a:buSzTx/>
+              <a:buFont typeface="Wingdings" panose="05000000000000000000" charset="0"/>
+              <a:buNone/>
+            </a:pPr>
+            <a:r>
+              <a:rPr lang="zh-CN" altLang="en-US" sz="2400" b="1" dirty="0">
+                <a:solidFill>
+                  <a:srgbClr val="103380"/>
+                </a:solidFill>
+                <a:latin typeface="微软雅黑" panose="020B0503020204020204" pitchFamily="34" charset="-122"/>
+                <a:ea typeface="微软雅黑" panose="020B0503020204020204" pitchFamily="34" charset="-122"/>
+                <a:sym typeface="+mn-ea"/>
+              </a:rPr>
+              <a:t>优先</a:t>
+            </a:r>
+            <a:r>
+              <a:rPr lang="en-US" altLang="zh-CN" sz="2400" b="1" dirty="0">
+                <a:solidFill>
+                  <a:srgbClr val="103380"/>
+                </a:solidFill>
+                <a:latin typeface="微软雅黑" panose="020B0503020204020204" pitchFamily="34" charset="-122"/>
+                <a:ea typeface="微软雅黑" panose="020B0503020204020204" pitchFamily="34" charset="-122"/>
+                <a:sym typeface="+mn-ea"/>
+              </a:rPr>
+              <a:t>:</a:t>
+            </a:r>
+            <a:endParaRPr lang="zh-CN" altLang="en-US" sz="2400" b="1" dirty="0">
+              <a:solidFill>
+                <a:srgbClr val="103380"/>
+              </a:solidFill>
+              <a:latin typeface="微软雅黑" panose="020B0503020204020204" pitchFamily="34" charset="-122"/>
+              <a:ea typeface="微软雅黑" panose="020B0503020204020204" pitchFamily="34" charset="-122"/>
+              <a:sym typeface="+mn-ea"/>
+            </a:endParaRPr>
+          </a:p>
+          <a:p>
+            <a:pPr marL="342900" indent="-342900" algn="l">
+              <a:lnSpc>
+                <a:spcPct val="125000"/>
+              </a:lnSpc>
+              <a:spcBef>
+                <a:spcPts val="0"/>
+              </a:spcBef>
+              <a:spcAft>
+                <a:spcPts val="0"/>
+              </a:spcAft>
+              <a:buClrTx/>
+              <a:buSzTx/>
+              <a:buFont typeface="Wingdings" panose="05000000000000000000" charset="0"/>
+              <a:buChar char="l"/>
+            </a:pPr>
+            <a:r>
+              <a:rPr lang="zh-CN" altLang="en-US" sz="2000" b="1" dirty="0">
+                <a:solidFill>
+                  <a:srgbClr val="103380"/>
+                </a:solidFill>
+                <a:latin typeface="微软雅黑" panose="020B0503020204020204" pitchFamily="34" charset="-122"/>
+                <a:ea typeface="微软雅黑" panose="020B0503020204020204" pitchFamily="34" charset="-122"/>
+                <a:sym typeface="+mn-ea"/>
+              </a:rPr>
+              <a:t>基础 </a:t>
+            </a:r>
+            <a:r>
+              <a:rPr lang="en-US" altLang="zh-CN" sz="2000" b="1" dirty="0">
+                <a:solidFill>
+                  <a:srgbClr val="103380"/>
+                </a:solidFill>
+                <a:latin typeface="微软雅黑" panose="020B0503020204020204" pitchFamily="34" charset="-122"/>
+                <a:ea typeface="微软雅黑" panose="020B0503020204020204" pitchFamily="34" charset="-122"/>
+                <a:sym typeface="+mn-ea"/>
+              </a:rPr>
+              <a:t>NL2SQL  - chinook</a:t>
+            </a:r>
+            <a:r>
+              <a:rPr lang="zh-CN" altLang="en-US" sz="2000" b="1" dirty="0">
+                <a:solidFill>
+                  <a:srgbClr val="103380"/>
+                </a:solidFill>
+                <a:latin typeface="微软雅黑" panose="020B0503020204020204" pitchFamily="34" charset="-122"/>
+                <a:ea typeface="微软雅黑" panose="020B0503020204020204" pitchFamily="34" charset="-122"/>
+                <a:sym typeface="+mn-ea"/>
+              </a:rPr>
+              <a:t>这边没问题，</a:t>
+            </a:r>
+            <a:r>
+              <a:rPr lang="zh-CN" altLang="en-US" sz="2000" b="1" dirty="0">
+                <a:solidFill>
+                  <a:srgbClr val="103380"/>
+                </a:solidFill>
+                <a:latin typeface="微软雅黑" panose="020B0503020204020204" pitchFamily="34" charset="-122"/>
+                <a:ea typeface="微软雅黑" panose="020B0503020204020204" pitchFamily="34" charset="-122"/>
+                <a:sym typeface="+mn-ea"/>
+              </a:rPr>
+              <a:t>需扩充测评集</a:t>
+            </a:r>
+            <a:endParaRPr lang="en-US" altLang="zh-CN" sz="2000" b="1" dirty="0">
+              <a:solidFill>
+                <a:srgbClr val="103380"/>
+              </a:solidFill>
+              <a:latin typeface="微软雅黑" panose="020B0503020204020204" pitchFamily="34" charset="-122"/>
+              <a:ea typeface="微软雅黑" panose="020B0503020204020204" pitchFamily="34" charset="-122"/>
+              <a:sym typeface="+mn-ea"/>
+            </a:endParaRPr>
+          </a:p>
+          <a:p>
+            <a:pPr marL="342900" indent="-342900" algn="l">
+              <a:lnSpc>
+                <a:spcPct val="125000"/>
+              </a:lnSpc>
+              <a:spcBef>
+                <a:spcPts val="0"/>
+              </a:spcBef>
+              <a:spcAft>
+                <a:spcPts val="0"/>
+              </a:spcAft>
+              <a:buClrTx/>
+              <a:buSzTx/>
+              <a:buFont typeface="Wingdings" panose="05000000000000000000" charset="0"/>
+              <a:buChar char="l"/>
+            </a:pPr>
+            <a:r>
+              <a:rPr lang="zh-CN" altLang="en-US" sz="2000" b="1" dirty="0">
+                <a:solidFill>
+                  <a:srgbClr val="103380"/>
+                </a:solidFill>
+                <a:highlight>
+                  <a:srgbClr val="FFFF00"/>
+                </a:highlight>
+                <a:latin typeface="微软雅黑" panose="020B0503020204020204" pitchFamily="34" charset="-122"/>
+                <a:ea typeface="微软雅黑" panose="020B0503020204020204" pitchFamily="34" charset="-122"/>
+                <a:sym typeface="+mn-ea"/>
+              </a:rPr>
+              <a:t>基础文档问答</a:t>
+            </a:r>
+            <a:r>
+              <a:rPr lang="en-US" altLang="zh-CN" sz="2000" b="1" dirty="0">
+                <a:solidFill>
+                  <a:srgbClr val="103380"/>
+                </a:solidFill>
+                <a:highlight>
+                  <a:srgbClr val="FFFF00"/>
+                </a:highlight>
+                <a:latin typeface="微软雅黑" panose="020B0503020204020204" pitchFamily="34" charset="-122"/>
+                <a:ea typeface="微软雅黑" panose="020B0503020204020204" pitchFamily="34" charset="-122"/>
+                <a:sym typeface="+mn-ea"/>
+              </a:rPr>
+              <a:t>eval_basic_rag.jsonl - RAG</a:t>
+            </a:r>
+            <a:r>
+              <a:rPr lang="zh-CN" altLang="en-US" sz="2000" b="1" dirty="0">
+                <a:solidFill>
+                  <a:srgbClr val="103380"/>
+                </a:solidFill>
+                <a:highlight>
+                  <a:srgbClr val="FFFF00"/>
+                </a:highlight>
+                <a:latin typeface="微软雅黑" panose="020B0503020204020204" pitchFamily="34" charset="-122"/>
+                <a:ea typeface="微软雅黑" panose="020B0503020204020204" pitchFamily="34" charset="-122"/>
+                <a:sym typeface="+mn-ea"/>
+              </a:rPr>
+              <a:t>精度问题</a:t>
+            </a:r>
+            <a:endParaRPr lang="zh-CN" altLang="en-US" sz="2000" b="1" dirty="0">
+              <a:solidFill>
+                <a:srgbClr val="103380"/>
+              </a:solidFill>
+              <a:highlight>
+                <a:srgbClr val="FFFF00"/>
+              </a:highlight>
+              <a:latin typeface="微软雅黑" panose="020B0503020204020204" pitchFamily="34" charset="-122"/>
+              <a:ea typeface="微软雅黑" panose="020B0503020204020204" pitchFamily="34" charset="-122"/>
+              <a:sym typeface="+mn-ea"/>
+            </a:endParaRPr>
+          </a:p>
+          <a:p>
+            <a:pPr marL="342900" indent="-342900" algn="l">
+              <a:lnSpc>
+                <a:spcPct val="125000"/>
+              </a:lnSpc>
+              <a:spcBef>
+                <a:spcPts val="0"/>
+              </a:spcBef>
+              <a:spcAft>
+                <a:spcPts val="0"/>
+              </a:spcAft>
+              <a:buClrTx/>
+              <a:buSzTx/>
+              <a:buFont typeface="Wingdings" panose="05000000000000000000" charset="0"/>
+              <a:buChar char="l"/>
+            </a:pPr>
+            <a:r>
+              <a:rPr lang="zh-CN" altLang="en-US" sz="2000" b="1" dirty="0">
+                <a:solidFill>
+                  <a:srgbClr val="103380"/>
+                </a:solidFill>
+                <a:highlight>
+                  <a:srgbClr val="FFFF00"/>
+                </a:highlight>
+                <a:latin typeface="微软雅黑" panose="020B0503020204020204" pitchFamily="34" charset="-122"/>
+                <a:ea typeface="微软雅黑" panose="020B0503020204020204" pitchFamily="34" charset="-122"/>
+                <a:sym typeface="+mn-ea"/>
+              </a:rPr>
+              <a:t>多文档问答</a:t>
+            </a:r>
+            <a:r>
+              <a:rPr lang="en-US" altLang="zh-CN" sz="2000" b="1" dirty="0">
+                <a:solidFill>
+                  <a:srgbClr val="103380"/>
+                </a:solidFill>
+                <a:highlight>
+                  <a:srgbClr val="FFFF00"/>
+                </a:highlight>
+                <a:latin typeface="微软雅黑" panose="020B0503020204020204" pitchFamily="34" charset="-122"/>
+                <a:ea typeface="微软雅黑" panose="020B0503020204020204" pitchFamily="34" charset="-122"/>
+                <a:sym typeface="+mn-ea"/>
+              </a:rPr>
+              <a:t> - RAG </a:t>
+            </a:r>
+            <a:r>
+              <a:rPr lang="zh-CN" altLang="en-US" sz="2000" b="1" dirty="0">
+                <a:solidFill>
+                  <a:srgbClr val="103380"/>
+                </a:solidFill>
+                <a:highlight>
+                  <a:srgbClr val="FFFF00"/>
+                </a:highlight>
+                <a:latin typeface="微软雅黑" panose="020B0503020204020204" pitchFamily="34" charset="-122"/>
+                <a:ea typeface="微软雅黑" panose="020B0503020204020204" pitchFamily="34" charset="-122"/>
+                <a:sym typeface="+mn-ea"/>
+              </a:rPr>
+              <a:t>问题</a:t>
+            </a:r>
+            <a:endParaRPr lang="zh-CN" altLang="en-US" sz="2000" b="1" dirty="0">
+              <a:solidFill>
+                <a:srgbClr val="103380"/>
+              </a:solidFill>
+              <a:highlight>
+                <a:srgbClr val="FFFF00"/>
+              </a:highlight>
+              <a:latin typeface="微软雅黑" panose="020B0503020204020204" pitchFamily="34" charset="-122"/>
+              <a:ea typeface="微软雅黑" panose="020B0503020204020204" pitchFamily="34" charset="-122"/>
+              <a:sym typeface="+mn-ea"/>
+            </a:endParaRPr>
+          </a:p>
+          <a:p>
+            <a:pPr marL="342900" indent="-342900" algn="l">
+              <a:lnSpc>
+                <a:spcPct val="125000"/>
+              </a:lnSpc>
+              <a:spcBef>
+                <a:spcPts val="0"/>
+              </a:spcBef>
+              <a:spcAft>
+                <a:spcPts val="0"/>
+              </a:spcAft>
+              <a:buClrTx/>
+              <a:buSzTx/>
+              <a:buFont typeface="Wingdings" panose="05000000000000000000" charset="0"/>
+              <a:buChar char="l"/>
+            </a:pPr>
+            <a:r>
+              <a:rPr lang="zh-CN" altLang="en-US" sz="2000" b="1" dirty="0">
+                <a:solidFill>
+                  <a:srgbClr val="103380"/>
+                </a:solidFill>
+                <a:highlight>
+                  <a:srgbClr val="FFFF00"/>
+                </a:highlight>
+                <a:latin typeface="微软雅黑" panose="020B0503020204020204" pitchFamily="34" charset="-122"/>
+                <a:ea typeface="微软雅黑" panose="020B0503020204020204" pitchFamily="34" charset="-122"/>
+                <a:sym typeface="+mn-ea"/>
+              </a:rPr>
+              <a:t>跨源问答</a:t>
+            </a:r>
+            <a:endParaRPr lang="zh-CN" altLang="en-US" sz="2000" b="1" dirty="0">
+              <a:solidFill>
+                <a:srgbClr val="103380"/>
+              </a:solidFill>
+              <a:highlight>
+                <a:srgbClr val="FFFF00"/>
+              </a:highlight>
+              <a:latin typeface="微软雅黑" panose="020B0503020204020204" pitchFamily="34" charset="-122"/>
+              <a:ea typeface="微软雅黑" panose="020B0503020204020204" pitchFamily="34" charset="-122"/>
+              <a:sym typeface="+mn-ea"/>
+            </a:endParaRPr>
+          </a:p>
+          <a:p>
+            <a:pPr algn="l">
+              <a:lnSpc>
+                <a:spcPct val="125000"/>
+              </a:lnSpc>
+              <a:spcBef>
+                <a:spcPts val="0"/>
+              </a:spcBef>
+              <a:spcAft>
+                <a:spcPts val="0"/>
+              </a:spcAft>
+              <a:buClrTx/>
+              <a:buSzTx/>
+              <a:buFont typeface="Wingdings" panose="05000000000000000000" charset="0"/>
+              <a:buNone/>
+            </a:pPr>
+            <a:r>
+              <a:rPr lang="zh-CN" altLang="en-US" sz="2400" b="1" dirty="0">
+                <a:solidFill>
+                  <a:srgbClr val="103380"/>
+                </a:solidFill>
+                <a:latin typeface="微软雅黑" panose="020B0503020204020204" pitchFamily="34" charset="-122"/>
+                <a:ea typeface="微软雅黑" panose="020B0503020204020204" pitchFamily="34" charset="-122"/>
+                <a:sym typeface="+mn-ea"/>
+              </a:rPr>
+              <a:t>中级任务：</a:t>
+            </a:r>
+            <a:endParaRPr lang="zh-CN" altLang="en-US" sz="2400" b="1" dirty="0">
+              <a:solidFill>
+                <a:srgbClr val="103380"/>
+              </a:solidFill>
+              <a:latin typeface="微软雅黑" panose="020B0503020204020204" pitchFamily="34" charset="-122"/>
+              <a:ea typeface="微软雅黑" panose="020B0503020204020204" pitchFamily="34" charset="-122"/>
+              <a:sym typeface="+mn-ea"/>
+            </a:endParaRPr>
+          </a:p>
+          <a:p>
+            <a:pPr marL="342900" indent="-342900" algn="l">
+              <a:lnSpc>
+                <a:spcPct val="125000"/>
+              </a:lnSpc>
+              <a:spcBef>
+                <a:spcPts val="0"/>
+              </a:spcBef>
+              <a:spcAft>
+                <a:spcPts val="0"/>
+              </a:spcAft>
+              <a:buClrTx/>
+              <a:buSzTx/>
+              <a:buFont typeface="Wingdings" panose="05000000000000000000" charset="0"/>
+              <a:buChar char="l"/>
+            </a:pPr>
+            <a:r>
+              <a:rPr lang="zh-CN" altLang="en-US" sz="2000" b="1" dirty="0">
+                <a:solidFill>
+                  <a:srgbClr val="103380"/>
+                </a:solidFill>
+                <a:latin typeface="微软雅黑" panose="020B0503020204020204" pitchFamily="34" charset="-122"/>
+                <a:ea typeface="微软雅黑" panose="020B0503020204020204" pitchFamily="34" charset="-122"/>
+                <a:sym typeface="+mn-ea"/>
+              </a:rPr>
+              <a:t>专项·主动澄清</a:t>
+            </a:r>
+            <a:r>
+              <a:rPr lang="en-US" altLang="zh-CN" sz="2000" b="1" dirty="0">
+                <a:solidFill>
+                  <a:srgbClr val="103380"/>
+                </a:solidFill>
+                <a:latin typeface="微软雅黑" panose="020B0503020204020204" pitchFamily="34" charset="-122"/>
+                <a:ea typeface="微软雅黑" panose="020B0503020204020204" pitchFamily="34" charset="-122"/>
+                <a:sym typeface="+mn-ea"/>
+              </a:rPr>
+              <a:t>eval_special_clarification.jsonl - </a:t>
+            </a:r>
+            <a:r>
+              <a:rPr lang="zh-CN" altLang="en-US" sz="2000" b="1" dirty="0">
+                <a:solidFill>
+                  <a:srgbClr val="103380"/>
+                </a:solidFill>
+                <a:latin typeface="微软雅黑" panose="020B0503020204020204" pitchFamily="34" charset="-122"/>
+                <a:ea typeface="微软雅黑" panose="020B0503020204020204" pitchFamily="34" charset="-122"/>
+                <a:sym typeface="+mn-ea"/>
+              </a:rPr>
+              <a:t>中级三</a:t>
+            </a:r>
+            <a:r>
+              <a:rPr lang="en-US" altLang="zh-CN" sz="2000" b="1" dirty="0">
+                <a:solidFill>
+                  <a:srgbClr val="103380"/>
+                </a:solidFill>
+                <a:latin typeface="微软雅黑" panose="020B0503020204020204" pitchFamily="34" charset="-122"/>
+                <a:ea typeface="微软雅黑" panose="020B0503020204020204" pitchFamily="34" charset="-122"/>
+                <a:sym typeface="+mn-ea"/>
+              </a:rPr>
+              <a:t> </a:t>
+            </a:r>
+            <a:endParaRPr lang="zh-CN" altLang="en-US" sz="2000" b="1" dirty="0">
+              <a:solidFill>
+                <a:srgbClr val="103380"/>
+              </a:solidFill>
+              <a:latin typeface="微软雅黑" panose="020B0503020204020204" pitchFamily="34" charset="-122"/>
+              <a:ea typeface="微软雅黑" panose="020B0503020204020204" pitchFamily="34" charset="-122"/>
+              <a:sym typeface="+mn-ea"/>
+            </a:endParaRPr>
+          </a:p>
+          <a:p>
+            <a:pPr marL="342900" indent="-342900" algn="l">
+              <a:lnSpc>
+                <a:spcPct val="125000"/>
+              </a:lnSpc>
+              <a:spcBef>
+                <a:spcPts val="0"/>
+              </a:spcBef>
+              <a:spcAft>
+                <a:spcPts val="0"/>
+              </a:spcAft>
+              <a:buClrTx/>
+              <a:buSzTx/>
+              <a:buFont typeface="Wingdings" panose="05000000000000000000" charset="0"/>
+              <a:buChar char="l"/>
+            </a:pPr>
+            <a:r>
+              <a:rPr lang="zh-CN" altLang="en-US" sz="2000" b="1" dirty="0">
+                <a:solidFill>
+                  <a:srgbClr val="103380"/>
+                </a:solidFill>
+                <a:latin typeface="微软雅黑" panose="020B0503020204020204" pitchFamily="34" charset="-122"/>
+                <a:ea typeface="微软雅黑" panose="020B0503020204020204" pitchFamily="34" charset="-122"/>
+                <a:sym typeface="+mn-ea"/>
+              </a:rPr>
+              <a:t>专项·别名与分类</a:t>
+            </a:r>
+            <a:r>
+              <a:rPr lang="en-US" altLang="zh-CN" sz="2000" b="1" dirty="0">
+                <a:solidFill>
+                  <a:srgbClr val="103380"/>
+                </a:solidFill>
+                <a:latin typeface="微软雅黑" panose="020B0503020204020204" pitchFamily="34" charset="-122"/>
+                <a:ea typeface="微软雅黑" panose="020B0503020204020204" pitchFamily="34" charset="-122"/>
+                <a:sym typeface="+mn-ea"/>
+              </a:rPr>
+              <a:t>eval_special_alias_robustness.jsonl - </a:t>
+            </a:r>
+            <a:r>
+              <a:rPr lang="zh-CN" altLang="en-US" sz="2000" b="1" dirty="0">
+                <a:solidFill>
+                  <a:srgbClr val="103380"/>
+                </a:solidFill>
+                <a:latin typeface="微软雅黑" panose="020B0503020204020204" pitchFamily="34" charset="-122"/>
+                <a:ea typeface="微软雅黑" panose="020B0503020204020204" pitchFamily="34" charset="-122"/>
+                <a:sym typeface="+mn-ea"/>
+              </a:rPr>
+              <a:t>中级一</a:t>
+            </a:r>
+            <a:endParaRPr lang="zh-CN" altLang="en-US" sz="2000" b="1" dirty="0">
+              <a:solidFill>
+                <a:srgbClr val="103380"/>
+              </a:solidFill>
+              <a:latin typeface="微软雅黑" panose="020B0503020204020204" pitchFamily="34" charset="-122"/>
+              <a:ea typeface="微软雅黑" panose="020B0503020204020204" pitchFamily="34" charset="-122"/>
+              <a:sym typeface="+mn-ea"/>
+            </a:endParaRPr>
+          </a:p>
+          <a:p>
+            <a:pPr marL="342900" indent="-342900" algn="l">
+              <a:lnSpc>
+                <a:spcPct val="125000"/>
+              </a:lnSpc>
+              <a:spcBef>
+                <a:spcPts val="0"/>
+              </a:spcBef>
+              <a:spcAft>
+                <a:spcPts val="0"/>
+              </a:spcAft>
+              <a:buClrTx/>
+              <a:buSzTx/>
+              <a:buFont typeface="Wingdings" panose="05000000000000000000" charset="0"/>
+              <a:buChar char="l"/>
+            </a:pPr>
+            <a:endParaRPr lang="zh-CN" altLang="en-US" sz="2000" b="1" dirty="0">
+              <a:solidFill>
+                <a:srgbClr val="103380"/>
+              </a:solidFill>
+              <a:latin typeface="微软雅黑" panose="020B0503020204020204" pitchFamily="34" charset="-122"/>
+              <a:ea typeface="微软雅黑" panose="020B0503020204020204" pitchFamily="34" charset="-122"/>
+              <a:sym typeface="+mn-ea"/>
+            </a:endParaRPr>
+          </a:p>
+          <a:p>
+            <a:pPr marL="342900" indent="-342900" algn="l">
+              <a:lnSpc>
+                <a:spcPct val="125000"/>
+              </a:lnSpc>
+              <a:spcBef>
+                <a:spcPts val="0"/>
+              </a:spcBef>
+              <a:spcAft>
+                <a:spcPts val="0"/>
+              </a:spcAft>
+              <a:buClrTx/>
+              <a:buSzTx/>
+              <a:buFont typeface="Wingdings" panose="05000000000000000000" charset="0"/>
+              <a:buChar char="l"/>
+            </a:pPr>
+            <a:r>
+              <a:rPr lang="zh-CN" altLang="en-US" sz="2000" b="1" dirty="0">
+                <a:solidFill>
+                  <a:srgbClr val="103380"/>
+                </a:solidFill>
+                <a:latin typeface="微软雅黑" panose="020B0503020204020204" pitchFamily="34" charset="-122"/>
+                <a:ea typeface="微软雅黑" panose="020B0503020204020204" pitchFamily="34" charset="-122"/>
+                <a:sym typeface="+mn-ea"/>
+              </a:rPr>
+              <a:t>专项·多表关联</a:t>
+            </a:r>
+            <a:r>
+              <a:rPr lang="en-US" altLang="zh-CN" sz="2000" b="1" dirty="0">
+                <a:solidFill>
+                  <a:srgbClr val="103380"/>
+                </a:solidFill>
+                <a:latin typeface="微软雅黑" panose="020B0503020204020204" pitchFamily="34" charset="-122"/>
+                <a:ea typeface="微软雅黑" panose="020B0503020204020204" pitchFamily="34" charset="-122"/>
+                <a:sym typeface="+mn-ea"/>
+              </a:rPr>
+              <a:t>eval_special_multitable.jsonl</a:t>
+            </a:r>
+            <a:r>
+              <a:rPr lang="zh-CN" altLang="en-US" sz="2000" b="1" dirty="0">
+                <a:solidFill>
+                  <a:srgbClr val="103380"/>
+                </a:solidFill>
+                <a:latin typeface="微软雅黑" panose="020B0503020204020204" pitchFamily="34" charset="-122"/>
+                <a:ea typeface="微软雅黑" panose="020B0503020204020204" pitchFamily="34" charset="-122"/>
+                <a:sym typeface="+mn-ea"/>
+              </a:rPr>
+              <a:t> </a:t>
+            </a:r>
+            <a:r>
+              <a:rPr lang="en-US" altLang="zh-CN" sz="2000" b="1" dirty="0">
+                <a:solidFill>
+                  <a:srgbClr val="103380"/>
+                </a:solidFill>
+                <a:latin typeface="微软雅黑" panose="020B0503020204020204" pitchFamily="34" charset="-122"/>
+                <a:ea typeface="微软雅黑" panose="020B0503020204020204" pitchFamily="34" charset="-122"/>
+                <a:sym typeface="+mn-ea"/>
+              </a:rPr>
+              <a:t>- </a:t>
+            </a:r>
+            <a:r>
+              <a:rPr lang="zh-CN" altLang="en-US" sz="2000" b="1" dirty="0">
+                <a:solidFill>
+                  <a:srgbClr val="103380"/>
+                </a:solidFill>
+                <a:latin typeface="微软雅黑" panose="020B0503020204020204" pitchFamily="34" charset="-122"/>
+                <a:ea typeface="微软雅黑" panose="020B0503020204020204" pitchFamily="34" charset="-122"/>
+                <a:sym typeface="+mn-ea"/>
+              </a:rPr>
+              <a:t>中级</a:t>
+            </a:r>
+            <a:r>
+              <a:rPr lang="zh-CN" altLang="en-US" sz="2000" b="1" dirty="0">
+                <a:solidFill>
+                  <a:srgbClr val="103380"/>
+                </a:solidFill>
+                <a:latin typeface="微软雅黑" panose="020B0503020204020204" pitchFamily="34" charset="-122"/>
+                <a:ea typeface="微软雅黑" panose="020B0503020204020204" pitchFamily="34" charset="-122"/>
+                <a:sym typeface="+mn-ea"/>
+              </a:rPr>
+              <a:t>四五</a:t>
+            </a:r>
+            <a:endParaRPr lang="zh-CN" altLang="en-US" sz="2000" b="1" dirty="0">
+              <a:solidFill>
+                <a:srgbClr val="103380"/>
+              </a:solidFill>
+              <a:latin typeface="微软雅黑" panose="020B0503020204020204" pitchFamily="34" charset="-122"/>
+              <a:ea typeface="微软雅黑" panose="020B0503020204020204" pitchFamily="34" charset="-122"/>
+              <a:sym typeface="+mn-ea"/>
+            </a:endParaRPr>
+          </a:p>
+          <a:p>
+            <a:pPr marL="342900" indent="-342900" algn="l">
+              <a:lnSpc>
+                <a:spcPct val="125000"/>
+              </a:lnSpc>
+              <a:spcBef>
+                <a:spcPts val="0"/>
+              </a:spcBef>
+              <a:spcAft>
+                <a:spcPts val="0"/>
+              </a:spcAft>
+              <a:buClrTx/>
+              <a:buSzTx/>
+              <a:buFont typeface="Wingdings" panose="05000000000000000000" charset="0"/>
+              <a:buChar char="l"/>
+            </a:pPr>
+            <a:r>
+              <a:rPr lang="zh-CN" altLang="en-US" sz="2000" b="1" dirty="0">
+                <a:solidFill>
+                  <a:srgbClr val="103380"/>
+                </a:solidFill>
+                <a:latin typeface="微软雅黑" panose="020B0503020204020204" pitchFamily="34" charset="-122"/>
+                <a:ea typeface="微软雅黑" panose="020B0503020204020204" pitchFamily="34" charset="-122"/>
+                <a:sym typeface="+mn-ea"/>
+              </a:rPr>
+              <a:t>专项·公式计算</a:t>
+            </a:r>
+            <a:r>
+              <a:rPr lang="en-US" altLang="zh-CN" sz="2000" b="1" dirty="0">
+                <a:solidFill>
+                  <a:srgbClr val="103380"/>
+                </a:solidFill>
+                <a:latin typeface="微软雅黑" panose="020B0503020204020204" pitchFamily="34" charset="-122"/>
+                <a:ea typeface="微软雅黑" panose="020B0503020204020204" pitchFamily="34" charset="-122"/>
+                <a:sym typeface="+mn-ea"/>
+              </a:rPr>
+              <a:t>eval_special_formula.jsonl - </a:t>
+            </a:r>
+            <a:r>
+              <a:rPr lang="zh-CN" altLang="en-US" sz="2000" b="1" dirty="0">
+                <a:solidFill>
+                  <a:srgbClr val="103380"/>
+                </a:solidFill>
+                <a:latin typeface="微软雅黑" panose="020B0503020204020204" pitchFamily="34" charset="-122"/>
+                <a:ea typeface="微软雅黑" panose="020B0503020204020204" pitchFamily="34" charset="-122"/>
+                <a:sym typeface="+mn-ea"/>
+              </a:rPr>
+              <a:t>中级六</a:t>
+            </a:r>
+            <a:endParaRPr lang="zh-CN" altLang="en-US" sz="2000" b="1" dirty="0">
+              <a:solidFill>
+                <a:srgbClr val="103380"/>
+              </a:solidFill>
+              <a:latin typeface="微软雅黑" panose="020B0503020204020204" pitchFamily="34" charset="-122"/>
+              <a:ea typeface="微软雅黑" panose="020B0503020204020204" pitchFamily="34" charset="-122"/>
+              <a:sym typeface="+mn-ea"/>
+            </a:endParaRPr>
+          </a:p>
+          <a:p>
+            <a:pPr marL="342900" indent="-342900" algn="l">
+              <a:lnSpc>
+                <a:spcPct val="125000"/>
+              </a:lnSpc>
+              <a:spcBef>
+                <a:spcPts val="0"/>
+              </a:spcBef>
+              <a:spcAft>
+                <a:spcPts val="0"/>
+              </a:spcAft>
+              <a:buClrTx/>
+              <a:buSzTx/>
+              <a:buFont typeface="Wingdings" panose="05000000000000000000" charset="0"/>
+              <a:buChar char="l"/>
+            </a:pPr>
+            <a:r>
+              <a:rPr lang="zh-CN" altLang="en-US" sz="2000" b="1" dirty="0">
+                <a:solidFill>
+                  <a:srgbClr val="103380"/>
+                </a:solidFill>
+                <a:latin typeface="微软雅黑" panose="020B0503020204020204" pitchFamily="34" charset="-122"/>
+                <a:ea typeface="微软雅黑" panose="020B0503020204020204" pitchFamily="34" charset="-122"/>
+                <a:sym typeface="+mn-ea"/>
+              </a:rPr>
+              <a:t>专项·多模态（扩数据集，修测评集题目）</a:t>
+            </a:r>
+            <a:endParaRPr lang="zh-CN" altLang="en-US" sz="2000" b="1" dirty="0">
+              <a:solidFill>
+                <a:srgbClr val="103380"/>
+              </a:solidFill>
+              <a:latin typeface="微软雅黑" panose="020B0503020204020204" pitchFamily="34" charset="-122"/>
+              <a:ea typeface="微软雅黑" panose="020B0503020204020204" pitchFamily="34" charset="-122"/>
+              <a:sym typeface="+mn-ea"/>
+            </a:endParaRPr>
+          </a:p>
+          <a:p>
+            <a:pPr marL="342900" indent="-342900" algn="l">
+              <a:lnSpc>
+                <a:spcPct val="125000"/>
+              </a:lnSpc>
+              <a:spcBef>
+                <a:spcPts val="0"/>
+              </a:spcBef>
+              <a:spcAft>
+                <a:spcPts val="0"/>
+              </a:spcAft>
+              <a:buClrTx/>
+              <a:buSzTx/>
+              <a:buFont typeface="Wingdings" panose="05000000000000000000" charset="0"/>
+              <a:buChar char="l"/>
+            </a:pPr>
+            <a:r>
+              <a:rPr lang="zh-CN" altLang="en-US" sz="2000" b="1" dirty="0">
+                <a:solidFill>
+                  <a:srgbClr val="103380"/>
+                </a:solidFill>
+                <a:latin typeface="微软雅黑" panose="020B0503020204020204" pitchFamily="34" charset="-122"/>
+                <a:ea typeface="微软雅黑" panose="020B0503020204020204" pitchFamily="34" charset="-122"/>
+                <a:sym typeface="+mn-ea"/>
+              </a:rPr>
+              <a:t>专项</a:t>
+            </a:r>
+            <a:r>
+              <a:rPr lang="en-US" altLang="zh-CN" sz="2000" b="1" dirty="0">
+                <a:solidFill>
+                  <a:srgbClr val="103380"/>
+                </a:solidFill>
+                <a:latin typeface="微软雅黑" panose="020B0503020204020204" pitchFamily="34" charset="-122"/>
+                <a:ea typeface="微软雅黑" panose="020B0503020204020204" pitchFamily="34" charset="-122"/>
+                <a:sym typeface="+mn-ea"/>
+              </a:rPr>
+              <a:t>·</a:t>
+            </a:r>
+            <a:r>
+              <a:rPr lang="zh-CN" altLang="en-US" sz="2000" b="1" dirty="0">
+                <a:solidFill>
+                  <a:srgbClr val="103380"/>
+                </a:solidFill>
+                <a:latin typeface="微软雅黑" panose="020B0503020204020204" pitchFamily="34" charset="-122"/>
+                <a:ea typeface="微软雅黑" panose="020B0503020204020204" pitchFamily="34" charset="-122"/>
+                <a:sym typeface="+mn-ea"/>
+              </a:rPr>
+              <a:t>多轮会话（</a:t>
+            </a:r>
+            <a:r>
+              <a:rPr lang="zh-CN" altLang="en-US" sz="2000" b="1" dirty="0">
+                <a:solidFill>
+                  <a:srgbClr val="103380"/>
+                </a:solidFill>
+                <a:latin typeface="微软雅黑" panose="020B0503020204020204" pitchFamily="34" charset="-122"/>
+                <a:ea typeface="微软雅黑" panose="020B0503020204020204" pitchFamily="34" charset="-122"/>
+                <a:sym typeface="+mn-ea"/>
+              </a:rPr>
+              <a:t>可删测评集</a:t>
+            </a:r>
+            <a:r>
+              <a:rPr lang="zh-CN" altLang="en-US" sz="2000" b="1" dirty="0">
+                <a:solidFill>
+                  <a:srgbClr val="103380"/>
+                </a:solidFill>
+                <a:latin typeface="微软雅黑" panose="020B0503020204020204" pitchFamily="34" charset="-122"/>
+                <a:ea typeface="微软雅黑" panose="020B0503020204020204" pitchFamily="34" charset="-122"/>
+                <a:sym typeface="+mn-ea"/>
+              </a:rPr>
+              <a:t>）</a:t>
+            </a:r>
+            <a:endParaRPr lang="zh-CN" altLang="en-US" sz="2000" b="1" dirty="0">
+              <a:solidFill>
+                <a:srgbClr val="103380"/>
+              </a:solidFill>
+              <a:latin typeface="微软雅黑" panose="020B0503020204020204" pitchFamily="34" charset="-122"/>
+              <a:ea typeface="微软雅黑" panose="020B0503020204020204" pitchFamily="34" charset="-122"/>
+              <a:sym typeface="+mn-ea"/>
+            </a:endParaRPr>
+          </a:p>
+          <a:p>
+            <a:pPr marL="342900" indent="-342900" algn="l">
+              <a:lnSpc>
+                <a:spcPct val="125000"/>
+              </a:lnSpc>
+              <a:spcBef>
+                <a:spcPts val="0"/>
+              </a:spcBef>
+              <a:spcAft>
+                <a:spcPts val="0"/>
+              </a:spcAft>
+              <a:buClrTx/>
+              <a:buSzTx/>
+              <a:buFont typeface="Wingdings" panose="05000000000000000000" charset="0"/>
+              <a:buChar char="l"/>
+            </a:pPr>
+            <a:r>
+              <a:rPr lang="zh-CN" altLang="en-US" sz="2000" b="1" dirty="0">
+                <a:solidFill>
+                  <a:srgbClr val="103380"/>
+                </a:solidFill>
+                <a:latin typeface="微软雅黑" panose="020B0503020204020204" pitchFamily="34" charset="-122"/>
+                <a:ea typeface="微软雅黑" panose="020B0503020204020204" pitchFamily="34" charset="-122"/>
+                <a:sym typeface="+mn-ea"/>
+              </a:rPr>
+              <a:t>专项·无证据处理（边界不清晰，可删测评集</a:t>
+            </a:r>
+            <a:r>
+              <a:rPr lang="en-US" altLang="zh-CN" sz="2000" b="1" dirty="0">
+                <a:solidFill>
+                  <a:srgbClr val="103380"/>
+                </a:solidFill>
+                <a:latin typeface="微软雅黑" panose="020B0503020204020204" pitchFamily="34" charset="-122"/>
+                <a:ea typeface="微软雅黑" panose="020B0503020204020204" pitchFamily="34" charset="-122"/>
+                <a:sym typeface="+mn-ea"/>
+              </a:rPr>
+              <a:t>/</a:t>
+            </a:r>
+            <a:r>
+              <a:rPr lang="zh-CN" altLang="en-US" sz="2000" b="1" dirty="0">
+                <a:solidFill>
+                  <a:srgbClr val="103380"/>
+                </a:solidFill>
+                <a:latin typeface="微软雅黑" panose="020B0503020204020204" pitchFamily="34" charset="-122"/>
+                <a:ea typeface="微软雅黑" panose="020B0503020204020204" pitchFamily="34" charset="-122"/>
+                <a:sym typeface="+mn-ea"/>
+              </a:rPr>
+              <a:t>修改题目，不要和主动澄清</a:t>
+            </a:r>
+            <a:r>
+              <a:rPr lang="zh-CN" altLang="en-US" sz="2000" b="1" dirty="0">
+                <a:solidFill>
+                  <a:srgbClr val="103380"/>
+                </a:solidFill>
+                <a:latin typeface="微软雅黑" panose="020B0503020204020204" pitchFamily="34" charset="-122"/>
+                <a:ea typeface="微软雅黑" panose="020B0503020204020204" pitchFamily="34" charset="-122"/>
+                <a:sym typeface="+mn-ea"/>
+              </a:rPr>
+              <a:t>混淆）</a:t>
+            </a:r>
+            <a:endParaRPr lang="zh-CN" altLang="en-US" sz="2000" b="1" dirty="0">
+              <a:solidFill>
+                <a:srgbClr val="103380"/>
+              </a:solidFill>
+              <a:latin typeface="微软雅黑" panose="020B0503020204020204" pitchFamily="34" charset="-122"/>
+              <a:ea typeface="微软雅黑" panose="020B0503020204020204" pitchFamily="34" charset="-122"/>
+              <a:sym typeface="+mn-ea"/>
+            </a:endParaRPr>
+          </a:p>
+          <a:p>
+            <a:pPr marL="342900" indent="-342900" algn="l">
+              <a:lnSpc>
+                <a:spcPct val="125000"/>
+              </a:lnSpc>
+              <a:spcBef>
+                <a:spcPts val="0"/>
+              </a:spcBef>
+              <a:spcAft>
+                <a:spcPts val="0"/>
+              </a:spcAft>
+              <a:buClrTx/>
+              <a:buSzTx/>
+              <a:buFont typeface="Wingdings" panose="05000000000000000000" charset="0"/>
+              <a:buChar char="l"/>
+            </a:pPr>
+            <a:endParaRPr lang="zh-CN" altLang="en-US" sz="2000" b="1" dirty="0">
+              <a:solidFill>
+                <a:srgbClr val="103380"/>
+              </a:solidFill>
+              <a:latin typeface="微软雅黑" panose="020B0503020204020204" pitchFamily="34" charset="-122"/>
+              <a:ea typeface="微软雅黑" panose="020B0503020204020204" pitchFamily="34" charset="-122"/>
+              <a:sym typeface="+mn-ea"/>
+            </a:endParaRPr>
+          </a:p>
+          <a:p>
+            <a:pPr indent="0" algn="l">
+              <a:lnSpc>
+                <a:spcPct val="125000"/>
+              </a:lnSpc>
+              <a:spcBef>
+                <a:spcPts val="0"/>
+              </a:spcBef>
+              <a:spcAft>
+                <a:spcPts val="0"/>
+              </a:spcAft>
+              <a:buClrTx/>
+              <a:buSzTx/>
+              <a:buFont typeface="Arial" panose="020B0604020202020204" pitchFamily="34" charset="0"/>
+              <a:buNone/>
+            </a:pPr>
+            <a:endParaRPr lang="en-US" altLang="zh-CN" sz="2000" dirty="0">
+              <a:solidFill>
+                <a:srgbClr val="103380"/>
+              </a:solidFill>
+              <a:latin typeface="微软雅黑" panose="020B0503020204020204" pitchFamily="34" charset="-122"/>
+              <a:ea typeface="微软雅黑" panose="020B0503020204020204" pitchFamily="34" charset="-122"/>
+              <a:sym typeface="+mn-ea"/>
+            </a:endParaRPr>
+          </a:p>
+        </p:txBody>
+      </p:sp>
+      <p:sp>
+        <p:nvSpPr>
+          <p:cNvPr id="6" name="Text Box 3"/>
+          <p:cNvSpPr txBox="1"/>
+          <p:nvPr/>
+        </p:nvSpPr>
+        <p:spPr>
+          <a:xfrm>
+            <a:off x="7670800" y="953770"/>
+            <a:ext cx="4769485" cy="5668645"/>
+          </a:xfrm>
+          <a:prstGeom prst="rect">
+            <a:avLst/>
+          </a:prstGeom>
+          <a:noFill/>
+        </p:spPr>
+        <p:txBody>
+          <a:bodyPr wrap="square" rtlCol="0">
+            <a:noAutofit/>
+          </a:bodyPr>
+          <a:p>
+            <a:pPr marL="342900" indent="-342900" algn="l">
+              <a:lnSpc>
+                <a:spcPct val="125000"/>
+              </a:lnSpc>
+              <a:spcBef>
+                <a:spcPts val="0"/>
+              </a:spcBef>
+              <a:spcAft>
+                <a:spcPts val="0"/>
+              </a:spcAft>
+              <a:buClrTx/>
+              <a:buSzTx/>
+              <a:buFont typeface="Wingdings" panose="05000000000000000000" charset="0"/>
+              <a:buChar char="l"/>
+            </a:pPr>
+            <a:r>
+              <a:rPr lang="zh-CN" altLang="en-US" sz="2000" b="1" dirty="0">
+                <a:solidFill>
+                  <a:srgbClr val="103380"/>
+                </a:solidFill>
+                <a:latin typeface="微软雅黑" panose="020B0503020204020204" pitchFamily="34" charset="-122"/>
+                <a:ea typeface="微软雅黑" panose="020B0503020204020204" pitchFamily="34" charset="-122"/>
+                <a:sym typeface="+mn-ea"/>
+              </a:rPr>
+              <a:t>已实现</a:t>
+            </a:r>
+            <a:r>
+              <a:rPr lang="zh-CN" altLang="en-US" sz="2000" b="1" dirty="0">
+                <a:solidFill>
+                  <a:srgbClr val="103380"/>
+                </a:solidFill>
+                <a:latin typeface="微软雅黑" panose="020B0503020204020204" pitchFamily="34" charset="-122"/>
+                <a:ea typeface="微软雅黑" panose="020B0503020204020204" pitchFamily="34" charset="-122"/>
+                <a:sym typeface="+mn-ea"/>
+              </a:rPr>
+              <a:t>的：</a:t>
+            </a:r>
+            <a:endParaRPr lang="zh-CN" altLang="en-US" sz="2000" b="1" dirty="0">
+              <a:solidFill>
+                <a:srgbClr val="103380"/>
+              </a:solidFill>
+              <a:latin typeface="微软雅黑" panose="020B0503020204020204" pitchFamily="34" charset="-122"/>
+              <a:ea typeface="微软雅黑" panose="020B0503020204020204" pitchFamily="34" charset="-122"/>
+              <a:sym typeface="+mn-ea"/>
+            </a:endParaRPr>
+          </a:p>
+          <a:p>
+            <a:pPr indent="0" algn="l">
+              <a:lnSpc>
+                <a:spcPct val="125000"/>
+              </a:lnSpc>
+              <a:spcBef>
+                <a:spcPts val="0"/>
+              </a:spcBef>
+              <a:spcAft>
+                <a:spcPts val="0"/>
+              </a:spcAft>
+              <a:buClrTx/>
+              <a:buSzTx/>
+              <a:buFont typeface="Arial" panose="020B0604020202020204" pitchFamily="34" charset="0"/>
+              <a:buNone/>
+            </a:pPr>
+            <a:endParaRPr lang="en-US" altLang="zh-CN" sz="2000" dirty="0">
+              <a:solidFill>
+                <a:srgbClr val="103380"/>
+              </a:solidFill>
+              <a:latin typeface="微软雅黑" panose="020B0503020204020204" pitchFamily="34" charset="-122"/>
+              <a:ea typeface="微软雅黑" panose="020B0503020204020204" pitchFamily="34" charset="-122"/>
+              <a:sym typeface="+mn-ea"/>
+            </a:endParaRPr>
+          </a:p>
+        </p:txBody>
+      </p:sp>
+    </p:spTree>
+  </p:cSld>
+  <p:clrMapOvr>
+    <a:masterClrMapping/>
+  </p:clrMapOvr>
+</p:sld>
+</file>
+
+<file path=ppt/slides/slide14.xml><?xml version="1.0" encoding="utf-8"?>
+<p:sld xmlns:a="http://schemas.openxmlformats.org/drawingml/2006/main" xmlns:r="http://schemas.openxmlformats.org/officeDocument/2006/relationships" xmlns:p="http://schemas.openxmlformats.org/presentationml/2006/main">
+  <p:cSld>
+    <p:spTree>
+      <p:nvGrpSpPr>
+        <p:cNvPr id="1" name=""/>
+        <p:cNvGrpSpPr/>
+        <p:nvPr/>
+      </p:nvGrpSpPr>
+      <p:grpSpPr/>
+      <p:sp>
+        <p:nvSpPr>
+          <p:cNvPr id="2" name="Title 1"/>
+          <p:cNvSpPr>
+            <a:spLocks noGrp="1"/>
+          </p:cNvSpPr>
+          <p:nvPr>
+            <p:ph type="title"/>
+          </p:nvPr>
+        </p:nvSpPr>
+        <p:spPr/>
+        <p:txBody>
+          <a:bodyPr/>
+          <a:p>
+            <a:r>
+              <a:t>选择与</a:t>
+            </a:r>
+            <a:r>
+              <a:t>分工</a:t>
+            </a:r>
+          </a:p>
+        </p:txBody>
+      </p:sp>
+      <p:graphicFrame>
+        <p:nvGraphicFramePr>
+          <p:cNvPr id="3" name="表格 2"/>
+          <p:cNvGraphicFramePr/>
+          <p:nvPr/>
+        </p:nvGraphicFramePr>
+        <p:xfrm>
+          <a:off x="427990" y="836930"/>
+          <a:ext cx="11476990" cy="5584825"/>
+        </p:xfrm>
+        <a:graphic>
+          <a:graphicData uri="http://schemas.openxmlformats.org/drawingml/2006/table">
+            <a:tbl>
+              <a:tblPr>
+                <a:tableStyleId>{BC89EF96-8CEA-46FF-86C4-4CE0E7609802}</a:tableStyleId>
+              </a:tblPr>
+              <a:tblGrid>
+                <a:gridCol w="938530"/>
+                <a:gridCol w="4638040"/>
+                <a:gridCol w="3370580"/>
+                <a:gridCol w="2529840"/>
+              </a:tblGrid>
+              <a:tr h="355600">
+                <a:tc>
+                  <a:txBody>
+                    <a:bodyPr/>
+                    <a:p>
+                      <a:pPr algn="ctr"/>
+                      <a:r>
+                        <a:rPr lang="zh-CN" altLang="en-US" sz="1200" b="1"/>
+                        <a:t>线</a:t>
+                      </a:r>
+                      <a:endParaRPr lang="zh-CN" altLang="en-US" sz="1200" b="1"/>
+                    </a:p>
+                  </a:txBody>
+                  <a:tcPr marL="0" marR="0" marT="0" marB="0" anchor="ctr" anchorCtr="0"/>
+                </a:tc>
+                <a:tc>
+                  <a:txBody>
+                    <a:bodyPr/>
+                    <a:p>
+                      <a:pPr algn="ctr"/>
+                      <a:r>
+                        <a:rPr lang="zh-CN" altLang="en-US" sz="1200" b="1"/>
+                        <a:t>负责的墙与当前问题（评测证据）</a:t>
+                      </a:r>
+                      <a:endParaRPr lang="zh-CN" altLang="en-US" sz="1200" b="1"/>
+                    </a:p>
+                  </a:txBody>
+                  <a:tcPr marL="0" marR="0" marT="0" marB="0" anchor="ctr" anchorCtr="0"/>
+                </a:tc>
+                <a:tc>
+                  <a:txBody>
+                    <a:bodyPr/>
+                    <a:p>
+                      <a:pPr algn="ctr"/>
+                      <a:r>
+                        <a:rPr lang="zh-CN" altLang="en-US" sz="1200" b="1"/>
+                        <a:t>验收测评集（按优先级分层）</a:t>
+                      </a:r>
+                      <a:endParaRPr lang="zh-CN" altLang="en-US" sz="1200" b="1"/>
+                    </a:p>
+                  </a:txBody>
+                  <a:tcPr marL="0" marR="0" marT="0" marB="0" anchor="ctr" anchorCtr="0"/>
+                </a:tc>
+                <a:tc>
+                  <a:txBody>
+                    <a:bodyPr/>
+                    <a:p>
+                      <a:pPr algn="ctr"/>
+                      <a:r>
+                        <a:rPr lang="zh-CN" altLang="en-US" sz="1200" b="1"/>
+                        <a:t>对应幻灯片条目</a:t>
+                      </a:r>
+                      <a:endParaRPr lang="zh-CN" altLang="en-US" sz="1200" b="1"/>
+                    </a:p>
+                  </a:txBody>
+                  <a:tcPr marL="0" marR="0" marT="0" marB="0" anchor="ctr" anchorCtr="0"/>
+                </a:tc>
+              </a:tr>
+              <a:tr h="1258570">
+                <a:tc>
+                  <a:txBody>
+                    <a:bodyPr/>
+                    <a:p>
+                      <a:r>
+                        <a:rPr lang="en-US" altLang="zh-CN" sz="1200"/>
+                        <a:t>A </a:t>
+                      </a:r>
+                      <a:r>
+                        <a:rPr lang="zh-CN" altLang="en-US" sz="1200"/>
+                        <a:t>检索与证据线</a:t>
+                      </a:r>
+                      <a:endParaRPr lang="zh-CN" altLang="en-US" sz="1200"/>
+                    </a:p>
+                  </a:txBody>
+                  <a:tcPr marL="0" marR="0" marT="0" marB="0" anchor="ctr" anchorCtr="0"/>
+                </a:tc>
+                <a:tc>
+                  <a:txBody>
+                    <a:bodyPr/>
+                    <a:p>
+                      <a:r>
+                        <a:rPr lang="zh-CN" altLang="en-US" sz="1200" b="1">
+                          <a:solidFill>
+                            <a:srgbClr val="FF0000"/>
+                          </a:solidFill>
+                        </a:rPr>
+                        <a:t>墙 </a:t>
+                      </a:r>
+                      <a:r>
+                        <a:rPr lang="en-US" altLang="zh-CN" sz="1200" b="1">
+                          <a:solidFill>
+                            <a:srgbClr val="FF0000"/>
+                          </a:solidFill>
+                        </a:rPr>
+                        <a:t>1 </a:t>
+                      </a:r>
+                      <a:r>
+                        <a:rPr lang="zh-CN" altLang="en-US" sz="1200" b="1">
+                          <a:solidFill>
+                            <a:srgbClr val="FF0000"/>
+                          </a:solidFill>
+                        </a:rPr>
+                        <a:t>检索精度（代码：</a:t>
+                      </a:r>
+                      <a:r>
+                        <a:rPr lang="en-US" altLang="zh-CN" sz="1200" b="1">
+                          <a:solidFill>
+                            <a:srgbClr val="FF0000"/>
+                          </a:solidFill>
+                        </a:rPr>
+                        <a:t>app/knowledge/</a:t>
+                      </a:r>
+                      <a:r>
+                        <a:rPr lang="zh-CN" altLang="en-US" sz="1200" b="1">
+                          <a:solidFill>
+                            <a:srgbClr val="FF0000"/>
+                          </a:solidFill>
+                        </a:rPr>
+                        <a:t>、</a:t>
+                      </a:r>
+                      <a:r>
+                        <a:rPr lang="en-US" altLang="zh-CN" sz="1200" b="1">
+                          <a:solidFill>
+                            <a:srgbClr val="FF0000"/>
+                          </a:solidFill>
+                        </a:rPr>
+                        <a:t>app/profiles/</a:t>
+                      </a:r>
+                      <a:r>
+                        <a:rPr lang="zh-CN" altLang="en-US" sz="1200" b="1">
+                          <a:solidFill>
+                            <a:srgbClr val="FF0000"/>
+                          </a:solidFill>
+                        </a:rPr>
+                        <a:t>；兼管证据绑定格式 </a:t>
+                      </a:r>
+                      <a:r>
+                        <a:rPr lang="en-US" altLang="zh-CN" sz="1200" b="1">
+                          <a:solidFill>
+                            <a:srgbClr val="FF0000"/>
+                          </a:solidFill>
+                        </a:rPr>
+                        <a:t>app/evidence/binding.py</a:t>
+                      </a:r>
+                      <a:r>
+                        <a:rPr lang="zh-CN" altLang="en-US" sz="1200" b="1">
+                          <a:solidFill>
+                            <a:srgbClr val="FF0000"/>
+                          </a:solidFill>
+                        </a:rPr>
+                        <a:t>）</a:t>
+                      </a:r>
+                      <a:br>
+                        <a:rPr lang="zh-CN" altLang="en-US" sz="1200"/>
+                      </a:br>
+                      <a:r>
+                        <a:rPr lang="zh-CN" altLang="en-US" sz="1200"/>
+                        <a:t>当前问题：</a:t>
+                      </a:r>
+                      <a:r>
+                        <a:rPr lang="en-US" altLang="zh-CN" sz="1200"/>
+                        <a:t>① alias </a:t>
+                      </a:r>
+                      <a:r>
+                        <a:rPr lang="zh-CN" altLang="en-US" sz="1200"/>
+                        <a:t>集 </a:t>
+                      </a:r>
+                      <a:r>
+                        <a:rPr lang="en-US" altLang="zh-CN" sz="1200"/>
+                        <a:t>2/8</a:t>
+                      </a:r>
+                      <a:r>
+                        <a:rPr lang="zh-CN" altLang="en-US" sz="1200"/>
+                        <a:t>，失败 </a:t>
+                      </a:r>
+                      <a:r>
+                        <a:rPr lang="en-US" altLang="zh-CN" sz="1200"/>
+                        <a:t>6 </a:t>
+                      </a:r>
+                      <a:r>
+                        <a:rPr lang="zh-CN" altLang="en-US" sz="1200"/>
+                        <a:t>题全是「该命中 </a:t>
+                      </a:r>
+                      <a:r>
+                        <a:rPr lang="en-US" altLang="zh-CN" sz="1200"/>
+                        <a:t>D03 </a:t>
+                      </a:r>
+                      <a:r>
+                        <a:rPr lang="zh-CN" altLang="en-US" sz="1200"/>
+                        <a:t>却命中 </a:t>
+                      </a:r>
+                      <a:r>
+                        <a:rPr lang="en-US" altLang="zh-CN" sz="1200"/>
+                        <a:t>D12/D09 </a:t>
+                      </a:r>
+                      <a:r>
+                        <a:rPr lang="zh-CN" altLang="en-US" sz="1200"/>
+                        <a:t>或检索为空」；</a:t>
+                      </a:r>
+                      <a:r>
+                        <a:rPr lang="en-US" altLang="zh-CN" sz="1200"/>
+                        <a:t>② multidoc </a:t>
+                      </a:r>
+                      <a:r>
+                        <a:rPr lang="zh-CN" altLang="en-US" sz="1200"/>
+                        <a:t>集 </a:t>
+                      </a:r>
+                      <a:r>
+                        <a:rPr lang="en-US" altLang="zh-CN" sz="1200"/>
+                        <a:t>0/5</a:t>
+                      </a:r>
+                      <a:r>
+                        <a:rPr lang="zh-CN" altLang="en-US" sz="1200"/>
+                        <a:t>，</a:t>
+                      </a:r>
+                      <a:r>
+                        <a:rPr lang="en-US" altLang="zh-CN" sz="1200"/>
+                        <a:t>5 </a:t>
+                      </a:r>
+                      <a:r>
+                        <a:rPr lang="zh-CN" altLang="en-US" sz="1200"/>
+                        <a:t>题全是「命中一份、漏另一份」；</a:t>
+                      </a:r>
+                      <a:r>
+                        <a:rPr lang="en-US" altLang="zh-CN" sz="1200"/>
+                        <a:t>③ basic_rag 3 </a:t>
+                      </a:r>
+                      <a:r>
+                        <a:rPr lang="zh-CN" altLang="en-US" sz="1200"/>
+                        <a:t>题错命中（</a:t>
+                      </a:r>
+                      <a:r>
+                        <a:rPr lang="en-US" altLang="zh-CN" sz="1200"/>
+                        <a:t>D12/D06 </a:t>
+                      </a:r>
+                      <a:r>
+                        <a:rPr lang="zh-CN" altLang="en-US" sz="1200"/>
+                        <a:t>排在 </a:t>
+                      </a:r>
+                      <a:r>
+                        <a:rPr lang="en-US" altLang="zh-CN" sz="1200"/>
+                        <a:t>D03/D07/D08 </a:t>
+                      </a:r>
+                      <a:r>
+                        <a:rPr lang="zh-CN" altLang="en-US" sz="1200"/>
+                        <a:t>前，</a:t>
+                      </a:r>
+                      <a:r>
+                        <a:rPr lang="en-US" altLang="zh-CN" sz="1200"/>
+                        <a:t>7/10</a:t>
+                      </a:r>
+                      <a:r>
+                        <a:rPr lang="zh-CN" altLang="en-US" sz="1200"/>
+                        <a:t>）；</a:t>
+                      </a:r>
+                      <a:r>
+                        <a:rPr lang="en-US" altLang="zh-CN" sz="1200"/>
+                        <a:t>④ cross </a:t>
+                      </a:r>
+                      <a:r>
+                        <a:rPr lang="zh-CN" altLang="en-US" sz="1200"/>
+                        <a:t>多题 </a:t>
+                      </a:r>
+                      <a:r>
+                        <a:rPr lang="en-US" altLang="zh-CN" sz="1200"/>
+                        <a:t>D06/D08 </a:t>
+                      </a:r>
+                      <a:r>
+                        <a:rPr lang="zh-CN" altLang="en-US" sz="1200"/>
+                        <a:t>未检索（</a:t>
+                      </a:r>
+                      <a:r>
+                        <a:rPr lang="en-US" altLang="zh-CN" sz="1200"/>
+                        <a:t>cross-009 </a:t>
+                      </a:r>
+                      <a:r>
+                        <a:rPr lang="zh-CN" altLang="en-US" sz="1200"/>
+                        <a:t>复跑仍缺证据）；</a:t>
+                      </a:r>
+                      <a:r>
+                        <a:rPr lang="en-US" altLang="zh-CN" sz="1200"/>
+                        <a:t>⑤ formula </a:t>
+                      </a:r>
+                      <a:r>
+                        <a:rPr lang="zh-CN" altLang="en-US" sz="1200"/>
+                        <a:t>证据未绑定、</a:t>
+                      </a:r>
+                      <a:r>
+                        <a:rPr lang="en-US" altLang="zh-CN" sz="1200"/>
+                        <a:t>multimodal-004 </a:t>
+                      </a:r>
+                      <a:r>
+                        <a:rPr lang="zh-CN" altLang="en-US" sz="1200"/>
+                        <a:t>未检索 </a:t>
+                      </a:r>
+                      <a:r>
+                        <a:rPr lang="en-US" altLang="zh-CN" sz="1200"/>
+                        <a:t>D06</a:t>
+                      </a:r>
+                      <a:endParaRPr lang="en-US" altLang="zh-CN" sz="1200"/>
+                    </a:p>
+                  </a:txBody>
+                  <a:tcPr marL="0" marR="0" marT="0" marB="0" anchor="ctr" anchorCtr="0"/>
+                </a:tc>
+                <a:tc>
+                  <a:txBody>
+                    <a:bodyPr/>
+                    <a:p>
+                      <a:r>
+                        <a:rPr lang="zh-CN" altLang="en-US" sz="1200" b="1"/>
+                        <a:t>第一层（主验收）：</a:t>
+                      </a:r>
+                      <a:r>
+                        <a:rPr lang="en-US" altLang="zh-CN" sz="1200" b="1"/>
+                        <a:t>alias</a:t>
+                      </a:r>
+                      <a:r>
+                        <a:rPr lang="zh-CN" altLang="en-US" sz="1200" b="1"/>
+                        <a:t>、</a:t>
+                      </a:r>
+                      <a:r>
+                        <a:rPr lang="en-US" altLang="zh-CN" sz="1200" b="1"/>
+                        <a:t>multidoc</a:t>
+                      </a:r>
+                      <a:r>
+                        <a:rPr lang="zh-CN" altLang="en-US" sz="1200" b="1"/>
+                        <a:t>、</a:t>
+                      </a:r>
+                      <a:r>
+                        <a:rPr lang="en-US" altLang="zh-CN" sz="1200" b="1"/>
+                        <a:t>basic_rag——</a:t>
+                      </a:r>
+                      <a:r>
+                        <a:rPr lang="zh-CN" altLang="en-US" sz="1200" b="1"/>
+                        <a:t>检索命中是这三集判分的直接决定因素</a:t>
+                      </a:r>
+                      <a:br>
+                        <a:rPr lang="zh-CN" altLang="en-US" sz="1200"/>
+                      </a:br>
+                      <a:r>
+                        <a:rPr lang="zh-CN" altLang="en-US" sz="1200"/>
+                        <a:t>第二层（关联验收）：</a:t>
+                      </a:r>
+                      <a:r>
+                        <a:rPr lang="en-US" altLang="zh-CN" sz="1200"/>
+                        <a:t>cross </a:t>
+                      </a:r>
+                      <a:r>
+                        <a:rPr lang="zh-CN" altLang="en-US" sz="1200"/>
+                        <a:t>的检索部分（</a:t>
+                      </a:r>
+                      <a:r>
+                        <a:rPr lang="en-US" altLang="zh-CN" sz="1200"/>
+                        <a:t>D06/D08 </a:t>
+                      </a:r>
+                      <a:r>
+                        <a:rPr lang="zh-CN" altLang="en-US" sz="1200"/>
+                        <a:t>命中）、</a:t>
+                      </a:r>
+                      <a:r>
+                        <a:rPr lang="en-US" altLang="zh-CN" sz="1200"/>
+                        <a:t>formula </a:t>
+                      </a:r>
+                      <a:r>
+                        <a:rPr lang="zh-CN" altLang="en-US" sz="1200"/>
+                        <a:t>的证据引用部分、</a:t>
+                      </a:r>
+                      <a:r>
+                        <a:rPr lang="en-US" altLang="zh-CN" sz="1200"/>
+                        <a:t>multimodal </a:t>
+                      </a:r>
+                      <a:r>
+                        <a:rPr lang="zh-CN" altLang="en-US" sz="1200"/>
+                        <a:t>的 </a:t>
+                      </a:r>
+                      <a:r>
+                        <a:rPr lang="en-US" altLang="zh-CN" sz="1200"/>
+                        <a:t>D06 </a:t>
+                      </a:r>
+                      <a:r>
+                        <a:rPr lang="zh-CN" altLang="en-US" sz="1200"/>
+                        <a:t>检索部分（</a:t>
+                      </a:r>
+                      <a:r>
+                        <a:rPr lang="en-US" altLang="zh-CN" sz="1200"/>
+                        <a:t>mm-004</a:t>
+                      </a:r>
+                      <a:r>
+                        <a:rPr lang="zh-CN" altLang="en-US" sz="1200"/>
+                        <a:t>）</a:t>
+                      </a:r>
+                      <a:br>
+                        <a:rPr lang="zh-CN" altLang="en-US" sz="1200"/>
+                      </a:br>
+                      <a:r>
+                        <a:rPr lang="zh-CN" altLang="en-US" sz="1200"/>
+                        <a:t>第三层（回归）：全量 </a:t>
+                      </a:r>
+                      <a:r>
+                        <a:rPr lang="en-US" altLang="zh-CN" sz="1200"/>
+                        <a:t>80 </a:t>
+                      </a:r>
+                      <a:r>
+                        <a:rPr lang="zh-CN" altLang="en-US" sz="1200"/>
+                        <a:t>条 </a:t>
+                      </a:r>
+                      <a:r>
+                        <a:rPr lang="en-US" altLang="zh-CN" sz="1200"/>
+                        <a:t>+ clarify </a:t>
+                      </a:r>
+                      <a:r>
+                        <a:rPr lang="zh-CN" altLang="en-US" sz="1200"/>
+                        <a:t>集不退化</a:t>
+                      </a:r>
+                      <a:endParaRPr lang="zh-CN" altLang="en-US" sz="1200"/>
+                    </a:p>
+                  </a:txBody>
+                  <a:tcPr marL="0" marR="0" marT="0" marB="0" anchor="ctr" anchorCtr="0"/>
+                </a:tc>
+                <a:tc>
+                  <a:txBody>
+                    <a:bodyPr/>
+                    <a:p>
+                      <a:r>
+                        <a:rPr lang="zh-CN" altLang="en-US" sz="1200">
+                          <a:highlight>
+                            <a:srgbClr val="FFFF00"/>
+                          </a:highlight>
+                        </a:rPr>
+                        <a:t>优先：</a:t>
+                      </a:r>
+                      <a:r>
+                        <a:rPr lang="zh-CN" altLang="en-US" sz="1200" b="1">
+                          <a:highlight>
+                            <a:srgbClr val="FFFF00"/>
+                          </a:highlight>
+                        </a:rPr>
+                        <a:t>基础文档问答</a:t>
+                      </a:r>
+                      <a:r>
+                        <a:rPr lang="zh-CN" altLang="en-US" sz="1200">
+                          <a:highlight>
+                            <a:srgbClr val="FFFF00"/>
+                          </a:highlight>
+                        </a:rPr>
+                        <a:t>（</a:t>
+                      </a:r>
+                      <a:r>
+                        <a:rPr lang="en-US" altLang="zh-CN" sz="1200">
+                          <a:highlight>
+                            <a:srgbClr val="FFFF00"/>
+                          </a:highlight>
+                        </a:rPr>
+                        <a:t>basic_rag</a:t>
+                      </a:r>
+                      <a:r>
+                        <a:rPr lang="zh-CN" altLang="en-US" sz="1200">
+                          <a:highlight>
+                            <a:srgbClr val="FFFF00"/>
+                          </a:highlight>
+                        </a:rPr>
+                        <a:t>）、</a:t>
+                      </a:r>
+                      <a:r>
+                        <a:rPr lang="zh-CN" altLang="en-US" sz="1200" b="1">
+                          <a:highlight>
+                            <a:srgbClr val="FFFF00"/>
+                          </a:highlight>
+                        </a:rPr>
+                        <a:t>多文档问答</a:t>
+                      </a:r>
+                      <a:r>
+                        <a:rPr lang="zh-CN" altLang="en-US" sz="1200">
+                          <a:highlight>
+                            <a:srgbClr val="FFFF00"/>
+                          </a:highlight>
+                        </a:rPr>
+                        <a:t>（</a:t>
+                      </a:r>
+                      <a:r>
+                        <a:rPr lang="en-US" altLang="zh-CN" sz="1200">
+                          <a:highlight>
+                            <a:srgbClr val="FFFF00"/>
+                          </a:highlight>
+                        </a:rPr>
+                        <a:t>multidoc</a:t>
+                      </a:r>
+                      <a:r>
+                        <a:rPr lang="zh-CN" altLang="en-US" sz="1200">
+                          <a:highlight>
+                            <a:srgbClr val="FFFF00"/>
+                          </a:highlight>
+                        </a:rPr>
+                        <a:t>）</a:t>
+                      </a:r>
+                      <a:br>
+                        <a:rPr lang="zh-CN" altLang="en-US" sz="1200"/>
+                      </a:br>
+                      <a:r>
+                        <a:rPr lang="zh-CN" altLang="en-US" sz="1200" b="1"/>
+                        <a:t>中级一：别名与分类</a:t>
+                      </a:r>
+                      <a:r>
+                        <a:rPr lang="zh-CN" altLang="en-US" sz="1200"/>
+                        <a:t>（</a:t>
+                      </a:r>
+                      <a:r>
+                        <a:rPr lang="en-US" altLang="zh-CN" sz="1200"/>
+                        <a:t>alias</a:t>
+                      </a:r>
+                      <a:r>
+                        <a:rPr lang="zh-CN" altLang="en-US" sz="1200"/>
+                        <a:t>）</a:t>
+                      </a:r>
+                      <a:br>
+                        <a:rPr lang="zh-CN" altLang="en-US" sz="1200"/>
+                      </a:br>
+                      <a:r>
+                        <a:rPr lang="zh-CN" altLang="en-US" sz="1200" b="1"/>
+                        <a:t>多模态扩数据集</a:t>
+                      </a:r>
+                      <a:r>
+                        <a:rPr lang="zh-CN" altLang="en-US" sz="1200"/>
+                        <a:t>＋修题（</a:t>
+                      </a:r>
+                      <a:r>
+                        <a:rPr lang="en-US" altLang="zh-CN" sz="1200"/>
+                        <a:t>multimodal</a:t>
+                      </a:r>
+                      <a:r>
+                        <a:rPr lang="zh-CN" altLang="en-US" sz="1200"/>
+                        <a:t>，本线承检索部分）</a:t>
+                      </a:r>
+                      <a:endParaRPr lang="zh-CN" altLang="en-US" sz="1200"/>
+                    </a:p>
+                  </a:txBody>
+                  <a:tcPr marL="0" marR="0" marT="0" marB="0" anchor="ctr" anchorCtr="0"/>
+                </a:tc>
+              </a:tr>
+              <a:tr h="1831340">
+                <a:tc>
+                  <a:txBody>
+                    <a:bodyPr/>
+                    <a:p>
+                      <a:r>
+                        <a:rPr lang="en-US" altLang="zh-CN" sz="1200"/>
+                        <a:t>B SQL </a:t>
+                      </a:r>
+                      <a:r>
+                        <a:rPr lang="zh-CN" altLang="en-US" sz="1200"/>
+                        <a:t>与计算线</a:t>
+                      </a:r>
+                      <a:endParaRPr lang="zh-CN" altLang="en-US" sz="1200"/>
+                    </a:p>
+                  </a:txBody>
+                  <a:tcPr marL="0" marR="0" marT="0" marB="0" anchor="ctr" anchorCtr="0"/>
+                </a:tc>
+                <a:tc>
+                  <a:txBody>
+                    <a:bodyPr/>
+                    <a:p>
+                      <a:r>
+                        <a:rPr lang="zh-CN" altLang="en-US" sz="1200" b="1">
+                          <a:solidFill>
+                            <a:srgbClr val="FF0000"/>
+                          </a:solidFill>
+                        </a:rPr>
+                        <a:t>墙 </a:t>
+                      </a:r>
+                      <a:r>
+                        <a:rPr lang="en-US" altLang="zh-CN" sz="1200" b="1">
+                          <a:solidFill>
+                            <a:srgbClr val="FF0000"/>
+                          </a:solidFill>
+                        </a:rPr>
+                        <a:t>4 </a:t>
+                      </a:r>
+                      <a:r>
+                        <a:rPr lang="zh-CN" altLang="en-US" sz="1200" b="1">
+                          <a:solidFill>
+                            <a:srgbClr val="FF0000"/>
+                          </a:solidFill>
+                        </a:rPr>
+                        <a:t>多表 </a:t>
+                      </a:r>
+                      <a:r>
+                        <a:rPr lang="en-US" altLang="zh-CN" sz="1200" b="1">
+                          <a:solidFill>
+                            <a:srgbClr val="FF0000"/>
+                          </a:solidFill>
+                        </a:rPr>
+                        <a:t>JOIN/TOP-N </a:t>
+                      </a:r>
+                      <a:r>
+                        <a:rPr lang="zh-CN" altLang="en-US" sz="1200" b="1">
+                          <a:solidFill>
+                            <a:srgbClr val="FF0000"/>
+                          </a:solidFill>
+                        </a:rPr>
+                        <a:t>＋ 墙 </a:t>
+                      </a:r>
+                      <a:r>
+                        <a:rPr lang="en-US" altLang="zh-CN" sz="1200" b="1">
+                          <a:solidFill>
+                            <a:srgbClr val="FF0000"/>
+                          </a:solidFill>
+                        </a:rPr>
+                        <a:t>2 </a:t>
+                      </a:r>
+                      <a:r>
+                        <a:rPr lang="zh-CN" altLang="en-US" sz="1200" b="1">
+                          <a:solidFill>
+                            <a:srgbClr val="FF0000"/>
+                          </a:solidFill>
+                        </a:rPr>
+                        <a:t>跨源计算落地（代码：</a:t>
+                      </a:r>
+                      <a:r>
+                        <a:rPr lang="en-US" altLang="zh-CN" sz="1200" b="1">
+                          <a:solidFill>
+                            <a:srgbClr val="FF0000"/>
+                          </a:solidFill>
+                        </a:rPr>
+                        <a:t>backend/sql_module/</a:t>
+                      </a:r>
+                      <a:r>
+                        <a:rPr lang="zh-CN" altLang="en-US" sz="1200" b="1">
+                          <a:solidFill>
+                            <a:srgbClr val="FF0000"/>
+                          </a:solidFill>
+                        </a:rPr>
+                        <a:t>、</a:t>
+                      </a:r>
+                      <a:r>
+                        <a:rPr lang="en-US" altLang="zh-CN" sz="1200" b="1">
+                          <a:solidFill>
+                            <a:srgbClr val="FF0000"/>
+                          </a:solidFill>
+                        </a:rPr>
+                        <a:t>app/integrations/sql_d12.py</a:t>
+                      </a:r>
+                      <a:r>
+                        <a:rPr lang="zh-CN" altLang="en-US" sz="1200" b="1">
+                          <a:solidFill>
+                            <a:srgbClr val="FF0000"/>
+                          </a:solidFill>
+                        </a:rPr>
+                        <a:t>、</a:t>
+                      </a:r>
+                      <a:r>
+                        <a:rPr lang="en-US" altLang="zh-CN" sz="1200" b="1">
+                          <a:solidFill>
+                            <a:srgbClr val="FF0000"/>
+                          </a:solidFill>
+                        </a:rPr>
+                        <a:t>app/tools/local_calculator.py</a:t>
+                      </a:r>
+                      <a:r>
+                        <a:rPr lang="zh-CN" altLang="en-US" sz="1200" b="1">
+                          <a:solidFill>
+                            <a:srgbClr val="FF0000"/>
+                          </a:solidFill>
+                        </a:rPr>
+                        <a:t>、</a:t>
+                      </a:r>
+                      <a:r>
+                        <a:rPr lang="en-US" altLang="zh-CN" sz="1200" b="1">
+                          <a:solidFill>
+                            <a:srgbClr val="FF0000"/>
+                          </a:solidFill>
+                        </a:rPr>
+                        <a:t>parsing.py </a:t>
+                      </a:r>
+                      <a:r>
+                        <a:rPr lang="zh-CN" altLang="en-US" sz="1200" b="1">
+                          <a:solidFill>
+                            <a:srgbClr val="FF0000"/>
+                          </a:solidFill>
+                        </a:rPr>
+                        <a:t>时间解析、</a:t>
+                      </a:r>
+                      <a:r>
+                        <a:rPr lang="en-US" altLang="zh-CN" sz="1200" b="1">
+                          <a:solidFill>
+                            <a:srgbClr val="FF0000"/>
+                          </a:solidFill>
+                        </a:rPr>
+                        <a:t>graph.py calculate </a:t>
+                      </a:r>
+                      <a:r>
+                        <a:rPr lang="zh-CN" altLang="en-US" sz="1200" b="1">
+                          <a:solidFill>
+                            <a:srgbClr val="FF0000"/>
+                          </a:solidFill>
+                        </a:rPr>
+                        <a:t>节点、</a:t>
+                      </a:r>
+                      <a:r>
+                        <a:rPr lang="en-US" altLang="zh-CN" sz="1200" b="1">
+                          <a:solidFill>
+                            <a:srgbClr val="FF0000"/>
+                          </a:solidFill>
+                        </a:rPr>
+                        <a:t>composer.py </a:t>
+                      </a:r>
+                      <a:r>
+                        <a:rPr lang="zh-CN" altLang="en-US" sz="1200" b="1">
+                          <a:solidFill>
+                            <a:srgbClr val="FF0000"/>
+                          </a:solidFill>
+                        </a:rPr>
+                        <a:t>计算落地段）</a:t>
+                      </a:r>
+                      <a:br>
+                        <a:rPr lang="zh-CN" altLang="en-US" sz="1200"/>
+                      </a:br>
+                      <a:r>
+                        <a:rPr lang="zh-CN" altLang="en-US" sz="1200"/>
+                        <a:t>当前问题：</a:t>
+                      </a:r>
+                      <a:r>
+                        <a:rPr lang="en-US" altLang="zh-CN" sz="1200"/>
+                        <a:t>① multitable 0/8</a:t>
+                      </a:r>
+                      <a:r>
+                        <a:rPr lang="zh-CN" altLang="en-US" sz="1200"/>
+                        <a:t>：</a:t>
+                      </a:r>
+                      <a:r>
+                        <a:rPr lang="en-US" altLang="zh-CN" sz="1200"/>
+                        <a:t>001/002/003 TOP-N </a:t>
+                      </a:r>
+                      <a:r>
+                        <a:rPr lang="zh-CN" altLang="en-US" sz="1200"/>
+                        <a:t>只回 </a:t>
+                      </a:r>
+                      <a:r>
+                        <a:rPr lang="en-US" altLang="zh-CN" sz="1200"/>
+                        <a:t>1 </a:t>
+                      </a:r>
+                      <a:r>
+                        <a:rPr lang="zh-CN" altLang="en-US" sz="1200"/>
+                        <a:t>行、</a:t>
+                      </a:r>
+                      <a:r>
+                        <a:rPr lang="en-US" altLang="zh-CN" sz="1200"/>
+                        <a:t>006 </a:t>
+                      </a:r>
+                      <a:r>
+                        <a:rPr lang="zh-CN" altLang="en-US" sz="1200"/>
+                        <a:t>聚合粒度 </a:t>
+                      </a:r>
+                      <a:r>
+                        <a:rPr lang="en-US" altLang="zh-CN" sz="1200"/>
+                        <a:t>1 </a:t>
+                      </a:r>
+                      <a:r>
+                        <a:rPr lang="zh-CN" altLang="en-US" sz="1200"/>
+                        <a:t>行 </a:t>
+                      </a:r>
+                      <a:r>
+                        <a:rPr lang="en-US" altLang="zh-CN" sz="1200"/>
+                        <a:t>vs </a:t>
+                      </a:r>
+                      <a:r>
+                        <a:rPr lang="zh-CN" altLang="en-US" sz="1200"/>
+                        <a:t>金标准 </a:t>
+                      </a:r>
+                      <a:r>
+                        <a:rPr lang="en-US" altLang="zh-CN" sz="1200"/>
+                        <a:t>3 </a:t>
+                      </a:r>
+                      <a:r>
+                        <a:rPr lang="zh-CN" altLang="en-US" sz="1200"/>
+                        <a:t>行、</a:t>
+                      </a:r>
+                      <a:r>
+                        <a:rPr lang="en-US" altLang="zh-CN" sz="1200"/>
+                        <a:t>007 </a:t>
+                      </a:r>
+                      <a:r>
+                        <a:rPr lang="zh-CN" altLang="en-US" sz="1200"/>
+                        <a:t>行序不一致被判 </a:t>
+                      </a:r>
+                      <a:r>
+                        <a:rPr lang="en-US" altLang="zh-CN" sz="1200"/>
+                        <a:t>insufficient_evidence</a:t>
+                      </a:r>
+                      <a:r>
+                        <a:rPr lang="zh-CN" altLang="en-US" sz="1200"/>
+                        <a:t>、</a:t>
+                      </a:r>
+                      <a:r>
+                        <a:rPr lang="en-US" altLang="zh-CN" sz="1200"/>
+                        <a:t>008 </a:t>
+                      </a:r>
+                      <a:r>
+                        <a:rPr lang="zh-CN" altLang="en-US" sz="1200"/>
+                        <a:t>报 </a:t>
+                      </a:r>
+                      <a:r>
+                        <a:rPr lang="en-US" altLang="zh-CN" sz="1200"/>
+                        <a:t>MISSING_REQUIRED_SLOT</a:t>
+                      </a:r>
+                      <a:r>
+                        <a:rPr lang="zh-CN" altLang="en-US" sz="1200"/>
+                        <a:t>；</a:t>
+                      </a:r>
+                      <a:r>
+                        <a:rPr lang="en-US" altLang="zh-CN" sz="1200"/>
+                        <a:t>② formula 0/6</a:t>
+                      </a:r>
+                      <a:r>
+                        <a:rPr lang="zh-CN" altLang="en-US" sz="1200"/>
+                        <a:t>：</a:t>
+                      </a:r>
+                      <a:r>
+                        <a:rPr lang="en-US" altLang="zh-CN" sz="1200"/>
+                        <a:t>gap/rate/aov</a:t>
+                      </a:r>
+                      <a:r>
+                        <a:rPr lang="zh-CN" altLang="en-US" sz="1200"/>
+                        <a:t>「算得出、写不进答案、绑不上证据」（</a:t>
+                      </a:r>
+                      <a:r>
+                        <a:rPr lang="en-US" altLang="zh-CN" sz="1200"/>
+                        <a:t>006 </a:t>
+                      </a:r>
+                      <a:r>
+                        <a:rPr lang="zh-CN" altLang="en-US" sz="1200"/>
+                        <a:t>的 </a:t>
+                      </a:r>
+                      <a:r>
+                        <a:rPr lang="en-US" altLang="zh-CN" sz="1200"/>
+                        <a:t>sum=120 </a:t>
+                      </a:r>
+                      <a:r>
+                        <a:rPr lang="zh-CN" altLang="en-US" sz="1200"/>
+                        <a:t>计算缺失）；</a:t>
+                      </a:r>
+                      <a:r>
+                        <a:rPr lang="en-US" altLang="zh-CN" sz="1200"/>
+                        <a:t>③ cross-001 </a:t>
+                      </a:r>
+                      <a:r>
+                        <a:rPr lang="zh-CN" altLang="en-US" sz="1200"/>
+                        <a:t>算出但答案未体现；</a:t>
+                      </a:r>
+                      <a:r>
+                        <a:rPr lang="en-US" altLang="zh-CN" sz="1200"/>
+                        <a:t>④ </a:t>
+                      </a:r>
+                      <a:r>
+                        <a:rPr lang="zh-CN" altLang="en-US" sz="1200"/>
+                        <a:t>时间解析仅整年</a:t>
+                      </a:r>
+                      <a:r>
+                        <a:rPr lang="en-US" altLang="zh-CN" sz="1200"/>
+                        <a:t>/</a:t>
+                      </a:r>
+                      <a:r>
+                        <a:rPr lang="zh-CN" altLang="en-US" sz="1200"/>
+                        <a:t>完整季度，月粒度缺口（</a:t>
+                      </a:r>
+                      <a:r>
+                        <a:rPr lang="en-US" altLang="zh-CN" sz="1200"/>
+                        <a:t>mm-004 </a:t>
+                      </a:r>
+                      <a:r>
+                        <a:rPr lang="zh-CN" altLang="en-US" sz="1200"/>
+                        <a:t>卡死、</a:t>
+                      </a:r>
+                      <a:r>
+                        <a:rPr lang="en-US" altLang="zh-CN" sz="1200"/>
+                        <a:t>cross-009 </a:t>
+                      </a:r>
+                      <a:r>
+                        <a:rPr lang="zh-CN" altLang="en-US" sz="1200"/>
+                        <a:t>按月 </a:t>
+                      </a:r>
+                      <a:r>
+                        <a:rPr lang="en-US" altLang="zh-CN" sz="1200"/>
+                        <a:t>3 </a:t>
+                      </a:r>
+                      <a:r>
+                        <a:rPr lang="zh-CN" altLang="en-US" sz="1200"/>
+                        <a:t>行出不来）</a:t>
+                      </a:r>
+                      <a:endParaRPr lang="zh-CN" altLang="en-US" sz="1200"/>
+                    </a:p>
+                  </a:txBody>
+                  <a:tcPr marL="0" marR="0" marT="0" marB="0" anchor="ctr" anchorCtr="0"/>
+                </a:tc>
+                <a:tc>
+                  <a:txBody>
+                    <a:bodyPr/>
+                    <a:p>
+                      <a:r>
+                        <a:rPr lang="zh-CN" altLang="en-US" sz="1200" b="1"/>
+                        <a:t>第一层（主验收）：</a:t>
+                      </a:r>
+                      <a:r>
+                        <a:rPr lang="en-US" altLang="zh-CN" sz="1200" b="1"/>
+                        <a:t>multitable</a:t>
+                      </a:r>
+                      <a:r>
+                        <a:rPr lang="zh-CN" altLang="en-US" sz="1200" b="1"/>
+                        <a:t>（</a:t>
+                      </a:r>
+                      <a:r>
+                        <a:rPr lang="en-US" altLang="zh-CN" sz="1200" b="1"/>
+                        <a:t>001/002/003/006/007/008</a:t>
+                      </a:r>
+                      <a:r>
+                        <a:rPr lang="zh-CN" altLang="en-US" sz="1200" b="1"/>
+                        <a:t>）、</a:t>
+                      </a:r>
+                      <a:r>
+                        <a:rPr lang="en-US" altLang="zh-CN" sz="1200" b="1"/>
+                        <a:t>basic_nl2sql </a:t>
+                      </a:r>
+                      <a:r>
+                        <a:rPr lang="zh-CN" altLang="en-US" sz="1200" b="1"/>
+                        <a:t>与 </a:t>
+                      </a:r>
+                      <a:r>
+                        <a:rPr lang="en-US" altLang="zh-CN" sz="1200" b="1"/>
+                        <a:t>NL2SQL </a:t>
+                      </a:r>
+                      <a:r>
+                        <a:rPr lang="zh-CN" altLang="en-US" sz="1200" b="1"/>
+                        <a:t>扩充题（保持 </a:t>
+                      </a:r>
+                      <a:r>
+                        <a:rPr lang="en-US" altLang="zh-CN" sz="1200" b="1"/>
+                        <a:t>10/10 </a:t>
+                      </a:r>
+                      <a:r>
+                        <a:rPr lang="zh-CN" altLang="en-US" sz="1200" b="1"/>
+                        <a:t>不退化）</a:t>
+                      </a:r>
+                      <a:br>
+                        <a:rPr lang="zh-CN" altLang="en-US" sz="1200"/>
+                      </a:br>
+                      <a:r>
+                        <a:rPr lang="zh-CN" altLang="en-US" sz="1200"/>
+                        <a:t>第二层（关联验收）：</a:t>
+                      </a:r>
+                      <a:r>
+                        <a:rPr lang="en-US" altLang="zh-CN" sz="1200"/>
+                        <a:t>formula </a:t>
+                      </a:r>
+                      <a:r>
+                        <a:rPr lang="zh-CN" altLang="en-US" sz="1200"/>
+                        <a:t>计算落地部分（</a:t>
+                      </a:r>
+                      <a:r>
+                        <a:rPr lang="en-US" altLang="zh-CN" sz="1200"/>
+                        <a:t>001–006</a:t>
+                      </a:r>
+                      <a:r>
+                        <a:rPr lang="zh-CN" altLang="en-US" sz="1200"/>
+                        <a:t>）、</a:t>
+                      </a:r>
+                      <a:r>
+                        <a:rPr lang="en-US" altLang="zh-CN" sz="1200"/>
+                        <a:t>cross </a:t>
+                      </a:r>
+                      <a:r>
+                        <a:rPr lang="zh-CN" altLang="en-US" sz="1200"/>
+                        <a:t>计算部分（</a:t>
+                      </a:r>
+                      <a:r>
+                        <a:rPr lang="en-US" altLang="zh-CN" sz="1200"/>
+                        <a:t>cross-001 </a:t>
+                      </a:r>
+                      <a:r>
+                        <a:rPr lang="zh-CN" altLang="en-US" sz="1200"/>
+                        <a:t>等）、月粒度时间解析（</a:t>
+                      </a:r>
+                      <a:r>
+                        <a:rPr lang="en-US" altLang="zh-CN" sz="1200"/>
+                        <a:t>mm-004</a:t>
+                      </a:r>
+                      <a:r>
+                        <a:rPr lang="zh-CN" altLang="en-US" sz="1200"/>
+                        <a:t>、</a:t>
+                      </a:r>
+                      <a:r>
+                        <a:rPr lang="en-US" altLang="zh-CN" sz="1200"/>
+                        <a:t>cross-009</a:t>
+                      </a:r>
+                      <a:r>
+                        <a:rPr lang="zh-CN" altLang="en-US" sz="1200"/>
+                        <a:t>）</a:t>
+                      </a:r>
+                      <a:br>
+                        <a:rPr lang="zh-CN" altLang="en-US" sz="1200"/>
+                      </a:br>
+                      <a:r>
+                        <a:rPr lang="zh-CN" altLang="en-US" sz="1200"/>
+                        <a:t>第三层（回归）：全量 </a:t>
+                      </a:r>
+                      <a:r>
+                        <a:rPr lang="en-US" altLang="zh-CN" sz="1200"/>
+                        <a:t>80 </a:t>
+                      </a:r>
+                      <a:r>
+                        <a:rPr lang="zh-CN" altLang="en-US" sz="1200"/>
+                        <a:t>条</a:t>
+                      </a:r>
+                      <a:endParaRPr lang="zh-CN" altLang="en-US" sz="1200"/>
+                    </a:p>
+                  </a:txBody>
+                  <a:tcPr marL="0" marR="0" marT="0" marB="0" anchor="ctr" anchorCtr="0"/>
+                </a:tc>
+                <a:tc>
+                  <a:txBody>
+                    <a:bodyPr/>
+                    <a:p>
+                      <a:r>
+                        <a:rPr lang="zh-CN" altLang="en-US" sz="1200">
+                          <a:highlight>
+                            <a:srgbClr val="FFFF00"/>
+                          </a:highlight>
+                        </a:rPr>
+                        <a:t>优先：</a:t>
+                      </a:r>
+                      <a:r>
+                        <a:rPr lang="en-US" altLang="zh-CN" sz="1200" b="1">
+                          <a:highlight>
+                            <a:srgbClr val="FFFF00"/>
+                          </a:highlight>
+                        </a:rPr>
+                        <a:t>NL2SQL </a:t>
+                      </a:r>
+                      <a:r>
+                        <a:rPr lang="zh-CN" altLang="en-US" sz="1200" b="1">
+                          <a:highlight>
+                            <a:srgbClr val="FFFF00"/>
+                          </a:highlight>
+                        </a:rPr>
+                        <a:t>扩充</a:t>
+                      </a:r>
+                      <a:r>
+                        <a:rPr lang="zh-CN" altLang="en-US" sz="1200">
+                          <a:highlight>
+                            <a:srgbClr val="FFFF00"/>
+                          </a:highlight>
+                        </a:rPr>
+                        <a:t>（</a:t>
+                      </a:r>
+                      <a:r>
+                        <a:rPr lang="en-US" altLang="zh-CN" sz="1200">
+                          <a:highlight>
+                            <a:srgbClr val="FFFF00"/>
+                          </a:highlight>
+                        </a:rPr>
+                        <a:t>basic_nl2sql</a:t>
+                      </a:r>
+                      <a:r>
+                        <a:rPr lang="zh-CN" altLang="en-US" sz="1200">
+                          <a:highlight>
+                            <a:srgbClr val="FFFF00"/>
+                          </a:highlight>
+                        </a:rPr>
+                        <a:t>＋扩充题）</a:t>
+                      </a:r>
+                      <a:br>
+                        <a:rPr lang="zh-CN" altLang="en-US" sz="1200"/>
+                      </a:br>
+                      <a:r>
+                        <a:rPr lang="zh-CN" altLang="en-US" sz="1200"/>
+                        <a:t>中级四五：</a:t>
+                      </a:r>
+                      <a:r>
+                        <a:rPr lang="zh-CN" altLang="en-US" sz="1200" b="1"/>
+                        <a:t>多表关联</a:t>
+                      </a:r>
+                      <a:r>
+                        <a:rPr lang="zh-CN" altLang="en-US" sz="1200"/>
+                        <a:t>（</a:t>
+                      </a:r>
+                      <a:r>
+                        <a:rPr lang="en-US" altLang="zh-CN" sz="1200"/>
+                        <a:t>multitable</a:t>
+                      </a:r>
+                      <a:r>
+                        <a:rPr lang="zh-CN" altLang="en-US" sz="1200"/>
+                        <a:t>）</a:t>
+                      </a:r>
+                      <a:br>
+                        <a:rPr lang="zh-CN" altLang="en-US" sz="1200"/>
+                      </a:br>
+                      <a:r>
+                        <a:rPr lang="zh-CN" altLang="en-US" sz="1200"/>
+                        <a:t>中级六：</a:t>
+                      </a:r>
+                      <a:r>
+                        <a:rPr lang="zh-CN" altLang="en-US" sz="1200" b="1"/>
+                        <a:t>公式计算</a:t>
+                      </a:r>
+                      <a:r>
+                        <a:rPr lang="zh-CN" altLang="en-US" sz="1200"/>
+                        <a:t>（</a:t>
+                      </a:r>
+                      <a:r>
+                        <a:rPr lang="en-US" altLang="zh-CN" sz="1200"/>
+                        <a:t>formula</a:t>
+                      </a:r>
+                      <a:r>
+                        <a:rPr lang="zh-CN" altLang="en-US" sz="1200"/>
+                        <a:t>）</a:t>
+                      </a:r>
+                      <a:br>
+                        <a:rPr lang="zh-CN" altLang="en-US" sz="1200"/>
+                      </a:br>
+                      <a:r>
+                        <a:rPr lang="zh-CN" altLang="en-US" sz="1200"/>
+                        <a:t>优先跨源问答（</a:t>
+                      </a:r>
+                      <a:r>
+                        <a:rPr lang="en-US" altLang="zh-CN" sz="1200"/>
+                        <a:t>cross</a:t>
+                      </a:r>
+                      <a:r>
+                        <a:rPr lang="zh-CN" altLang="en-US" sz="1200"/>
+                        <a:t>，本线承计算落地与数值绑定）</a:t>
+                      </a:r>
+                      <a:endParaRPr lang="zh-CN" altLang="en-US" sz="1200"/>
+                    </a:p>
+                  </a:txBody>
+                  <a:tcPr marL="0" marR="0" marT="0" marB="0" anchor="ctr" anchorCtr="0"/>
+                </a:tc>
+              </a:tr>
+              <a:tr h="2117725">
+                <a:tc>
+                  <a:txBody>
+                    <a:bodyPr/>
+                    <a:p>
+                      <a:r>
+                        <a:rPr lang="en-US" altLang="zh-CN" sz="1200"/>
+                        <a:t>C </a:t>
+                      </a:r>
+                      <a:r>
+                        <a:rPr lang="zh-CN" altLang="en-US" sz="1200"/>
+                        <a:t>编排与交互线</a:t>
+                      </a:r>
+                      <a:endParaRPr lang="zh-CN" altLang="en-US" sz="1200"/>
+                    </a:p>
+                  </a:txBody>
+                  <a:tcPr marL="0" marR="0" marT="0" marB="0" anchor="ctr" anchorCtr="0"/>
+                </a:tc>
+                <a:tc>
+                  <a:txBody>
+                    <a:bodyPr/>
+                    <a:p>
+                      <a:r>
+                        <a:rPr lang="zh-CN" altLang="en-US" sz="1200" b="1">
+                          <a:solidFill>
+                            <a:srgbClr val="FF0000"/>
+                          </a:solidFill>
+                        </a:rPr>
+                        <a:t>墙 </a:t>
+                      </a:r>
+                      <a:r>
+                        <a:rPr lang="en-US" altLang="zh-CN" sz="1200" b="1">
+                          <a:solidFill>
+                            <a:srgbClr val="FF0000"/>
+                          </a:solidFill>
+                        </a:rPr>
+                        <a:t>5 </a:t>
+                      </a:r>
+                      <a:r>
+                        <a:rPr lang="zh-CN" altLang="en-US" sz="1200" b="1">
+                          <a:solidFill>
+                            <a:srgbClr val="FF0000"/>
+                          </a:solidFill>
+                        </a:rPr>
+                        <a:t>路由误判 ＋ 墙 </a:t>
+                      </a:r>
+                      <a:r>
+                        <a:rPr lang="en-US" altLang="zh-CN" sz="1200" b="1">
+                          <a:solidFill>
+                            <a:srgbClr val="FF0000"/>
+                          </a:solidFill>
+                        </a:rPr>
+                        <a:t>3 </a:t>
+                      </a:r>
+                      <a:r>
+                        <a:rPr lang="zh-CN" altLang="en-US" sz="1200" b="1">
+                          <a:solidFill>
+                            <a:srgbClr val="FF0000"/>
+                          </a:solidFill>
+                        </a:rPr>
+                        <a:t>澄清策略 ＋ 状态语义（代码：</a:t>
+                      </a:r>
+                      <a:r>
+                        <a:rPr lang="en-US" altLang="zh-CN" sz="1200" b="1">
+                          <a:solidFill>
+                            <a:srgbClr val="FF0000"/>
+                          </a:solidFill>
+                        </a:rPr>
+                        <a:t>graph.py router/</a:t>
+                      </a:r>
+                      <a:r>
+                        <a:rPr lang="zh-CN" altLang="en-US" sz="1200" b="1">
+                          <a:solidFill>
+                            <a:srgbClr val="FF0000"/>
+                          </a:solidFill>
+                        </a:rPr>
+                        <a:t>澄清节点、</a:t>
+                      </a:r>
+                      <a:r>
+                        <a:rPr lang="en-US" altLang="zh-CN" sz="1200" b="1">
+                          <a:solidFill>
+                            <a:srgbClr val="FF0000"/>
+                          </a:solidFill>
+                        </a:rPr>
+                        <a:t>session.py</a:t>
+                      </a:r>
+                      <a:r>
+                        <a:rPr lang="zh-CN" altLang="en-US" sz="1200" b="1">
+                          <a:solidFill>
+                            <a:srgbClr val="FF0000"/>
+                          </a:solidFill>
+                        </a:rPr>
+                        <a:t>、</a:t>
+                      </a:r>
+                      <a:r>
+                        <a:rPr lang="en-US" altLang="zh-CN" sz="1200" b="1">
+                          <a:solidFill>
+                            <a:srgbClr val="FF0000"/>
+                          </a:solidFill>
+                        </a:rPr>
+                        <a:t>state.py</a:t>
+                      </a:r>
+                      <a:r>
+                        <a:rPr lang="zh-CN" altLang="en-US" sz="1200" b="1">
+                          <a:solidFill>
+                            <a:srgbClr val="FF0000"/>
+                          </a:solidFill>
+                        </a:rPr>
+                        <a:t>、</a:t>
+                      </a:r>
+                      <a:r>
+                        <a:rPr lang="en-US" altLang="zh-CN" sz="1200" b="1">
+                          <a:solidFill>
+                            <a:srgbClr val="FF0000"/>
+                          </a:solidFill>
+                        </a:rPr>
+                        <a:t>ask_service.py</a:t>
+                      </a:r>
+                      <a:r>
+                        <a:rPr lang="zh-CN" altLang="en-US" sz="1200" b="1">
+                          <a:solidFill>
+                            <a:srgbClr val="FF0000"/>
+                          </a:solidFill>
+                        </a:rPr>
+                        <a:t>、</a:t>
+                      </a:r>
+                      <a:r>
+                        <a:rPr lang="en-US" altLang="zh-CN" sz="1200" b="1">
+                          <a:solidFill>
+                            <a:srgbClr val="FF0000"/>
+                          </a:solidFill>
+                        </a:rPr>
+                        <a:t>graph_ask_service.py</a:t>
+                      </a:r>
+                      <a:r>
+                        <a:rPr lang="zh-CN" altLang="en-US" sz="1200" b="1">
+                          <a:solidFill>
+                            <a:srgbClr val="FF0000"/>
+                          </a:solidFill>
+                        </a:rPr>
+                        <a:t>、状态枚举与澄清槽位词表）</a:t>
+                      </a:r>
+                      <a:br>
+                        <a:rPr lang="zh-CN" altLang="en-US" sz="1200" b="1">
+                          <a:solidFill>
+                            <a:srgbClr val="FF0000"/>
+                          </a:solidFill>
+                        </a:rPr>
+                      </a:br>
+                      <a:r>
+                        <a:rPr lang="zh-CN" altLang="en-US" sz="1200"/>
+                        <a:t>当前问题：</a:t>
+                      </a:r>
+                      <a:r>
+                        <a:rPr lang="en-US" altLang="zh-CN" sz="1200"/>
+                        <a:t>① </a:t>
+                      </a:r>
+                      <a:r>
+                        <a:rPr lang="zh-CN" altLang="en-US" sz="1200"/>
+                        <a:t>路由误判：</a:t>
+                      </a:r>
+                      <a:r>
+                        <a:rPr lang="en-US" altLang="zh-CN" sz="1200"/>
+                        <a:t>multitable-004/005 sql→rag</a:t>
+                      </a:r>
+                      <a:r>
+                        <a:rPr lang="zh-CN" altLang="en-US" sz="1200"/>
+                        <a:t>、</a:t>
+                      </a:r>
+                      <a:r>
+                        <a:rPr lang="en-US" altLang="zh-CN" sz="1200"/>
+                        <a:t>cross-003/004/007/008/010 cross→rag</a:t>
+                      </a:r>
+                      <a:r>
+                        <a:rPr lang="zh-CN" altLang="en-US" sz="1200"/>
+                        <a:t>、</a:t>
+                      </a:r>
+                      <a:r>
+                        <a:rPr lang="en-US" altLang="zh-CN" sz="1200"/>
+                        <a:t>formula-006/negative-005/cross-009 </a:t>
+                      </a:r>
+                      <a:r>
+                        <a:rPr lang="zh-CN" altLang="en-US" sz="1200"/>
+                        <a:t>误路由 </a:t>
+                      </a:r>
+                      <a:r>
+                        <a:rPr lang="en-US" altLang="zh-CN" sz="1200"/>
+                        <a:t>sql </a:t>
+                      </a:r>
+                      <a:r>
+                        <a:rPr lang="zh-CN" altLang="en-US" sz="1200"/>
+                        <a:t>硬答；</a:t>
+                      </a:r>
+                      <a:r>
+                        <a:rPr lang="en-US" altLang="zh-CN" sz="1200"/>
+                        <a:t>② </a:t>
+                      </a:r>
+                      <a:r>
+                        <a:rPr lang="zh-CN" altLang="en-US" sz="1200"/>
+                        <a:t>过度澄清残留：</a:t>
+                      </a:r>
+                      <a:r>
+                        <a:rPr lang="en-US" altLang="zh-CN" sz="1200"/>
+                        <a:t>cross-002/005/006</a:t>
+                      </a:r>
+                      <a:r>
+                        <a:rPr lang="zh-CN" altLang="en-US" sz="1200"/>
+                        <a:t>、</a:t>
+                      </a:r>
+                      <a:r>
+                        <a:rPr lang="en-US" altLang="zh-CN" sz="1200"/>
+                        <a:t>multidoc-001</a:t>
+                      </a:r>
+                      <a:r>
+                        <a:rPr lang="zh-CN" altLang="en-US" sz="1200"/>
+                        <a:t>、</a:t>
+                      </a:r>
+                      <a:r>
+                        <a:rPr lang="en-US" altLang="zh-CN" sz="1200"/>
+                        <a:t>session </a:t>
+                      </a:r>
+                      <a:r>
+                        <a:rPr lang="zh-CN" altLang="en-US" sz="1200"/>
+                        <a:t>多轮仍要年份澄清；</a:t>
+                      </a:r>
+                      <a:r>
+                        <a:rPr lang="en-US" altLang="zh-CN" sz="1200"/>
+                        <a:t>③ </a:t>
+                      </a:r>
+                      <a:r>
+                        <a:rPr lang="zh-CN" altLang="en-US" sz="1200"/>
+                        <a:t>欠澄清：</a:t>
+                      </a:r>
+                      <a:r>
+                        <a:rPr lang="en-US" altLang="zh-CN" sz="1200"/>
+                        <a:t>clarify-005/006 </a:t>
+                      </a:r>
+                      <a:r>
+                        <a:rPr lang="zh-CN" altLang="en-US" sz="1200"/>
+                        <a:t>该问没问；</a:t>
+                      </a:r>
+                      <a:r>
+                        <a:rPr lang="en-US" altLang="zh-CN" sz="1200"/>
+                        <a:t>④ </a:t>
+                      </a:r>
+                      <a:r>
+                        <a:rPr lang="zh-CN" altLang="en-US" sz="1200"/>
+                        <a:t>槽位词表与金标准不一致：</a:t>
+                      </a:r>
+                      <a:r>
+                        <a:rPr lang="en-US" altLang="zh-CN" sz="1200"/>
+                        <a:t>clarify-001/007/008</a:t>
+                      </a:r>
+                      <a:r>
+                        <a:rPr lang="zh-CN" altLang="en-US" sz="1200"/>
+                        <a:t>（</a:t>
+                      </a:r>
+                      <a:r>
+                        <a:rPr lang="en-US" altLang="zh-CN" sz="1200"/>
+                        <a:t>period vs quarter</a:t>
+                      </a:r>
+                      <a:r>
+                        <a:rPr lang="zh-CN" altLang="en-US" sz="1200"/>
+                        <a:t>、缺 </a:t>
+                      </a:r>
+                      <a:r>
+                        <a:rPr lang="en-US" altLang="zh-CN" sz="1200"/>
+                        <a:t>target_metric</a:t>
+                      </a:r>
+                      <a:r>
+                        <a:rPr lang="zh-CN" altLang="en-US" sz="1200"/>
+                        <a:t>、</a:t>
+                      </a:r>
+                      <a:r>
+                        <a:rPr lang="en-US" altLang="zh-CN" sz="1200"/>
+                        <a:t>genre_scope vs genre_boundary</a:t>
+                      </a:r>
+                      <a:r>
+                        <a:rPr lang="zh-CN" altLang="en-US" sz="1200"/>
+                        <a:t>）、</a:t>
+                      </a:r>
+                      <a:r>
+                        <a:rPr lang="en-US" altLang="zh-CN" sz="1200"/>
+                        <a:t>004 </a:t>
+                      </a:r>
+                      <a:r>
+                        <a:rPr lang="zh-CN" altLang="en-US" sz="1200"/>
+                        <a:t>槽位串味；</a:t>
+                      </a:r>
+                      <a:r>
+                        <a:rPr lang="en-US" altLang="zh-CN" sz="1200"/>
+                        <a:t>⑤ unsupported </a:t>
+                      </a:r>
+                      <a:r>
+                        <a:rPr lang="zh-CN" altLang="en-US" sz="1200"/>
+                        <a:t>与 </a:t>
+                      </a:r>
+                      <a:r>
+                        <a:rPr lang="en-US" altLang="zh-CN" sz="1200"/>
+                        <a:t>insufficient_evidence </a:t>
+                      </a:r>
+                      <a:r>
+                        <a:rPr lang="zh-CN" altLang="en-US" sz="1200"/>
+                        <a:t>边界不清（</a:t>
+                      </a:r>
+                      <a:r>
+                        <a:rPr lang="en-US" altLang="zh-CN" sz="1200"/>
+                        <a:t>negative-004</a:t>
+                      </a:r>
+                      <a:r>
+                        <a:rPr lang="zh-CN" altLang="en-US" sz="1200"/>
+                        <a:t>）、</a:t>
+                      </a:r>
+                      <a:r>
+                        <a:rPr lang="en-US" altLang="zh-CN" sz="1200"/>
+                        <a:t>session </a:t>
+                      </a:r>
+                      <a:r>
+                        <a:rPr lang="zh-CN" altLang="en-US" sz="1200"/>
+                        <a:t>继承失效（</a:t>
+                      </a:r>
+                      <a:r>
+                        <a:rPr lang="en-US" altLang="zh-CN" sz="1200"/>
+                        <a:t>0/5</a:t>
+                      </a:r>
+                      <a:r>
+                        <a:rPr lang="zh-CN" altLang="en-US" sz="1200"/>
+                        <a:t>）</a:t>
+                      </a:r>
+                      <a:endParaRPr lang="zh-CN" altLang="en-US" sz="1200"/>
+                    </a:p>
+                  </a:txBody>
+                  <a:tcPr marL="0" marR="0" marT="0" marB="0" anchor="ctr" anchorCtr="0"/>
+                </a:tc>
+                <a:tc>
+                  <a:txBody>
+                    <a:bodyPr/>
+                    <a:p>
+                      <a:r>
+                        <a:rPr lang="zh-CN" altLang="en-US" sz="1200" b="1"/>
+                        <a:t>第一层（主验收）：</a:t>
+                      </a:r>
+                      <a:r>
+                        <a:rPr lang="en-US" altLang="zh-CN" sz="1200" b="1"/>
+                        <a:t>clarify</a:t>
+                      </a:r>
+                      <a:r>
+                        <a:rPr lang="zh-CN" altLang="en-US" sz="1200" b="1"/>
+                        <a:t>、</a:t>
+                      </a:r>
+                      <a:r>
+                        <a:rPr lang="en-US" altLang="zh-CN" sz="1200" b="1"/>
+                        <a:t>negative</a:t>
+                      </a:r>
+                      <a:r>
+                        <a:rPr lang="zh-CN" altLang="en-US" sz="1200" b="1"/>
+                        <a:t>、</a:t>
+                      </a:r>
+                      <a:r>
+                        <a:rPr lang="en-US" altLang="zh-CN" sz="1200" b="1"/>
+                        <a:t>session</a:t>
+                      </a:r>
+                      <a:r>
+                        <a:rPr lang="zh-CN" altLang="en-US" sz="1200" b="1"/>
+                        <a:t>（多轮）</a:t>
+                      </a:r>
+                      <a:br>
+                        <a:rPr lang="zh-CN" altLang="en-US" sz="1200"/>
+                      </a:br>
+                      <a:r>
+                        <a:rPr lang="zh-CN" altLang="en-US" sz="1200"/>
+                        <a:t>第二层（关联验收）：</a:t>
+                      </a:r>
+                      <a:r>
+                        <a:rPr lang="en-US" altLang="zh-CN" sz="1200"/>
+                        <a:t>cross </a:t>
+                      </a:r>
+                      <a:r>
+                        <a:rPr lang="zh-CN" altLang="en-US" sz="1200"/>
+                        <a:t>的路由与澄清部分（</a:t>
+                      </a:r>
+                      <a:r>
+                        <a:rPr lang="en-US" altLang="zh-CN" sz="1200"/>
+                        <a:t>002/005/006 </a:t>
+                      </a:r>
+                      <a:r>
+                        <a:rPr lang="zh-CN" altLang="en-US" sz="1200"/>
+                        <a:t>过度澄清、</a:t>
+                      </a:r>
+                      <a:r>
+                        <a:rPr lang="en-US" altLang="zh-CN" sz="1200"/>
+                        <a:t>5 </a:t>
+                      </a:r>
+                      <a:r>
+                        <a:rPr lang="zh-CN" altLang="en-US" sz="1200"/>
+                        <a:t>题路由）、</a:t>
+                      </a:r>
+                      <a:r>
+                        <a:rPr lang="en-US" altLang="zh-CN" sz="1200"/>
+                        <a:t>multitable-004/005 </a:t>
+                      </a:r>
+                      <a:r>
+                        <a:rPr lang="zh-CN" altLang="en-US" sz="1200"/>
+                        <a:t>路由部分、</a:t>
+                      </a:r>
+                      <a:r>
+                        <a:rPr lang="en-US" altLang="zh-CN" sz="1200"/>
+                        <a:t>formula-006 </a:t>
+                      </a:r>
+                      <a:r>
+                        <a:rPr lang="zh-CN" altLang="en-US" sz="1200"/>
+                        <a:t>与 </a:t>
+                      </a:r>
+                      <a:r>
+                        <a:rPr lang="en-US" altLang="zh-CN" sz="1200"/>
+                        <a:t>negative-005 </a:t>
+                      </a:r>
+                      <a:r>
+                        <a:rPr lang="zh-CN" altLang="en-US" sz="1200"/>
+                        <a:t>拒绝边界</a:t>
+                      </a:r>
+                      <a:br>
+                        <a:rPr lang="zh-CN" altLang="en-US" sz="1200"/>
+                      </a:br>
+                      <a:r>
+                        <a:rPr lang="zh-CN" altLang="en-US" sz="1200"/>
+                        <a:t>第三层（回归）：全量 </a:t>
+                      </a:r>
+                      <a:r>
+                        <a:rPr lang="en-US" altLang="zh-CN" sz="1200"/>
+                        <a:t>80 </a:t>
+                      </a:r>
+                      <a:r>
+                        <a:rPr lang="zh-CN" altLang="en-US" sz="1200"/>
+                        <a:t>条</a:t>
+                      </a:r>
+                      <a:endParaRPr lang="zh-CN" altLang="en-US" sz="1200"/>
+                    </a:p>
+                  </a:txBody>
+                  <a:tcPr marL="0" marR="0" marT="0" marB="0" anchor="ctr" anchorCtr="0"/>
+                </a:tc>
+                <a:tc>
+                  <a:txBody>
+                    <a:bodyPr/>
+                    <a:p>
+                      <a:r>
+                        <a:rPr lang="zh-CN" altLang="en-US" sz="1200"/>
+                        <a:t>中级三：</a:t>
+                      </a:r>
+                      <a:r>
+                        <a:rPr lang="zh-CN" altLang="en-US" sz="1200" b="1"/>
+                        <a:t>主动澄清</a:t>
+                      </a:r>
+                      <a:r>
+                        <a:rPr lang="zh-CN" altLang="en-US" sz="1200"/>
+                        <a:t>（</a:t>
+                      </a:r>
+                      <a:r>
+                        <a:rPr lang="en-US" altLang="zh-CN" sz="1200"/>
+                        <a:t>clarify</a:t>
+                      </a:r>
+                      <a:r>
+                        <a:rPr lang="zh-CN" altLang="en-US" sz="1200"/>
+                        <a:t>）</a:t>
+                      </a:r>
+                      <a:br>
+                        <a:rPr lang="zh-CN" altLang="en-US" sz="1200"/>
+                      </a:br>
+                      <a:r>
+                        <a:rPr lang="zh-CN" altLang="en-US" sz="1200" b="1"/>
+                        <a:t>无证据处理</a:t>
+                      </a:r>
+                      <a:r>
+                        <a:rPr lang="zh-CN" altLang="en-US" sz="1200"/>
+                        <a:t>（</a:t>
+                      </a:r>
+                      <a:r>
+                        <a:rPr lang="en-US" altLang="zh-CN" sz="1200"/>
+                        <a:t>negative</a:t>
+                      </a:r>
+                      <a:r>
+                        <a:rPr lang="zh-CN" altLang="en-US" sz="1200"/>
+                        <a:t>，边界不清可删改，勿与澄清混淆）</a:t>
+                      </a:r>
+                      <a:br>
+                        <a:rPr lang="zh-CN" altLang="en-US" sz="1200"/>
+                      </a:br>
+                      <a:r>
+                        <a:rPr lang="zh-CN" altLang="en-US" sz="1200" b="1"/>
+                        <a:t>多轮会话</a:t>
+                      </a:r>
+                      <a:r>
+                        <a:rPr lang="zh-CN" altLang="en-US" sz="1200"/>
+                        <a:t>（</a:t>
+                      </a:r>
+                      <a:r>
+                        <a:rPr lang="en-US" altLang="zh-CN" sz="1200"/>
+                        <a:t>session</a:t>
+                      </a:r>
+                      <a:r>
+                        <a:rPr lang="zh-CN" altLang="en-US" sz="1200"/>
+                        <a:t>，可删）</a:t>
+                      </a:r>
+                      <a:br>
+                        <a:rPr lang="zh-CN" altLang="en-US" sz="1200"/>
+                      </a:br>
+                      <a:r>
+                        <a:rPr lang="zh-CN" altLang="en-US" sz="1200" b="1">
+                          <a:highlight>
+                            <a:srgbClr val="FFFF00"/>
+                          </a:highlight>
+                        </a:rPr>
+                        <a:t>优先跨源问答</a:t>
+                      </a:r>
+                      <a:r>
+                        <a:rPr lang="zh-CN" altLang="en-US" sz="1200">
+                          <a:highlight>
+                            <a:srgbClr val="FFFF00"/>
+                          </a:highlight>
+                        </a:rPr>
+                        <a:t>（</a:t>
+                      </a:r>
+                      <a:r>
+                        <a:rPr lang="en-US" altLang="zh-CN" sz="1200">
+                          <a:highlight>
+                            <a:srgbClr val="FFFF00"/>
+                          </a:highlight>
+                        </a:rPr>
+                        <a:t>cross</a:t>
+                      </a:r>
+                      <a:r>
+                        <a:rPr lang="zh-CN" altLang="en-US" sz="1200">
+                          <a:highlight>
+                            <a:srgbClr val="FFFF00"/>
+                          </a:highlight>
+                        </a:rPr>
+                        <a:t>，本线承路由与澄清信号）</a:t>
+                      </a:r>
+                      <a:endParaRPr lang="zh-CN" altLang="en-US" sz="1200">
+                        <a:highlight>
+                          <a:srgbClr val="FFFF00"/>
+                        </a:highlight>
+                      </a:endParaRPr>
+                    </a:p>
+                  </a:txBody>
+                  <a:tcPr marL="0" marR="0" marT="0" marB="0" anchor="ctr" anchorCtr="0"/>
+                </a:tc>
+              </a:tr>
+            </a:tbl>
+          </a:graphicData>
+        </a:graphic>
+      </p:graphicFrame>
+    </p:spTree>
+  </p:cSld>
+  <p:clrMapOvr>
+    <a:masterClrMapping/>
+  </p:clrMapOvr>
+</p:sld>
+</file>
+
+<file path=ppt/slides/slide15.xml><?xml version="1.0" encoding="utf-8"?>
+<p:sld xmlns:a="http://schemas.openxmlformats.org/drawingml/2006/main" xmlns:r="http://schemas.openxmlformats.org/officeDocument/2006/relationships" xmlns:p="http://schemas.openxmlformats.org/presentationml/2006/main">
+  <p:cSld>
+    <p:spTree>
+      <p:nvGrpSpPr>
+        <p:cNvPr id="1" name=""/>
+        <p:cNvGrpSpPr/>
+        <p:nvPr/>
+      </p:nvGrpSpPr>
+      <p:grpSpPr/>
+      <p:sp>
+        <p:nvSpPr>
+          <p:cNvPr id="2" name="Title 1"/>
+          <p:cNvSpPr>
+            <a:spLocks noGrp="1"/>
+          </p:cNvSpPr>
+          <p:nvPr>
+            <p:ph type="title"/>
+          </p:nvPr>
+        </p:nvSpPr>
+        <p:spPr/>
+        <p:txBody>
+          <a:bodyPr/>
+          <a:p>
+            <a:r>
+              <a:t>初赛</a:t>
+            </a:r>
+            <a:r>
+              <a:t>提交</a:t>
+            </a:r>
+          </a:p>
+        </p:txBody>
+      </p:sp>
+      <p:sp>
+        <p:nvSpPr>
+          <p:cNvPr id="5" name="Text Box 3"/>
+          <p:cNvSpPr txBox="1"/>
+          <p:nvPr/>
+        </p:nvSpPr>
+        <p:spPr>
+          <a:xfrm>
+            <a:off x="337185" y="1012825"/>
+            <a:ext cx="5495925" cy="5146040"/>
+          </a:xfrm>
+          <a:prstGeom prst="rect">
+            <a:avLst/>
+          </a:prstGeom>
+          <a:noFill/>
+        </p:spPr>
+        <p:txBody>
+          <a:bodyPr wrap="square" rtlCol="0">
+            <a:noAutofit/>
+          </a:bodyPr>
+          <a:p>
+            <a:pPr indent="0" algn="l" fontAlgn="auto">
+              <a:lnSpc>
+                <a:spcPct val="125000"/>
+              </a:lnSpc>
+              <a:spcBef>
+                <a:spcPts val="0"/>
+              </a:spcBef>
+              <a:spcAft>
+                <a:spcPts val="0"/>
+              </a:spcAft>
+              <a:buClrTx/>
+              <a:buSzTx/>
+              <a:buFont typeface="Wingdings" panose="05000000000000000000" charset="0"/>
+              <a:buNone/>
+            </a:pPr>
+            <a:r>
+              <a:rPr lang="zh-CN" altLang="en-US" sz="2400" b="1" kern="100" dirty="0">
+                <a:solidFill>
+                  <a:srgbClr val="103380"/>
+                </a:solidFill>
+                <a:uFillTx/>
+                <a:latin typeface="微软雅黑" panose="020B0503020204020204" pitchFamily="34" charset="-122"/>
+                <a:ea typeface="微软雅黑" panose="020B0503020204020204" pitchFamily="34" charset="-122"/>
+                <a:sym typeface="+mn-ea"/>
+              </a:rPr>
+              <a:t>最终提交形式：</a:t>
+            </a:r>
+            <a:r>
+              <a:rPr lang="en-US" altLang="zh-CN" sz="2400" b="1" kern="100" dirty="0">
+                <a:solidFill>
+                  <a:srgbClr val="103380"/>
+                </a:solidFill>
+                <a:uFillTx/>
+                <a:latin typeface="微软雅黑" panose="020B0503020204020204" pitchFamily="34" charset="-122"/>
+                <a:ea typeface="微软雅黑" panose="020B0503020204020204" pitchFamily="34" charset="-122"/>
+                <a:sym typeface="+mn-ea"/>
+              </a:rPr>
+              <a:t>ddl 10.19</a:t>
+            </a:r>
+            <a:endParaRPr lang="zh-CN" altLang="en-US" sz="2400" b="1" kern="100" dirty="0">
+              <a:solidFill>
+                <a:srgbClr val="103380"/>
+              </a:solidFill>
+              <a:uFillTx/>
+              <a:latin typeface="微软雅黑" panose="020B0503020204020204" pitchFamily="34" charset="-122"/>
+              <a:ea typeface="微软雅黑" panose="020B0503020204020204" pitchFamily="34" charset="-122"/>
+              <a:sym typeface="+mn-ea"/>
+            </a:endParaRPr>
+          </a:p>
+          <a:p>
+            <a:pPr indent="0" algn="l" fontAlgn="auto">
+              <a:lnSpc>
+                <a:spcPct val="125000"/>
+              </a:lnSpc>
+              <a:spcBef>
+                <a:spcPts val="0"/>
+              </a:spcBef>
+              <a:spcAft>
+                <a:spcPts val="0"/>
+              </a:spcAft>
+              <a:buClrTx/>
+              <a:buSzTx/>
+              <a:buFont typeface="Wingdings" panose="05000000000000000000" charset="0"/>
+              <a:buNone/>
+            </a:pPr>
+            <a:r>
+              <a:rPr lang="zh-CN" altLang="en-US" sz="2000" kern="100" dirty="0">
+                <a:solidFill>
+                  <a:srgbClr val="103380"/>
+                </a:solidFill>
+                <a:uFillTx/>
+                <a:latin typeface="微软雅黑" panose="020B0503020204020204" pitchFamily="34" charset="-122"/>
+                <a:ea typeface="微软雅黑" panose="020B0503020204020204" pitchFamily="34" charset="-122"/>
+                <a:sym typeface="+mn-ea"/>
+              </a:rPr>
+              <a:t>（1）技术文档——设计报告：提交 </a:t>
+            </a:r>
+            <a:r>
+              <a:rPr lang="en-US" altLang="zh-CN" sz="2000" kern="100" dirty="0">
+                <a:solidFill>
+                  <a:srgbClr val="103380"/>
+                </a:solidFill>
+                <a:uFillTx/>
+                <a:latin typeface="微软雅黑" panose="020B0503020204020204" pitchFamily="34" charset="-122"/>
+                <a:ea typeface="微软雅黑" panose="020B0503020204020204" pitchFamily="34" charset="-122"/>
+                <a:sym typeface="+mn-ea"/>
+              </a:rPr>
+              <a:t>Word </a:t>
+            </a:r>
+            <a:r>
+              <a:rPr lang="zh-CN" altLang="en-US" sz="2000" kern="100" dirty="0">
+                <a:solidFill>
+                  <a:srgbClr val="103380"/>
+                </a:solidFill>
+                <a:uFillTx/>
+                <a:latin typeface="微软雅黑" panose="020B0503020204020204" pitchFamily="34" charset="-122"/>
+                <a:ea typeface="微软雅黑" panose="020B0503020204020204" pitchFamily="34" charset="-122"/>
+                <a:sym typeface="+mn-ea"/>
+              </a:rPr>
+              <a:t>版本及 </a:t>
+            </a:r>
+            <a:r>
+              <a:rPr lang="en-US" altLang="zh-CN" sz="2000" kern="100" dirty="0">
+                <a:solidFill>
+                  <a:srgbClr val="103380"/>
+                </a:solidFill>
+                <a:uFillTx/>
+                <a:latin typeface="微软雅黑" panose="020B0503020204020204" pitchFamily="34" charset="-122"/>
+                <a:ea typeface="微软雅黑" panose="020B0503020204020204" pitchFamily="34" charset="-122"/>
+                <a:sym typeface="+mn-ea"/>
+              </a:rPr>
+              <a:t>PDF </a:t>
+            </a:r>
+            <a:r>
+              <a:rPr lang="zh-CN" altLang="en-US" sz="2000" kern="100" dirty="0">
+                <a:solidFill>
+                  <a:srgbClr val="103380"/>
+                </a:solidFill>
+                <a:uFillTx/>
+                <a:latin typeface="微软雅黑" panose="020B0503020204020204" pitchFamily="34" charset="-122"/>
+                <a:ea typeface="微软雅黑" panose="020B0503020204020204" pitchFamily="34" charset="-122"/>
+                <a:sym typeface="+mn-ea"/>
+              </a:rPr>
+              <a:t>版本各 1 份，总篇幅建议不超过 20 页（含封面、目录、正文及附录）。</a:t>
+            </a:r>
+            <a:endParaRPr lang="zh-CN" altLang="en-US" sz="2000" kern="100" dirty="0">
+              <a:solidFill>
+                <a:srgbClr val="103380"/>
+              </a:solidFill>
+              <a:uFillTx/>
+              <a:latin typeface="微软雅黑" panose="020B0503020204020204" pitchFamily="34" charset="-122"/>
+              <a:ea typeface="微软雅黑" panose="020B0503020204020204" pitchFamily="34" charset="-122"/>
+              <a:sym typeface="+mn-ea"/>
+            </a:endParaRPr>
+          </a:p>
+          <a:p>
+            <a:pPr indent="0" algn="l" fontAlgn="auto">
+              <a:lnSpc>
+                <a:spcPct val="125000"/>
+              </a:lnSpc>
+              <a:spcBef>
+                <a:spcPts val="0"/>
+              </a:spcBef>
+              <a:spcAft>
+                <a:spcPts val="0"/>
+              </a:spcAft>
+              <a:buClrTx/>
+              <a:buSzTx/>
+              <a:buFont typeface="Wingdings" panose="05000000000000000000" charset="0"/>
+              <a:buNone/>
+            </a:pPr>
+            <a:r>
+              <a:rPr lang="zh-CN" altLang="en-US" sz="2000" kern="100" dirty="0">
+                <a:solidFill>
+                  <a:srgbClr val="103380"/>
+                </a:solidFill>
+                <a:uFillTx/>
+                <a:latin typeface="微软雅黑" panose="020B0503020204020204" pitchFamily="34" charset="-122"/>
+                <a:ea typeface="微软雅黑" panose="020B0503020204020204" pitchFamily="34" charset="-122"/>
+                <a:sym typeface="+mn-ea"/>
+              </a:rPr>
+              <a:t>封面或目录后的</a:t>
+            </a:r>
+            <a:r>
+              <a:rPr lang="zh-CN" altLang="en-US" sz="2000" kern="100" dirty="0">
+                <a:solidFill>
+                  <a:srgbClr val="103380"/>
+                </a:solidFill>
+                <a:highlight>
+                  <a:srgbClr val="FFFF00"/>
+                </a:highlight>
+                <a:uFillTx/>
+                <a:latin typeface="微软雅黑" panose="020B0503020204020204" pitchFamily="34" charset="-122"/>
+                <a:ea typeface="微软雅黑" panose="020B0503020204020204" pitchFamily="34" charset="-122"/>
+                <a:sym typeface="+mn-ea"/>
+              </a:rPr>
+              <a:t>第 1-2 页必须为“项目核心亮点预览页”</a:t>
+            </a:r>
+            <a:r>
+              <a:rPr lang="zh-CN" altLang="en-US" sz="2000" kern="100" dirty="0">
+                <a:solidFill>
+                  <a:srgbClr val="103380"/>
+                </a:solidFill>
+                <a:uFillTx/>
+                <a:latin typeface="微软雅黑" panose="020B0503020204020204" pitchFamily="34" charset="-122"/>
+                <a:ea typeface="微软雅黑" panose="020B0503020204020204" pitchFamily="34" charset="-122"/>
+                <a:sym typeface="+mn-ea"/>
+              </a:rPr>
+              <a:t>，集中展示作品相对于赛题基础任务和中级任务要求所实现的核心能力，</a:t>
+            </a:r>
+            <a:endParaRPr lang="zh-CN" altLang="en-US" sz="2000" kern="100" dirty="0">
+              <a:solidFill>
+                <a:srgbClr val="103380"/>
+              </a:solidFill>
+              <a:uFillTx/>
+              <a:latin typeface="微软雅黑" panose="020B0503020204020204" pitchFamily="34" charset="-122"/>
+              <a:ea typeface="微软雅黑" panose="020B0503020204020204" pitchFamily="34" charset="-122"/>
+              <a:sym typeface="+mn-ea"/>
+            </a:endParaRPr>
+          </a:p>
+          <a:p>
+            <a:pPr indent="0" algn="l" fontAlgn="auto">
+              <a:lnSpc>
+                <a:spcPct val="125000"/>
+              </a:lnSpc>
+              <a:spcBef>
+                <a:spcPts val="0"/>
+              </a:spcBef>
+              <a:spcAft>
+                <a:spcPts val="0"/>
+              </a:spcAft>
+              <a:buClrTx/>
+              <a:buSzTx/>
+              <a:buFont typeface="Wingdings" panose="05000000000000000000" charset="0"/>
+              <a:buNone/>
+            </a:pPr>
+            <a:r>
+              <a:rPr lang="zh-CN" altLang="en-US" sz="2000" kern="100" dirty="0">
+                <a:solidFill>
+                  <a:srgbClr val="103380"/>
+                </a:solidFill>
+                <a:uFillTx/>
+                <a:latin typeface="微软雅黑" panose="020B0503020204020204" pitchFamily="34" charset="-122"/>
+                <a:ea typeface="微软雅黑" panose="020B0503020204020204" pitchFamily="34" charset="-122"/>
+                <a:sym typeface="+mn-ea"/>
+              </a:rPr>
+              <a:t>包括但不限于：</a:t>
+            </a:r>
+            <a:r>
+              <a:rPr lang="zh-CN" altLang="en-US" sz="2000" kern="100" dirty="0">
+                <a:solidFill>
+                  <a:srgbClr val="103380"/>
+                </a:solidFill>
+                <a:highlight>
+                  <a:srgbClr val="FFFF00"/>
+                </a:highlight>
+                <a:uFillTx/>
+                <a:latin typeface="微软雅黑" panose="020B0503020204020204" pitchFamily="34" charset="-122"/>
+                <a:ea typeface="微软雅黑" panose="020B0503020204020204" pitchFamily="34" charset="-122"/>
+                <a:sym typeface="+mn-ea"/>
+              </a:rPr>
+              <a:t>系统整体架构图、多模态数据融合处理链路、核心创新点摘要、已攻克的中级任务清单及实现效果关键数据</a:t>
+            </a:r>
+            <a:r>
+              <a:rPr lang="zh-CN" altLang="en-US" sz="2000" kern="100" dirty="0">
+                <a:solidFill>
+                  <a:srgbClr val="103380"/>
+                </a:solidFill>
+                <a:uFillTx/>
+                <a:latin typeface="微软雅黑" panose="020B0503020204020204" pitchFamily="34" charset="-122"/>
+                <a:ea typeface="微软雅黑" panose="020B0503020204020204" pitchFamily="34" charset="-122"/>
+                <a:sym typeface="+mn-ea"/>
+              </a:rPr>
+              <a:t>（如 </a:t>
+            </a:r>
+            <a:r>
+              <a:rPr lang="en-US" altLang="zh-CN" sz="2000" kern="100" dirty="0">
+                <a:solidFill>
+                  <a:srgbClr val="103380"/>
+                </a:solidFill>
+                <a:uFillTx/>
+                <a:latin typeface="微软雅黑" panose="020B0503020204020204" pitchFamily="34" charset="-122"/>
+                <a:ea typeface="微软雅黑" panose="020B0503020204020204" pitchFamily="34" charset="-122"/>
+                <a:sym typeface="+mn-ea"/>
+              </a:rPr>
+              <a:t>NL2SQL </a:t>
+            </a:r>
+            <a:r>
+              <a:rPr lang="zh-CN" altLang="en-US" sz="2000" kern="100" dirty="0">
+                <a:solidFill>
+                  <a:srgbClr val="103380"/>
+                </a:solidFill>
+                <a:uFillTx/>
+                <a:latin typeface="微软雅黑" panose="020B0503020204020204" pitchFamily="34" charset="-122"/>
+                <a:ea typeface="微软雅黑" panose="020B0503020204020204" pitchFamily="34" charset="-122"/>
+                <a:sym typeface="+mn-ea"/>
+              </a:rPr>
+              <a:t>执行准确率、</a:t>
+            </a:r>
+            <a:r>
+              <a:rPr lang="en-US" altLang="zh-CN" sz="2000" kern="100" dirty="0">
+                <a:solidFill>
+                  <a:srgbClr val="103380"/>
+                </a:solidFill>
+                <a:uFillTx/>
+                <a:latin typeface="微软雅黑" panose="020B0503020204020204" pitchFamily="34" charset="-122"/>
+                <a:ea typeface="微软雅黑" panose="020B0503020204020204" pitchFamily="34" charset="-122"/>
+                <a:sym typeface="+mn-ea"/>
+              </a:rPr>
+              <a:t>RAG </a:t>
+            </a:r>
+            <a:r>
+              <a:rPr lang="zh-CN" altLang="en-US" sz="2000" kern="100" dirty="0">
+                <a:solidFill>
+                  <a:srgbClr val="103380"/>
+                </a:solidFill>
+                <a:uFillTx/>
+                <a:latin typeface="微软雅黑" panose="020B0503020204020204" pitchFamily="34" charset="-122"/>
+                <a:ea typeface="微软雅黑" panose="020B0503020204020204" pitchFamily="34" charset="-122"/>
+                <a:sym typeface="+mn-ea"/>
+              </a:rPr>
+              <a:t>检索命中率、澄清交互成功率等）。</a:t>
+            </a:r>
+            <a:endParaRPr lang="en-US" altLang="zh-CN" sz="2400" b="1" kern="100" dirty="0">
+              <a:solidFill>
+                <a:srgbClr val="103380"/>
+              </a:solidFill>
+              <a:uFillTx/>
+              <a:latin typeface="微软雅黑" panose="020B0503020204020204" pitchFamily="34" charset="-122"/>
+              <a:ea typeface="微软雅黑" panose="020B0503020204020204" pitchFamily="34" charset="-122"/>
+              <a:sym typeface="+mn-ea"/>
+            </a:endParaRPr>
+          </a:p>
+          <a:p>
+            <a:pPr indent="0" algn="l" fontAlgn="auto">
+              <a:lnSpc>
+                <a:spcPct val="125000"/>
+              </a:lnSpc>
+              <a:spcBef>
+                <a:spcPts val="0"/>
+              </a:spcBef>
+              <a:spcAft>
+                <a:spcPts val="0"/>
+              </a:spcAft>
+              <a:buClrTx/>
+              <a:buSzTx/>
+              <a:buFont typeface="Wingdings" panose="05000000000000000000" charset="0"/>
+              <a:buNone/>
+            </a:pPr>
+            <a:endParaRPr lang="en-US" altLang="zh-CN" sz="2000" b="1" kern="100" dirty="0">
+              <a:solidFill>
+                <a:srgbClr val="103380"/>
+              </a:solidFill>
+              <a:uFillTx/>
+              <a:latin typeface="微软雅黑" panose="020B0503020204020204" pitchFamily="34" charset="-122"/>
+              <a:ea typeface="微软雅黑" panose="020B0503020204020204" pitchFamily="34" charset="-122"/>
+              <a:sym typeface="+mn-ea"/>
+            </a:endParaRPr>
+          </a:p>
+          <a:p>
+            <a:pPr indent="0" algn="l" fontAlgn="auto">
+              <a:lnSpc>
+                <a:spcPct val="125000"/>
+              </a:lnSpc>
+              <a:spcBef>
+                <a:spcPts val="0"/>
+              </a:spcBef>
+              <a:spcAft>
+                <a:spcPts val="0"/>
+              </a:spcAft>
+              <a:buClrTx/>
+              <a:buSzTx/>
+              <a:buFont typeface="Arial" panose="020B0604020202020204" pitchFamily="34" charset="0"/>
+              <a:buNone/>
+            </a:pPr>
+            <a:endParaRPr lang="en-US" altLang="zh-CN" sz="2000" b="1" kern="100" dirty="0">
+              <a:solidFill>
+                <a:srgbClr val="103380"/>
+              </a:solidFill>
+              <a:uFillTx/>
+              <a:latin typeface="微软雅黑" panose="020B0503020204020204" pitchFamily="34" charset="-122"/>
+              <a:ea typeface="微软雅黑" panose="020B0503020204020204" pitchFamily="34" charset="-122"/>
+              <a:sym typeface="+mn-ea"/>
+            </a:endParaRPr>
+          </a:p>
+        </p:txBody>
+      </p:sp>
+      <p:sp>
+        <p:nvSpPr>
+          <p:cNvPr id="6" name="Text Box 3"/>
+          <p:cNvSpPr txBox="1"/>
+          <p:nvPr/>
+        </p:nvSpPr>
+        <p:spPr>
+          <a:xfrm>
+            <a:off x="6216650" y="1088390"/>
+            <a:ext cx="5825490" cy="5146040"/>
+          </a:xfrm>
+          <a:prstGeom prst="rect">
+            <a:avLst/>
+          </a:prstGeom>
+          <a:noFill/>
+        </p:spPr>
+        <p:txBody>
+          <a:bodyPr wrap="square" rtlCol="0">
+            <a:noAutofit/>
+          </a:bodyPr>
+          <a:p>
+            <a:pPr indent="0" algn="l" fontAlgn="auto">
+              <a:lnSpc>
+                <a:spcPct val="125000"/>
+              </a:lnSpc>
+              <a:spcBef>
+                <a:spcPts val="0"/>
+              </a:spcBef>
+              <a:spcAft>
+                <a:spcPts val="0"/>
+              </a:spcAft>
+              <a:buClrTx/>
+              <a:buSzTx/>
+              <a:buFont typeface="Wingdings" panose="05000000000000000000" charset="0"/>
+              <a:buNone/>
+            </a:pPr>
+            <a:r>
+              <a:rPr lang="zh-CN" altLang="en-US" kern="100" dirty="0">
+                <a:solidFill>
+                  <a:srgbClr val="103380"/>
+                </a:solidFill>
+                <a:uFillTx/>
+                <a:latin typeface="微软雅黑" panose="020B0503020204020204" pitchFamily="34" charset="-122"/>
+                <a:ea typeface="微软雅黑" panose="020B0503020204020204" pitchFamily="34" charset="-122"/>
+                <a:sym typeface="+mn-ea"/>
+              </a:rPr>
+              <a:t>（2）技术文档——技术实现说明书：格式要求同上，总篇幅建议不超过 30 页。内容应系统阐述以下模块：</a:t>
+            </a:r>
+            <a:endParaRPr lang="zh-CN" altLang="en-US" kern="100" dirty="0">
+              <a:solidFill>
+                <a:srgbClr val="103380"/>
+              </a:solidFill>
+              <a:uFillTx/>
+              <a:latin typeface="微软雅黑" panose="020B0503020204020204" pitchFamily="34" charset="-122"/>
+              <a:ea typeface="微软雅黑" panose="020B0503020204020204" pitchFamily="34" charset="-122"/>
+              <a:sym typeface="+mn-ea"/>
+            </a:endParaRPr>
+          </a:p>
+          <a:p>
+            <a:pPr marL="342900" indent="-342900" algn="l" fontAlgn="auto">
+              <a:lnSpc>
+                <a:spcPct val="125000"/>
+              </a:lnSpc>
+              <a:spcBef>
+                <a:spcPts val="0"/>
+              </a:spcBef>
+              <a:spcAft>
+                <a:spcPts val="0"/>
+              </a:spcAft>
+              <a:buClrTx/>
+              <a:buSzTx/>
+              <a:buFont typeface="Wingdings" panose="05000000000000000000" charset="0"/>
+              <a:buChar char="l"/>
+            </a:pPr>
+            <a:r>
+              <a:rPr lang="zh-CN" altLang="en-US" kern="100" dirty="0">
+                <a:solidFill>
+                  <a:srgbClr val="103380"/>
+                </a:solidFill>
+                <a:uFillTx/>
+                <a:latin typeface="微软雅黑" panose="020B0503020204020204" pitchFamily="34" charset="-122"/>
+                <a:ea typeface="微软雅黑" panose="020B0503020204020204" pitchFamily="34" charset="-122"/>
+                <a:sym typeface="+mn-ea"/>
+              </a:rPr>
+              <a:t>系统总体架构设计</a:t>
+            </a:r>
+            <a:endParaRPr lang="zh-CN" altLang="en-US" kern="100" dirty="0">
+              <a:solidFill>
+                <a:srgbClr val="103380"/>
+              </a:solidFill>
+              <a:uFillTx/>
+              <a:latin typeface="微软雅黑" panose="020B0503020204020204" pitchFamily="34" charset="-122"/>
+              <a:ea typeface="微软雅黑" panose="020B0503020204020204" pitchFamily="34" charset="-122"/>
+              <a:sym typeface="+mn-ea"/>
+            </a:endParaRPr>
+          </a:p>
+          <a:p>
+            <a:pPr marL="342900" indent="-342900" algn="l" fontAlgn="auto">
+              <a:lnSpc>
+                <a:spcPct val="125000"/>
+              </a:lnSpc>
+              <a:spcBef>
+                <a:spcPts val="0"/>
+              </a:spcBef>
+              <a:spcAft>
+                <a:spcPts val="0"/>
+              </a:spcAft>
+              <a:buClrTx/>
+              <a:buSzTx/>
+              <a:buFont typeface="Wingdings" panose="05000000000000000000" charset="0"/>
+              <a:buChar char="l"/>
+            </a:pPr>
+            <a:r>
+              <a:rPr lang="en-US" altLang="zh-CN" kern="100" dirty="0">
+                <a:solidFill>
+                  <a:srgbClr val="103380"/>
+                </a:solidFill>
+                <a:uFillTx/>
+                <a:latin typeface="微软雅黑" panose="020B0503020204020204" pitchFamily="34" charset="-122"/>
+                <a:ea typeface="微软雅黑" panose="020B0503020204020204" pitchFamily="34" charset="-122"/>
+                <a:sym typeface="+mn-ea"/>
+              </a:rPr>
+              <a:t>NL2SQL </a:t>
+            </a:r>
+            <a:r>
+              <a:rPr lang="zh-CN" altLang="en-US" kern="100" dirty="0">
+                <a:solidFill>
+                  <a:srgbClr val="103380"/>
+                </a:solidFill>
+                <a:uFillTx/>
+                <a:latin typeface="微软雅黑" panose="020B0503020204020204" pitchFamily="34" charset="-122"/>
+                <a:ea typeface="微软雅黑" panose="020B0503020204020204" pitchFamily="34" charset="-122"/>
+                <a:sym typeface="+mn-ea"/>
+              </a:rPr>
+              <a:t>模块技术实现（包含 </a:t>
+            </a:r>
+            <a:r>
+              <a:rPr lang="en-US" altLang="zh-CN" kern="100" dirty="0">
+                <a:solidFill>
+                  <a:srgbClr val="103380"/>
+                </a:solidFill>
+                <a:uFillTx/>
+                <a:latin typeface="微软雅黑" panose="020B0503020204020204" pitchFamily="34" charset="-122"/>
+                <a:ea typeface="微软雅黑" panose="020B0503020204020204" pitchFamily="34" charset="-122"/>
+                <a:sym typeface="+mn-ea"/>
+              </a:rPr>
+              <a:t>Schema</a:t>
+            </a:r>
+            <a:r>
+              <a:rPr lang="zh-CN" altLang="en-US" kern="100" dirty="0">
+                <a:solidFill>
+                  <a:srgbClr val="103380"/>
+                </a:solidFill>
+                <a:uFillTx/>
+                <a:latin typeface="微软雅黑" panose="020B0503020204020204" pitchFamily="34" charset="-122"/>
+                <a:ea typeface="微软雅黑" panose="020B0503020204020204" pitchFamily="34" charset="-122"/>
+                <a:sym typeface="+mn-ea"/>
+              </a:rPr>
+              <a:t>　</a:t>
+            </a:r>
+            <a:r>
+              <a:rPr lang="en-US" altLang="zh-CN" kern="100" dirty="0">
+                <a:solidFill>
+                  <a:srgbClr val="103380"/>
+                </a:solidFill>
+                <a:uFillTx/>
+                <a:latin typeface="微软雅黑" panose="020B0503020204020204" pitchFamily="34" charset="-122"/>
+                <a:ea typeface="微软雅黑" panose="020B0503020204020204" pitchFamily="34" charset="-122"/>
+                <a:sym typeface="+mn-ea"/>
+              </a:rPr>
+              <a:t>Linking </a:t>
+            </a:r>
+            <a:r>
+              <a:rPr lang="zh-CN" altLang="en-US" kern="100" dirty="0">
+                <a:solidFill>
+                  <a:srgbClr val="103380"/>
+                </a:solidFill>
+                <a:uFillTx/>
+                <a:latin typeface="微软雅黑" panose="020B0503020204020204" pitchFamily="34" charset="-122"/>
+                <a:ea typeface="微软雅黑" panose="020B0503020204020204" pitchFamily="34" charset="-122"/>
+                <a:sym typeface="+mn-ea"/>
+              </a:rPr>
+              <a:t>方案、要素识别模型、</a:t>
+            </a:r>
+            <a:r>
+              <a:rPr lang="en-US" altLang="zh-CN" kern="100" dirty="0">
+                <a:solidFill>
+                  <a:srgbClr val="103380"/>
+                </a:solidFill>
+                <a:uFillTx/>
+                <a:latin typeface="微软雅黑" panose="020B0503020204020204" pitchFamily="34" charset="-122"/>
+                <a:ea typeface="微软雅黑" panose="020B0503020204020204" pitchFamily="34" charset="-122"/>
+                <a:sym typeface="+mn-ea"/>
+              </a:rPr>
+              <a:t>SQL </a:t>
+            </a:r>
+            <a:r>
+              <a:rPr lang="zh-CN" altLang="en-US" kern="100" dirty="0">
+                <a:solidFill>
+                  <a:srgbClr val="103380"/>
+                </a:solidFill>
+                <a:uFillTx/>
+                <a:latin typeface="微软雅黑" panose="020B0503020204020204" pitchFamily="34" charset="-122"/>
+                <a:ea typeface="微软雅黑" panose="020B0503020204020204" pitchFamily="34" charset="-122"/>
+                <a:sym typeface="+mn-ea"/>
+              </a:rPr>
+              <a:t>生成与校验机制）</a:t>
+            </a:r>
+            <a:endParaRPr lang="zh-CN" altLang="en-US" kern="100" dirty="0">
+              <a:solidFill>
+                <a:srgbClr val="103380"/>
+              </a:solidFill>
+              <a:uFillTx/>
+              <a:latin typeface="微软雅黑" panose="020B0503020204020204" pitchFamily="34" charset="-122"/>
+              <a:ea typeface="微软雅黑" panose="020B0503020204020204" pitchFamily="34" charset="-122"/>
+              <a:sym typeface="+mn-ea"/>
+            </a:endParaRPr>
+          </a:p>
+          <a:p>
+            <a:pPr marL="342900" indent="-342900" algn="l" fontAlgn="auto">
+              <a:lnSpc>
+                <a:spcPct val="125000"/>
+              </a:lnSpc>
+              <a:spcBef>
+                <a:spcPts val="0"/>
+              </a:spcBef>
+              <a:spcAft>
+                <a:spcPts val="0"/>
+              </a:spcAft>
+              <a:buClrTx/>
+              <a:buSzTx/>
+              <a:buFont typeface="Wingdings" panose="05000000000000000000" charset="0"/>
+              <a:buChar char="l"/>
+            </a:pPr>
+            <a:r>
+              <a:rPr lang="en-US" altLang="zh-CN" kern="100" dirty="0">
+                <a:solidFill>
+                  <a:srgbClr val="103380"/>
+                </a:solidFill>
+                <a:uFillTx/>
+                <a:latin typeface="微软雅黑" panose="020B0503020204020204" pitchFamily="34" charset="-122"/>
+                <a:ea typeface="微软雅黑" panose="020B0503020204020204" pitchFamily="34" charset="-122"/>
+                <a:sym typeface="+mn-ea"/>
+              </a:rPr>
+              <a:t>RAG </a:t>
+            </a:r>
+            <a:r>
+              <a:rPr lang="zh-CN" altLang="en-US" kern="100" dirty="0">
+                <a:solidFill>
+                  <a:srgbClr val="103380"/>
+                </a:solidFill>
+                <a:uFillTx/>
+                <a:latin typeface="微软雅黑" panose="020B0503020204020204" pitchFamily="34" charset="-122"/>
+                <a:ea typeface="微软雅黑" panose="020B0503020204020204" pitchFamily="34" charset="-122"/>
+                <a:sym typeface="+mn-ea"/>
+              </a:rPr>
+              <a:t>问答模块技术实现（包含文档解析与切片策略、向量检索方案、生成融合机制）</a:t>
+            </a:r>
+            <a:endParaRPr lang="zh-CN" altLang="en-US" kern="100" dirty="0">
+              <a:solidFill>
+                <a:srgbClr val="103380"/>
+              </a:solidFill>
+              <a:uFillTx/>
+              <a:latin typeface="微软雅黑" panose="020B0503020204020204" pitchFamily="34" charset="-122"/>
+              <a:ea typeface="微软雅黑" panose="020B0503020204020204" pitchFamily="34" charset="-122"/>
+              <a:sym typeface="+mn-ea"/>
+            </a:endParaRPr>
+          </a:p>
+          <a:p>
+            <a:pPr marL="342900" indent="-342900" algn="l" fontAlgn="auto">
+              <a:lnSpc>
+                <a:spcPct val="125000"/>
+              </a:lnSpc>
+              <a:spcBef>
+                <a:spcPts val="0"/>
+              </a:spcBef>
+              <a:spcAft>
+                <a:spcPts val="0"/>
+              </a:spcAft>
+              <a:buClrTx/>
+              <a:buSzTx/>
+              <a:buFont typeface="Wingdings" panose="05000000000000000000" charset="0"/>
+              <a:buChar char="l"/>
+            </a:pPr>
+            <a:r>
+              <a:rPr lang="zh-CN" altLang="en-US" kern="100" dirty="0">
+                <a:solidFill>
+                  <a:srgbClr val="103380"/>
+                </a:solidFill>
+                <a:uFillTx/>
+                <a:latin typeface="微软雅黑" panose="020B0503020204020204" pitchFamily="34" charset="-122"/>
+                <a:ea typeface="微软雅黑" panose="020B0503020204020204" pitchFamily="34" charset="-122"/>
+                <a:sym typeface="+mn-ea"/>
+              </a:rPr>
+              <a:t>多源异构数据融合推理策略</a:t>
+            </a:r>
+            <a:r>
+              <a:rPr lang="zh-CN" altLang="en-US" kern="100" dirty="0">
+                <a:solidFill>
+                  <a:srgbClr val="103380"/>
+                </a:solidFill>
+                <a:highlight>
+                  <a:srgbClr val="FFFF00"/>
+                </a:highlight>
+                <a:uFillTx/>
+                <a:latin typeface="微软雅黑" panose="020B0503020204020204" pitchFamily="34" charset="-122"/>
+                <a:ea typeface="微软雅黑" panose="020B0503020204020204" pitchFamily="34" charset="-122"/>
+                <a:sym typeface="+mn-ea"/>
+              </a:rPr>
+              <a:t>（结构化数据库与非结构化知识库的协同查询与结果整合）</a:t>
+            </a:r>
+            <a:r>
+              <a:rPr lang="zh-CN" altLang="en-US" kern="100" dirty="0">
+                <a:solidFill>
+                  <a:srgbClr val="C00000"/>
+                </a:solidFill>
+                <a:highlight>
+                  <a:srgbClr val="FFFF00"/>
+                </a:highlight>
+                <a:uFillTx/>
+                <a:latin typeface="微软雅黑" panose="020B0503020204020204" pitchFamily="34" charset="-122"/>
+                <a:ea typeface="微软雅黑" panose="020B0503020204020204" pitchFamily="34" charset="-122"/>
+                <a:sym typeface="+mn-ea"/>
+              </a:rPr>
+              <a:t>（跨源要做好）</a:t>
+            </a:r>
+            <a:endParaRPr lang="zh-CN" altLang="en-US" kern="100" dirty="0">
+              <a:solidFill>
+                <a:srgbClr val="103380"/>
+              </a:solidFill>
+              <a:uFillTx/>
+              <a:latin typeface="微软雅黑" panose="020B0503020204020204" pitchFamily="34" charset="-122"/>
+              <a:ea typeface="微软雅黑" panose="020B0503020204020204" pitchFamily="34" charset="-122"/>
+              <a:sym typeface="+mn-ea"/>
+            </a:endParaRPr>
+          </a:p>
+          <a:p>
+            <a:pPr marL="342900" indent="-342900" algn="l" fontAlgn="auto">
+              <a:lnSpc>
+                <a:spcPct val="125000"/>
+              </a:lnSpc>
+              <a:spcBef>
+                <a:spcPts val="0"/>
+              </a:spcBef>
+              <a:spcAft>
+                <a:spcPts val="0"/>
+              </a:spcAft>
+              <a:buClrTx/>
+              <a:buSzTx/>
+              <a:buFont typeface="Wingdings" panose="05000000000000000000" charset="0"/>
+              <a:buChar char="l"/>
+            </a:pPr>
+            <a:r>
+              <a:rPr lang="zh-CN" altLang="en-US" kern="100" dirty="0">
+                <a:solidFill>
+                  <a:srgbClr val="103380"/>
+                </a:solidFill>
+                <a:highlight>
+                  <a:srgbClr val="FFFF00"/>
+                </a:highlight>
+                <a:uFillTx/>
+                <a:latin typeface="微软雅黑" panose="020B0503020204020204" pitchFamily="34" charset="-122"/>
+                <a:ea typeface="微软雅黑" panose="020B0503020204020204" pitchFamily="34" charset="-122"/>
+                <a:sym typeface="+mn-ea"/>
+              </a:rPr>
+              <a:t>可解释性实现方案（包含推理链路追踪、数据来源标注、工具调用链可视化）</a:t>
+            </a:r>
+            <a:r>
+              <a:rPr lang="zh-CN" altLang="en-US" kern="100" dirty="0">
+                <a:solidFill>
+                  <a:srgbClr val="C00000"/>
+                </a:solidFill>
+                <a:highlight>
+                  <a:srgbClr val="FFFF00"/>
+                </a:highlight>
+                <a:uFillTx/>
+                <a:latin typeface="微软雅黑" panose="020B0503020204020204" pitchFamily="34" charset="-122"/>
+                <a:ea typeface="微软雅黑" panose="020B0503020204020204" pitchFamily="34" charset="-122"/>
+                <a:sym typeface="+mn-ea"/>
+              </a:rPr>
+              <a:t>（展示链路优化）</a:t>
+            </a:r>
+            <a:endParaRPr lang="zh-CN" altLang="en-US" kern="100" dirty="0">
+              <a:solidFill>
+                <a:srgbClr val="103380"/>
+              </a:solidFill>
+              <a:highlight>
+                <a:srgbClr val="FFFF00"/>
+              </a:highlight>
+              <a:uFillTx/>
+              <a:latin typeface="微软雅黑" panose="020B0503020204020204" pitchFamily="34" charset="-122"/>
+              <a:ea typeface="微软雅黑" panose="020B0503020204020204" pitchFamily="34" charset="-122"/>
+              <a:sym typeface="+mn-ea"/>
+            </a:endParaRPr>
+          </a:p>
+          <a:p>
+            <a:pPr marL="342900" indent="-342900" algn="l" fontAlgn="auto">
+              <a:lnSpc>
+                <a:spcPct val="125000"/>
+              </a:lnSpc>
+              <a:spcBef>
+                <a:spcPts val="0"/>
+              </a:spcBef>
+              <a:spcAft>
+                <a:spcPts val="0"/>
+              </a:spcAft>
+              <a:buClrTx/>
+              <a:buSzTx/>
+              <a:buFont typeface="Wingdings" panose="05000000000000000000" charset="0"/>
+              <a:buChar char="l"/>
+            </a:pPr>
+            <a:r>
+              <a:rPr lang="zh-CN" altLang="en-US" kern="100" dirty="0">
+                <a:solidFill>
+                  <a:srgbClr val="103380"/>
+                </a:solidFill>
+                <a:uFillTx/>
+                <a:latin typeface="微软雅黑" panose="020B0503020204020204" pitchFamily="34" charset="-122"/>
+                <a:ea typeface="微软雅黑" panose="020B0503020204020204" pitchFamily="34" charset="-122"/>
+                <a:sym typeface="+mn-ea"/>
+              </a:rPr>
+              <a:t>中级任务攻克方案详述</a:t>
+            </a:r>
+            <a:endParaRPr lang="zh-CN" altLang="en-US" kern="100" dirty="0">
+              <a:solidFill>
+                <a:srgbClr val="103380"/>
+              </a:solidFill>
+              <a:uFillTx/>
+              <a:latin typeface="微软雅黑" panose="020B0503020204020204" pitchFamily="34" charset="-122"/>
+              <a:ea typeface="微软雅黑" panose="020B0503020204020204" pitchFamily="34" charset="-122"/>
+              <a:sym typeface="+mn-ea"/>
+            </a:endParaRPr>
+          </a:p>
+          <a:p>
+            <a:pPr marL="342900" indent="-342900" algn="l" fontAlgn="auto">
+              <a:lnSpc>
+                <a:spcPct val="125000"/>
+              </a:lnSpc>
+              <a:spcBef>
+                <a:spcPts val="0"/>
+              </a:spcBef>
+              <a:spcAft>
+                <a:spcPts val="0"/>
+              </a:spcAft>
+              <a:buClrTx/>
+              <a:buSzTx/>
+              <a:buFont typeface="Wingdings" panose="05000000000000000000" charset="0"/>
+              <a:buChar char="l"/>
+            </a:pPr>
+            <a:r>
+              <a:rPr lang="zh-CN" altLang="en-US" kern="100" dirty="0">
+                <a:solidFill>
+                  <a:srgbClr val="103380"/>
+                </a:solidFill>
+                <a:uFillTx/>
+                <a:latin typeface="微软雅黑" panose="020B0503020204020204" pitchFamily="34" charset="-122"/>
+                <a:ea typeface="微软雅黑" panose="020B0503020204020204" pitchFamily="34" charset="-122"/>
+                <a:sym typeface="+mn-ea"/>
+              </a:rPr>
+              <a:t>系统测试与性能评估（包含测试数据集说明、评估指标定义、测试结果及分析）</a:t>
+            </a:r>
+            <a:endParaRPr lang="en-US" altLang="zh-CN" sz="2400" b="1" kern="100" dirty="0">
+              <a:solidFill>
+                <a:srgbClr val="103380"/>
+              </a:solidFill>
+              <a:uFillTx/>
+              <a:latin typeface="微软雅黑" panose="020B0503020204020204" pitchFamily="34" charset="-122"/>
+              <a:ea typeface="微软雅黑" panose="020B0503020204020204" pitchFamily="34" charset="-122"/>
+              <a:sym typeface="+mn-ea"/>
+            </a:endParaRPr>
+          </a:p>
+          <a:p>
+            <a:pPr indent="0" algn="l" fontAlgn="auto">
+              <a:lnSpc>
+                <a:spcPct val="125000"/>
+              </a:lnSpc>
+              <a:spcBef>
+                <a:spcPts val="0"/>
+              </a:spcBef>
+              <a:spcAft>
+                <a:spcPts val="0"/>
+              </a:spcAft>
+              <a:buClrTx/>
+              <a:buSzTx/>
+              <a:buFont typeface="Wingdings" panose="05000000000000000000" charset="0"/>
+              <a:buNone/>
+            </a:pPr>
+            <a:endParaRPr lang="en-US" altLang="zh-CN" sz="2000" b="1" kern="100" dirty="0">
+              <a:solidFill>
+                <a:srgbClr val="103380"/>
+              </a:solidFill>
+              <a:uFillTx/>
+              <a:latin typeface="微软雅黑" panose="020B0503020204020204" pitchFamily="34" charset="-122"/>
+              <a:ea typeface="微软雅黑" panose="020B0503020204020204" pitchFamily="34" charset="-122"/>
+              <a:sym typeface="+mn-ea"/>
+            </a:endParaRPr>
+          </a:p>
+          <a:p>
+            <a:pPr indent="0" algn="l" fontAlgn="auto">
+              <a:lnSpc>
+                <a:spcPct val="125000"/>
+              </a:lnSpc>
+              <a:spcBef>
+                <a:spcPts val="0"/>
+              </a:spcBef>
+              <a:spcAft>
+                <a:spcPts val="0"/>
+              </a:spcAft>
+              <a:buClrTx/>
+              <a:buSzTx/>
+              <a:buFont typeface="Arial" panose="020B0604020202020204" pitchFamily="34" charset="0"/>
+              <a:buNone/>
+            </a:pPr>
+            <a:endParaRPr lang="en-US" altLang="zh-CN" sz="2000" b="1" kern="100" dirty="0">
+              <a:solidFill>
+                <a:srgbClr val="103380"/>
+              </a:solidFill>
+              <a:uFillTx/>
+              <a:latin typeface="微软雅黑" panose="020B0503020204020204" pitchFamily="34" charset="-122"/>
+              <a:ea typeface="微软雅黑" panose="020B0503020204020204" pitchFamily="34" charset="-122"/>
+              <a:sym typeface="+mn-ea"/>
+            </a:endParaRPr>
+          </a:p>
+        </p:txBody>
+      </p:sp>
+    </p:spTree>
+  </p:cSld>
+  <p:clrMapOvr>
+    <a:masterClrMapping/>
+  </p:clrMapOvr>
+</p:sld>
+</file>
+
+<file path=ppt/slides/slide16.xml><?xml version="1.0" encoding="utf-8"?>
+<p:sld xmlns:a="http://schemas.openxmlformats.org/drawingml/2006/main" xmlns:r="http://schemas.openxmlformats.org/officeDocument/2006/relationships" xmlns:p="http://schemas.openxmlformats.org/presentationml/2006/main">
+  <p:cSld>
+    <p:spTree>
+      <p:nvGrpSpPr>
+        <p:cNvPr id="1" name=""/>
+        <p:cNvGrpSpPr/>
+        <p:nvPr/>
+      </p:nvGrpSpPr>
+      <p:grpSpPr/>
+      <p:sp>
+        <p:nvSpPr>
+          <p:cNvPr id="2" name="Title 1"/>
+          <p:cNvSpPr>
+            <a:spLocks noGrp="1"/>
+          </p:cNvSpPr>
+          <p:nvPr>
+            <p:ph type="title"/>
+          </p:nvPr>
+        </p:nvSpPr>
+        <p:spPr/>
+        <p:txBody>
+          <a:bodyPr/>
+          <a:p>
+            <a:r>
+              <a:t>初赛</a:t>
+            </a:r>
+            <a:r>
+              <a:t>提交</a:t>
+            </a:r>
+          </a:p>
+        </p:txBody>
+      </p:sp>
+      <p:sp>
+        <p:nvSpPr>
+          <p:cNvPr id="6" name="Text Box 3"/>
+          <p:cNvSpPr txBox="1"/>
+          <p:nvPr/>
+        </p:nvSpPr>
+        <p:spPr>
+          <a:xfrm>
+            <a:off x="200660" y="1043305"/>
+            <a:ext cx="9161145" cy="3253740"/>
+          </a:xfrm>
+          <a:prstGeom prst="rect">
+            <a:avLst/>
+          </a:prstGeom>
+          <a:noFill/>
+        </p:spPr>
+        <p:txBody>
+          <a:bodyPr wrap="square" rtlCol="0">
+            <a:noAutofit/>
+          </a:bodyPr>
+          <a:p>
+            <a:pPr indent="0" algn="l" fontAlgn="auto">
+              <a:lnSpc>
+                <a:spcPct val="125000"/>
+              </a:lnSpc>
+              <a:spcBef>
+                <a:spcPts val="0"/>
+              </a:spcBef>
+              <a:spcAft>
+                <a:spcPts val="0"/>
+              </a:spcAft>
+              <a:buClrTx/>
+              <a:buSzTx/>
+              <a:buFont typeface="Wingdings" panose="05000000000000000000" charset="0"/>
+              <a:buNone/>
+            </a:pPr>
+            <a:r>
+              <a:rPr lang="zh-CN" altLang="en-US" sz="2000" kern="100" dirty="0">
+                <a:solidFill>
+                  <a:srgbClr val="103380"/>
+                </a:solidFill>
+                <a:uFillTx/>
+                <a:latin typeface="微软雅黑" panose="020B0503020204020204" pitchFamily="34" charset="-122"/>
+                <a:ea typeface="微软雅黑" panose="020B0503020204020204" pitchFamily="34" charset="-122"/>
+                <a:sym typeface="+mn-ea"/>
+              </a:rPr>
+              <a:t>（3）技术数据:作品原始文件（</a:t>
+            </a:r>
+            <a:r>
+              <a:rPr lang="en-US" altLang="zh-CN" sz="2000" kern="100" dirty="0">
+                <a:solidFill>
+                  <a:srgbClr val="103380"/>
+                </a:solidFill>
+                <a:uFillTx/>
+                <a:latin typeface="微软雅黑" panose="020B0503020204020204" pitchFamily="34" charset="-122"/>
+                <a:ea typeface="微软雅黑" panose="020B0503020204020204" pitchFamily="34" charset="-122"/>
+                <a:sym typeface="+mn-ea"/>
+              </a:rPr>
+              <a:t>ZIP </a:t>
+            </a:r>
+            <a:r>
+              <a:rPr lang="zh-CN" altLang="en-US" sz="2000" kern="100" dirty="0">
+                <a:solidFill>
+                  <a:srgbClr val="103380"/>
+                </a:solidFill>
+                <a:uFillTx/>
+                <a:latin typeface="微软雅黑" panose="020B0503020204020204" pitchFamily="34" charset="-122"/>
+                <a:ea typeface="微软雅黑" panose="020B0503020204020204" pitchFamily="34" charset="-122"/>
+                <a:sym typeface="+mn-ea"/>
+              </a:rPr>
+              <a:t>数据包），应包含：</a:t>
+            </a:r>
+            <a:endParaRPr lang="zh-CN" altLang="en-US" sz="2000" kern="100" dirty="0">
+              <a:solidFill>
+                <a:srgbClr val="103380"/>
+              </a:solidFill>
+              <a:uFillTx/>
+              <a:latin typeface="微软雅黑" panose="020B0503020204020204" pitchFamily="34" charset="-122"/>
+              <a:ea typeface="微软雅黑" panose="020B0503020204020204" pitchFamily="34" charset="-122"/>
+              <a:sym typeface="+mn-ea"/>
+            </a:endParaRPr>
+          </a:p>
+          <a:p>
+            <a:pPr indent="0" algn="l" fontAlgn="auto">
+              <a:lnSpc>
+                <a:spcPct val="125000"/>
+              </a:lnSpc>
+              <a:spcBef>
+                <a:spcPts val="0"/>
+              </a:spcBef>
+              <a:spcAft>
+                <a:spcPts val="0"/>
+              </a:spcAft>
+              <a:buClrTx/>
+              <a:buSzTx/>
+              <a:buFont typeface="Wingdings" panose="05000000000000000000" charset="0"/>
+              <a:buNone/>
+            </a:pPr>
+            <a:r>
+              <a:rPr lang="en-US" altLang="en-US" sz="2000" kern="100" dirty="0">
+                <a:solidFill>
+                  <a:srgbClr val="103380"/>
+                </a:solidFill>
+                <a:uFillTx/>
+                <a:latin typeface="微软雅黑" panose="020B0503020204020204" pitchFamily="34" charset="-122"/>
+                <a:ea typeface="微软雅黑" panose="020B0503020204020204" pitchFamily="34" charset="-122"/>
+                <a:sym typeface="+mn-ea"/>
+              </a:rPr>
+              <a:t> </a:t>
+            </a:r>
+            <a:r>
+              <a:rPr lang="zh-CN" altLang="en-US" sz="2000" kern="100" dirty="0">
+                <a:solidFill>
+                  <a:srgbClr val="103380"/>
+                </a:solidFill>
+                <a:uFillTx/>
+                <a:latin typeface="微软雅黑" panose="020B0503020204020204" pitchFamily="34" charset="-122"/>
+                <a:ea typeface="微软雅黑" panose="020B0503020204020204" pitchFamily="34" charset="-122"/>
+                <a:sym typeface="+mn-ea"/>
+              </a:rPr>
+              <a:t>完整项目源代码（需包含清晰的目录结构说明和 </a:t>
+            </a:r>
+            <a:r>
+              <a:rPr lang="en-US" altLang="zh-CN" sz="2000" kern="100" dirty="0">
+                <a:solidFill>
+                  <a:srgbClr val="103380"/>
+                </a:solidFill>
+                <a:uFillTx/>
+                <a:latin typeface="微软雅黑" panose="020B0503020204020204" pitchFamily="34" charset="-122"/>
+                <a:ea typeface="微软雅黑" panose="020B0503020204020204" pitchFamily="34" charset="-122"/>
+                <a:sym typeface="+mn-ea"/>
+              </a:rPr>
+              <a:t>README </a:t>
+            </a:r>
+            <a:r>
+              <a:rPr lang="zh-CN" altLang="en-US" sz="2000" kern="100" dirty="0">
+                <a:solidFill>
+                  <a:srgbClr val="103380"/>
+                </a:solidFill>
+                <a:uFillTx/>
+                <a:latin typeface="微软雅黑" panose="020B0503020204020204" pitchFamily="34" charset="-122"/>
+                <a:ea typeface="微软雅黑" panose="020B0503020204020204" pitchFamily="34" charset="-122"/>
+                <a:sym typeface="+mn-ea"/>
+              </a:rPr>
+              <a:t>文件）</a:t>
+            </a:r>
+            <a:endParaRPr lang="zh-CN" altLang="en-US" sz="2000" kern="100" dirty="0">
+              <a:solidFill>
+                <a:srgbClr val="103380"/>
+              </a:solidFill>
+              <a:uFillTx/>
+              <a:latin typeface="微软雅黑" panose="020B0503020204020204" pitchFamily="34" charset="-122"/>
+              <a:ea typeface="微软雅黑" panose="020B0503020204020204" pitchFamily="34" charset="-122"/>
+              <a:sym typeface="+mn-ea"/>
+            </a:endParaRPr>
+          </a:p>
+          <a:p>
+            <a:pPr indent="0" algn="l" fontAlgn="auto">
+              <a:lnSpc>
+                <a:spcPct val="125000"/>
+              </a:lnSpc>
+              <a:spcBef>
+                <a:spcPts val="0"/>
+              </a:spcBef>
+              <a:spcAft>
+                <a:spcPts val="0"/>
+              </a:spcAft>
+              <a:buClrTx/>
+              <a:buSzTx/>
+              <a:buFont typeface="Wingdings" panose="05000000000000000000" charset="0"/>
+              <a:buNone/>
+            </a:pPr>
+            <a:r>
+              <a:rPr lang="en-US" altLang="en-US" sz="2000" kern="100" dirty="0">
+                <a:solidFill>
+                  <a:srgbClr val="103380"/>
+                </a:solidFill>
+                <a:uFillTx/>
+                <a:latin typeface="微软雅黑" panose="020B0503020204020204" pitchFamily="34" charset="-122"/>
+                <a:ea typeface="微软雅黑" panose="020B0503020204020204" pitchFamily="34" charset="-122"/>
+                <a:sym typeface="+mn-ea"/>
+              </a:rPr>
+              <a:t></a:t>
+            </a:r>
+            <a:r>
+              <a:rPr lang="en-US" altLang="en-US" sz="2000" kern="100" dirty="0">
+                <a:solidFill>
+                  <a:srgbClr val="103380"/>
+                </a:solidFill>
+                <a:highlight>
+                  <a:srgbClr val="FFFF00"/>
+                </a:highlight>
+                <a:uFillTx/>
+                <a:latin typeface="微软雅黑" panose="020B0503020204020204" pitchFamily="34" charset="-122"/>
+                <a:ea typeface="微软雅黑" panose="020B0503020204020204" pitchFamily="34" charset="-122"/>
+                <a:sym typeface="+mn-ea"/>
+              </a:rPr>
+              <a:t> </a:t>
+            </a:r>
+            <a:r>
+              <a:rPr lang="zh-CN" altLang="en-US" sz="2000" kern="100" dirty="0">
+                <a:solidFill>
+                  <a:srgbClr val="103380"/>
+                </a:solidFill>
+                <a:highlight>
+                  <a:srgbClr val="FFFF00"/>
+                </a:highlight>
+                <a:uFillTx/>
+                <a:latin typeface="微软雅黑" panose="020B0503020204020204" pitchFamily="34" charset="-122"/>
+                <a:ea typeface="微软雅黑" panose="020B0503020204020204" pitchFamily="34" charset="-122"/>
+                <a:sym typeface="+mn-ea"/>
+              </a:rPr>
+              <a:t>数据库 </a:t>
+            </a:r>
+            <a:r>
+              <a:rPr lang="en-US" altLang="zh-CN" sz="2000" kern="100" dirty="0">
+                <a:solidFill>
+                  <a:srgbClr val="103380"/>
+                </a:solidFill>
+                <a:highlight>
+                  <a:srgbClr val="FFFF00"/>
+                </a:highlight>
+                <a:uFillTx/>
+                <a:latin typeface="微软雅黑" panose="020B0503020204020204" pitchFamily="34" charset="-122"/>
+                <a:ea typeface="微软雅黑" panose="020B0503020204020204" pitchFamily="34" charset="-122"/>
+                <a:sym typeface="+mn-ea"/>
+              </a:rPr>
+              <a:t>schema </a:t>
+            </a:r>
+            <a:r>
+              <a:rPr lang="zh-CN" altLang="en-US" sz="2000" kern="100" dirty="0">
+                <a:solidFill>
+                  <a:srgbClr val="103380"/>
+                </a:solidFill>
+                <a:highlight>
+                  <a:srgbClr val="FFFF00"/>
+                </a:highlight>
+                <a:uFillTx/>
+                <a:latin typeface="微软雅黑" panose="020B0503020204020204" pitchFamily="34" charset="-122"/>
+                <a:ea typeface="微软雅黑" panose="020B0503020204020204" pitchFamily="34" charset="-122"/>
+                <a:sym typeface="+mn-ea"/>
+              </a:rPr>
+              <a:t>定义文件</a:t>
+            </a:r>
+            <a:r>
+              <a:rPr lang="zh-CN" altLang="en-US" sz="2000" kern="100" dirty="0">
+                <a:solidFill>
+                  <a:srgbClr val="C00000"/>
+                </a:solidFill>
+                <a:highlight>
+                  <a:srgbClr val="FFFF00"/>
+                </a:highlight>
+                <a:uFillTx/>
+                <a:latin typeface="微软雅黑" panose="020B0503020204020204" pitchFamily="34" charset="-122"/>
+                <a:ea typeface="微软雅黑" panose="020B0503020204020204" pitchFamily="34" charset="-122"/>
+                <a:sym typeface="+mn-ea"/>
+              </a:rPr>
+              <a:t>（喜）</a:t>
+            </a:r>
+            <a:endParaRPr lang="zh-CN" altLang="en-US" sz="2000" kern="100" dirty="0">
+              <a:solidFill>
+                <a:srgbClr val="103380"/>
+              </a:solidFill>
+              <a:uFillTx/>
+              <a:latin typeface="微软雅黑" panose="020B0503020204020204" pitchFamily="34" charset="-122"/>
+              <a:ea typeface="微软雅黑" panose="020B0503020204020204" pitchFamily="34" charset="-122"/>
+              <a:sym typeface="+mn-ea"/>
+            </a:endParaRPr>
+          </a:p>
+          <a:p>
+            <a:pPr indent="0" algn="l" fontAlgn="auto">
+              <a:lnSpc>
+                <a:spcPct val="125000"/>
+              </a:lnSpc>
+              <a:spcBef>
+                <a:spcPts val="0"/>
+              </a:spcBef>
+              <a:spcAft>
+                <a:spcPts val="0"/>
+              </a:spcAft>
+              <a:buClrTx/>
+              <a:buSzTx/>
+              <a:buFont typeface="Wingdings" panose="05000000000000000000" charset="0"/>
+              <a:buNone/>
+            </a:pPr>
+            <a:r>
+              <a:rPr lang="en-US" altLang="en-US" sz="2000" kern="100" dirty="0">
+                <a:solidFill>
+                  <a:srgbClr val="103380"/>
+                </a:solidFill>
+                <a:uFillTx/>
+                <a:latin typeface="微软雅黑" panose="020B0503020204020204" pitchFamily="34" charset="-122"/>
+                <a:ea typeface="微软雅黑" panose="020B0503020204020204" pitchFamily="34" charset="-122"/>
+                <a:sym typeface="+mn-ea"/>
+              </a:rPr>
+              <a:t> </a:t>
+            </a:r>
+            <a:r>
+              <a:rPr lang="zh-CN" altLang="en-US" sz="2000" kern="100" dirty="0">
+                <a:solidFill>
+                  <a:srgbClr val="103380"/>
+                </a:solidFill>
+                <a:uFillTx/>
+                <a:latin typeface="微软雅黑" panose="020B0503020204020204" pitchFamily="34" charset="-122"/>
+                <a:ea typeface="微软雅黑" panose="020B0503020204020204" pitchFamily="34" charset="-122"/>
+                <a:sym typeface="+mn-ea"/>
+              </a:rPr>
+              <a:t>知识库文档样本（不少于 10 份，涵盖不同类型文档格式）</a:t>
+            </a:r>
+            <a:endParaRPr lang="zh-CN" altLang="en-US" sz="2000" kern="100" dirty="0">
+              <a:solidFill>
+                <a:srgbClr val="103380"/>
+              </a:solidFill>
+              <a:uFillTx/>
+              <a:latin typeface="微软雅黑" panose="020B0503020204020204" pitchFamily="34" charset="-122"/>
+              <a:ea typeface="微软雅黑" panose="020B0503020204020204" pitchFamily="34" charset="-122"/>
+              <a:sym typeface="+mn-ea"/>
+            </a:endParaRPr>
+          </a:p>
+          <a:p>
+            <a:pPr indent="0" algn="l" fontAlgn="auto">
+              <a:lnSpc>
+                <a:spcPct val="125000"/>
+              </a:lnSpc>
+              <a:spcBef>
+                <a:spcPts val="0"/>
+              </a:spcBef>
+              <a:spcAft>
+                <a:spcPts val="0"/>
+              </a:spcAft>
+              <a:buClrTx/>
+              <a:buSzTx/>
+              <a:buFont typeface="Wingdings" panose="05000000000000000000" charset="0"/>
+              <a:buNone/>
+            </a:pPr>
+            <a:r>
+              <a:rPr lang="en-US" altLang="en-US" sz="2000" kern="100" dirty="0">
+                <a:solidFill>
+                  <a:srgbClr val="103380"/>
+                </a:solidFill>
+                <a:uFillTx/>
+                <a:latin typeface="微软雅黑" panose="020B0503020204020204" pitchFamily="34" charset="-122"/>
+                <a:ea typeface="微软雅黑" panose="020B0503020204020204" pitchFamily="34" charset="-122"/>
+                <a:sym typeface="+mn-ea"/>
+              </a:rPr>
+              <a:t> </a:t>
+            </a:r>
+            <a:r>
+              <a:rPr lang="zh-CN" altLang="en-US" sz="2000" kern="100" dirty="0">
+                <a:solidFill>
+                  <a:srgbClr val="103380"/>
+                </a:solidFill>
+                <a:uFillTx/>
+                <a:latin typeface="微软雅黑" panose="020B0503020204020204" pitchFamily="34" charset="-122"/>
+                <a:ea typeface="微软雅黑" panose="020B0503020204020204" pitchFamily="34" charset="-122"/>
+                <a:sym typeface="+mn-ea"/>
+              </a:rPr>
+              <a:t>模型权重文件（若适用）</a:t>
+            </a:r>
+            <a:endParaRPr lang="zh-CN" altLang="en-US" sz="2000" kern="100" dirty="0">
+              <a:solidFill>
+                <a:srgbClr val="103380"/>
+              </a:solidFill>
+              <a:uFillTx/>
+              <a:latin typeface="微软雅黑" panose="020B0503020204020204" pitchFamily="34" charset="-122"/>
+              <a:ea typeface="微软雅黑" panose="020B0503020204020204" pitchFamily="34" charset="-122"/>
+              <a:sym typeface="+mn-ea"/>
+            </a:endParaRPr>
+          </a:p>
+          <a:p>
+            <a:pPr indent="0" algn="l" fontAlgn="auto">
+              <a:lnSpc>
+                <a:spcPct val="125000"/>
+              </a:lnSpc>
+              <a:spcBef>
+                <a:spcPts val="0"/>
+              </a:spcBef>
+              <a:spcAft>
+                <a:spcPts val="0"/>
+              </a:spcAft>
+              <a:buClrTx/>
+              <a:buSzTx/>
+              <a:buFont typeface="Wingdings" panose="05000000000000000000" charset="0"/>
+              <a:buNone/>
+            </a:pPr>
+            <a:r>
+              <a:rPr lang="en-US" altLang="en-US" sz="2000" kern="100" dirty="0">
+                <a:solidFill>
+                  <a:srgbClr val="103380"/>
+                </a:solidFill>
+                <a:uFillTx/>
+                <a:latin typeface="微软雅黑" panose="020B0503020204020204" pitchFamily="34" charset="-122"/>
+                <a:ea typeface="微软雅黑" panose="020B0503020204020204" pitchFamily="34" charset="-122"/>
+                <a:sym typeface="+mn-ea"/>
+              </a:rPr>
+              <a:t> </a:t>
+            </a:r>
+            <a:r>
+              <a:rPr lang="zh-CN" altLang="en-US" sz="2000" kern="100" dirty="0">
+                <a:solidFill>
+                  <a:srgbClr val="103380"/>
+                </a:solidFill>
+                <a:uFillTx/>
+                <a:latin typeface="微软雅黑" panose="020B0503020204020204" pitchFamily="34" charset="-122"/>
+                <a:ea typeface="微软雅黑" panose="020B0503020204020204" pitchFamily="34" charset="-122"/>
+                <a:sym typeface="+mn-ea"/>
+              </a:rPr>
+              <a:t>运行环境配置说明（包括依赖包列表及版本号）</a:t>
+            </a:r>
+            <a:endParaRPr lang="zh-CN" altLang="en-US" sz="2000" kern="100" dirty="0">
+              <a:solidFill>
+                <a:srgbClr val="103380"/>
+              </a:solidFill>
+              <a:uFillTx/>
+              <a:latin typeface="微软雅黑" panose="020B0503020204020204" pitchFamily="34" charset="-122"/>
+              <a:ea typeface="微软雅黑" panose="020B0503020204020204" pitchFamily="34" charset="-122"/>
+              <a:sym typeface="+mn-ea"/>
+            </a:endParaRPr>
+          </a:p>
+          <a:p>
+            <a:pPr indent="0" algn="l" fontAlgn="auto">
+              <a:lnSpc>
+                <a:spcPct val="125000"/>
+              </a:lnSpc>
+              <a:spcBef>
+                <a:spcPts val="0"/>
+              </a:spcBef>
+              <a:spcAft>
+                <a:spcPts val="0"/>
+              </a:spcAft>
+              <a:buClrTx/>
+              <a:buSzTx/>
+              <a:buFont typeface="Wingdings" panose="05000000000000000000" charset="0"/>
+              <a:buNone/>
+            </a:pPr>
+            <a:r>
+              <a:rPr lang="en-US" altLang="en-US" sz="2000" kern="100" dirty="0">
+                <a:solidFill>
+                  <a:srgbClr val="103380"/>
+                </a:solidFill>
+                <a:uFillTx/>
+                <a:latin typeface="微软雅黑" panose="020B0503020204020204" pitchFamily="34" charset="-122"/>
+                <a:ea typeface="微软雅黑" panose="020B0503020204020204" pitchFamily="34" charset="-122"/>
+                <a:sym typeface="+mn-ea"/>
+              </a:rPr>
+              <a:t> </a:t>
+            </a:r>
+            <a:r>
+              <a:rPr lang="zh-CN" altLang="en-US" sz="2000" kern="100" dirty="0">
+                <a:solidFill>
+                  <a:srgbClr val="103380"/>
+                </a:solidFill>
+                <a:uFillTx/>
+                <a:latin typeface="微软雅黑" panose="020B0503020204020204" pitchFamily="34" charset="-122"/>
+                <a:ea typeface="微软雅黑" panose="020B0503020204020204" pitchFamily="34" charset="-122"/>
+                <a:sym typeface="+mn-ea"/>
+              </a:rPr>
+              <a:t>可执行 </a:t>
+            </a:r>
+            <a:r>
+              <a:rPr lang="en-US" altLang="zh-CN" sz="2000" kern="100" dirty="0">
+                <a:solidFill>
+                  <a:srgbClr val="103380"/>
+                </a:solidFill>
+                <a:uFillTx/>
+                <a:latin typeface="微软雅黑" panose="020B0503020204020204" pitchFamily="34" charset="-122"/>
+                <a:ea typeface="微软雅黑" panose="020B0503020204020204" pitchFamily="34" charset="-122"/>
+                <a:sym typeface="+mn-ea"/>
+              </a:rPr>
+              <a:t>Demo </a:t>
+            </a:r>
+            <a:r>
+              <a:rPr lang="zh-CN" altLang="en-US" sz="2000" kern="100" dirty="0">
+                <a:solidFill>
+                  <a:srgbClr val="103380"/>
+                </a:solidFill>
+                <a:uFillTx/>
+                <a:latin typeface="微软雅黑" panose="020B0503020204020204" pitchFamily="34" charset="-122"/>
+                <a:ea typeface="微软雅黑" panose="020B0503020204020204" pitchFamily="34" charset="-122"/>
+                <a:sym typeface="+mn-ea"/>
+              </a:rPr>
+              <a:t>的快速启动脚本</a:t>
+            </a:r>
+            <a:endParaRPr lang="zh-CN" altLang="en-US" sz="2000" kern="100" dirty="0">
+              <a:solidFill>
+                <a:srgbClr val="103380"/>
+              </a:solidFill>
+              <a:uFillTx/>
+              <a:latin typeface="微软雅黑" panose="020B0503020204020204" pitchFamily="34" charset="-122"/>
+              <a:ea typeface="微软雅黑" panose="020B0503020204020204" pitchFamily="34" charset="-122"/>
+              <a:sym typeface="+mn-ea"/>
+            </a:endParaRPr>
+          </a:p>
+          <a:p>
+            <a:pPr indent="0" algn="l" fontAlgn="auto">
+              <a:lnSpc>
+                <a:spcPct val="125000"/>
+              </a:lnSpc>
+              <a:spcBef>
+                <a:spcPts val="0"/>
+              </a:spcBef>
+              <a:spcAft>
+                <a:spcPts val="0"/>
+              </a:spcAft>
+              <a:buClrTx/>
+              <a:buSzTx/>
+              <a:buFont typeface="Wingdings" panose="05000000000000000000" charset="0"/>
+              <a:buNone/>
+            </a:pPr>
+            <a:endParaRPr lang="en-US" altLang="zh-CN" sz="2000" b="1" kern="100" dirty="0">
+              <a:solidFill>
+                <a:srgbClr val="103380"/>
+              </a:solidFill>
+              <a:uFillTx/>
+              <a:latin typeface="微软雅黑" panose="020B0503020204020204" pitchFamily="34" charset="-122"/>
+              <a:ea typeface="微软雅黑" panose="020B0503020204020204" pitchFamily="34" charset="-122"/>
+              <a:sym typeface="+mn-ea"/>
+            </a:endParaRPr>
+          </a:p>
+          <a:p>
+            <a:pPr indent="0" algn="l" fontAlgn="auto">
+              <a:lnSpc>
+                <a:spcPct val="125000"/>
+              </a:lnSpc>
+              <a:spcBef>
+                <a:spcPts val="0"/>
+              </a:spcBef>
+              <a:spcAft>
+                <a:spcPts val="0"/>
+              </a:spcAft>
+              <a:buClrTx/>
+              <a:buSzTx/>
+              <a:buFont typeface="Wingdings" panose="05000000000000000000" charset="0"/>
+              <a:buNone/>
+            </a:pPr>
+            <a:endParaRPr lang="en-US" altLang="zh-CN" sz="2000" b="1" kern="100" dirty="0">
+              <a:solidFill>
+                <a:srgbClr val="103380"/>
+              </a:solidFill>
+              <a:uFillTx/>
+              <a:latin typeface="微软雅黑" panose="020B0503020204020204" pitchFamily="34" charset="-122"/>
+              <a:ea typeface="微软雅黑" panose="020B0503020204020204" pitchFamily="34" charset="-122"/>
+              <a:sym typeface="+mn-ea"/>
+            </a:endParaRPr>
+          </a:p>
+          <a:p>
+            <a:pPr indent="0" algn="l" fontAlgn="auto">
+              <a:lnSpc>
+                <a:spcPct val="125000"/>
+              </a:lnSpc>
+              <a:spcBef>
+                <a:spcPts val="0"/>
+              </a:spcBef>
+              <a:spcAft>
+                <a:spcPts val="0"/>
+              </a:spcAft>
+              <a:buClrTx/>
+              <a:buSzTx/>
+              <a:buFont typeface="Arial" panose="020B0604020202020204" pitchFamily="34" charset="0"/>
+              <a:buNone/>
+            </a:pPr>
+            <a:endParaRPr lang="en-US" altLang="zh-CN" sz="2000" b="1" kern="100" dirty="0">
+              <a:solidFill>
+                <a:srgbClr val="103380"/>
+              </a:solidFill>
+              <a:uFillTx/>
+              <a:latin typeface="微软雅黑" panose="020B0503020204020204" pitchFamily="34" charset="-122"/>
+              <a:ea typeface="微软雅黑" panose="020B0503020204020204" pitchFamily="34" charset="-122"/>
+              <a:sym typeface="+mn-ea"/>
+            </a:endParaRPr>
+          </a:p>
+        </p:txBody>
+      </p:sp>
+      <p:pic>
+        <p:nvPicPr>
+          <p:cNvPr id="3" name="图片 2"/>
+          <p:cNvPicPr>
+            <a:picLocks noChangeAspect="1"/>
+          </p:cNvPicPr>
+          <p:nvPr/>
+        </p:nvPicPr>
+        <p:blipFill>
+          <a:blip r:embed="rId1"/>
+          <a:stretch>
+            <a:fillRect/>
+          </a:stretch>
+        </p:blipFill>
+        <p:spPr>
+          <a:xfrm>
+            <a:off x="200660" y="3879215"/>
+            <a:ext cx="6436995" cy="1083945"/>
+          </a:xfrm>
+          <a:prstGeom prst="rect">
+            <a:avLst/>
+          </a:prstGeom>
+        </p:spPr>
+      </p:pic>
+      <p:pic>
+        <p:nvPicPr>
+          <p:cNvPr id="4" name="图片 3"/>
+          <p:cNvPicPr>
+            <a:picLocks noChangeAspect="1"/>
+          </p:cNvPicPr>
+          <p:nvPr/>
+        </p:nvPicPr>
+        <p:blipFill>
+          <a:blip r:embed="rId2"/>
+          <a:stretch>
+            <a:fillRect/>
+          </a:stretch>
+        </p:blipFill>
+        <p:spPr>
+          <a:xfrm>
+            <a:off x="6541770" y="3322320"/>
+            <a:ext cx="5636260" cy="2529205"/>
+          </a:xfrm>
+          <a:prstGeom prst="rect">
+            <a:avLst/>
+          </a:prstGeom>
+        </p:spPr>
+      </p:pic>
+    </p:spTree>
+  </p:cSld>
+  <p:clrMapOvr>
+    <a:masterClrMapping/>
+  </p:clrMapOvr>
+</p:sld>
+</file>
+
+<file path=ppt/slides/slide17.xml><?xml version="1.0" encoding="utf-8"?>
+<p:sld xmlns:a="http://schemas.openxmlformats.org/drawingml/2006/main" xmlns:r="http://schemas.openxmlformats.org/officeDocument/2006/relationships" xmlns:p="http://schemas.openxmlformats.org/presentationml/2006/main">
+  <p:cSld>
+    <p:spTree>
+      <p:nvGrpSpPr>
+        <p:cNvPr id="1" name=""/>
+        <p:cNvGrpSpPr/>
+        <p:nvPr/>
+      </p:nvGrpSpPr>
       <p:grpSpPr>
         <a:xfrm>
           <a:off x="0" y="0"/>

--- a/docs/reference/task8-analysis.pptx
+++ b/docs/reference/task8-analysis.pptx
@@ -5,7 +5,7 @@
     <p:sldMasterId id="2147483648" r:id="rId1"/>
   </p:sldMasterIdLst>
   <p:notesMasterIdLst>
-    <p:notesMasterId r:id="rId20"/>
+    <p:notesMasterId r:id="rId17"/>
   </p:notesMasterIdLst>
   <p:sldIdLst>
     <p:sldId id="256" r:id="rId3"/>
@@ -22,9 +22,9 @@
     <p:sldId id="2885" r:id="rId14"/>
     <p:sldId id="2888" r:id="rId15"/>
     <p:sldId id="2889" r:id="rId16"/>
-    <p:sldId id="2886" r:id="rId17"/>
-    <p:sldId id="2887" r:id="rId18"/>
-    <p:sldId id="1364" r:id="rId19"/>
+    <p:sldId id="2886" r:id="rId18"/>
+    <p:sldId id="2887" r:id="rId19"/>
+    <p:sldId id="1364" r:id="rId20"/>
   </p:sldIdLst>
   <p:sldSz cx="12192000" cy="6858000"/>
   <p:notesSz cx="6858000" cy="9144000"/>
@@ -534,6 +534,54 @@
 </file>
 
 <file path=ppt/notesSlides/notesSlide1.xml><?xml version="1.0" encoding="utf-8"?>
+<p:notes xmlns:a="http://schemas.openxmlformats.org/drawingml/2006/main" xmlns:r="http://schemas.openxmlformats.org/officeDocument/2006/relationships" xmlns:p="http://schemas.openxmlformats.org/presentationml/2006/main">
+  <p:cSld>
+    <p:spTree>
+      <p:nvGrpSpPr>
+        <p:cNvPr id="1" name=""/>
+        <p:cNvGrpSpPr/>
+        <p:nvPr/>
+      </p:nvGrpSpPr>
+      <p:grpSpPr/>
+      <p:sp>
+        <p:nvSpPr>
+          <p:cNvPr id="2" name="幻灯片图像占位符 1"/>
+          <p:cNvSpPr>
+            <a:spLocks noGrp="1"/>
+          </p:cNvSpPr>
+          <p:nvPr>
+            <p:ph type="sldImg" idx="2"/>
+          </p:nvPr>
+        </p:nvSpPr>
+        <p:spPr/>
+      </p:sp>
+      <p:sp>
+        <p:nvSpPr>
+          <p:cNvPr id="3" name="文本占位符 2"/>
+          <p:cNvSpPr>
+            <a:spLocks noGrp="1"/>
+          </p:cNvSpPr>
+          <p:nvPr>
+            <p:ph type="body" idx="3"/>
+          </p:nvPr>
+        </p:nvSpPr>
+        <p:spPr/>
+        <p:txBody>
+          <a:bodyPr/>
+          <a:p>
+            <a:endParaRPr lang="zh-CN" altLang="en-US"/>
+          </a:p>
+        </p:txBody>
+      </p:sp>
+    </p:spTree>
+  </p:cSld>
+  <p:clrMapOvr>
+    <a:masterClrMapping/>
+  </p:clrMapOvr>
+</p:notes>
+</file>
+
+<file path=ppt/notesSlides/notesSlide2.xml><?xml version="1.0" encoding="utf-8"?>
 <p:notes xmlns:a="http://schemas.openxmlformats.org/drawingml/2006/main" xmlns:r="http://schemas.openxmlformats.org/officeDocument/2006/relationships" xmlns:p="http://schemas.openxmlformats.org/presentationml/2006/main">
   <p:cSld>
     <p:spTree>
@@ -33499,11 +33547,13 @@
           <a:bodyPr/>
           <a:p>
             <a:r>
-              <a:t>选择与</a:t>
-            </a:r>
-            <a:r>
-              <a:t>分工</a:t>
-            </a:r>
+              <a:t>选择与分工</a:t>
+            </a:r>
+            <a:r>
+              <a:rPr lang="en-US" altLang="zh-CN"/>
+              <a:t> pua</a:t>
+            </a:r>
+            <a:endParaRPr lang="en-US" altLang="zh-CN"/>
           </a:p>
         </p:txBody>
       </p:sp>
@@ -34647,8 +34697,16 @@
                         <a:rPr lang="zh-CN" altLang="en-US" sz="1200"/>
                       </a:br>
                       <a:r>
+                        <a:rPr lang="zh-CN" altLang="en-US" sz="1200">
+                          <a:highlight>
+                            <a:srgbClr val="FFFF00"/>
+                          </a:highlight>
+                        </a:rPr>
+                        <a:t>优先跨源问答</a:t>
+                      </a:r>
+                      <a:r>
                         <a:rPr lang="zh-CN" altLang="en-US" sz="1200"/>
-                        <a:t>优先跨源问答（</a:t>
+                        <a:t>（</a:t>
                       </a:r>
                       <a:r>
                         <a:rPr lang="en-US" altLang="zh-CN" sz="1200"/>
@@ -35176,7 +35234,23 @@
                             <a:srgbClr val="FFFF00"/>
                           </a:highlight>
                         </a:rPr>
-                        <a:t>优先跨源问答</a:t>
+                        <a:t>优先</a:t>
+                      </a:r>
+                      <a:r>
+                        <a:rPr lang="en-US" altLang="zh-CN" sz="1200" b="1">
+                          <a:highlight>
+                            <a:srgbClr val="FFFF00"/>
+                          </a:highlight>
+                        </a:rPr>
+                        <a:t>:</a:t>
+                      </a:r>
+                      <a:r>
+                        <a:rPr lang="zh-CN" altLang="en-US" sz="1200" b="1">
+                          <a:highlight>
+                            <a:srgbClr val="FFFF00"/>
+                          </a:highlight>
+                        </a:rPr>
+                        <a:t>跨源问答</a:t>
                       </a:r>
                       <a:r>
                         <a:rPr lang="zh-CN" altLang="en-US" sz="1200">
